--- a/2026/LEC/05-1 Методы машинного обучения для анализа ВР.pptx
+++ b/2026/LEC/05-1 Методы машинного обучения для анализа ВР.pptx
@@ -5,29 +5,33 @@
     <p:sldMasterId id="2147483648" r:id="rId1"/>
   </p:sldMasterIdLst>
   <p:notesMasterIdLst>
-    <p:notesMasterId r:id="rId22"/>
+    <p:notesMasterId r:id="rId26"/>
   </p:notesMasterIdLst>
   <p:sldIdLst>
     <p:sldId id="256" r:id="rId2"/>
-    <p:sldId id="258" r:id="rId3"/>
-    <p:sldId id="260" r:id="rId4"/>
-    <p:sldId id="275" r:id="rId5"/>
-    <p:sldId id="276" r:id="rId6"/>
-    <p:sldId id="278" r:id="rId7"/>
-    <p:sldId id="259" r:id="rId8"/>
-    <p:sldId id="269" r:id="rId9"/>
-    <p:sldId id="261" r:id="rId10"/>
-    <p:sldId id="264" r:id="rId11"/>
-    <p:sldId id="263" r:id="rId12"/>
-    <p:sldId id="270" r:id="rId13"/>
-    <p:sldId id="266" r:id="rId14"/>
-    <p:sldId id="271" r:id="rId15"/>
-    <p:sldId id="272" r:id="rId16"/>
-    <p:sldId id="279" r:id="rId17"/>
-    <p:sldId id="273" r:id="rId18"/>
-    <p:sldId id="277" r:id="rId19"/>
-    <p:sldId id="280" r:id="rId20"/>
-    <p:sldId id="274" r:id="rId21"/>
+    <p:sldId id="281" r:id="rId3"/>
+    <p:sldId id="258" r:id="rId4"/>
+    <p:sldId id="260" r:id="rId5"/>
+    <p:sldId id="282" r:id="rId6"/>
+    <p:sldId id="275" r:id="rId7"/>
+    <p:sldId id="276" r:id="rId8"/>
+    <p:sldId id="278" r:id="rId9"/>
+    <p:sldId id="284" r:id="rId10"/>
+    <p:sldId id="259" r:id="rId11"/>
+    <p:sldId id="269" r:id="rId12"/>
+    <p:sldId id="261" r:id="rId13"/>
+    <p:sldId id="264" r:id="rId14"/>
+    <p:sldId id="263" r:id="rId15"/>
+    <p:sldId id="270" r:id="rId16"/>
+    <p:sldId id="266" r:id="rId17"/>
+    <p:sldId id="271" r:id="rId18"/>
+    <p:sldId id="283" r:id="rId19"/>
+    <p:sldId id="272" r:id="rId20"/>
+    <p:sldId id="279" r:id="rId21"/>
+    <p:sldId id="273" r:id="rId22"/>
+    <p:sldId id="277" r:id="rId23"/>
+    <p:sldId id="280" r:id="rId24"/>
+    <p:sldId id="274" r:id="rId25"/>
   </p:sldIdLst>
   <p:sldSz cx="12192000" cy="6858000"/>
   <p:notesSz cx="6858000" cy="9144000"/>
@@ -242,7 +246,7 @@
           <a:p>
             <a:fld id="{803A9DE4-6CFD-4732-953B-EF950A6B3001}" type="datetimeFigureOut">
               <a:rPr lang="ru-RU" smtClean="0"/>
-              <a:t>20.08.2025</a:t>
+              <a:t>09.04.2026</a:t>
             </a:fld>
             <a:endParaRPr lang="ru-RU"/>
           </a:p>
@@ -553,80 +557,6 @@
           <a:bodyPr/>
           <a:lstStyle/>
           <a:p>
-            <a:pPr>
-              <a:lnSpc>
-                <a:spcPct val="120000"/>
-              </a:lnSpc>
-              <a:spcBef>
-                <a:spcPts val="0"/>
-              </a:spcBef>
-            </a:pPr>
-            <a:r>
-              <a:rPr lang="ru-RU" altLang="ru-RU" sz="2300" b="1" dirty="0"/>
-              <a:t>Эндогенные ф</a:t>
-            </a:r>
-            <a:r>
-              <a:rPr lang="en-US" sz="2300" b="1" dirty="0" err="1"/>
-              <a:t>акторы</a:t>
-            </a:r>
-            <a:r>
-              <a:rPr lang="en-US" sz="2300" dirty="0"/>
-              <a:t>, </a:t>
-            </a:r>
-            <a:r>
-              <a:rPr lang="en-US" sz="2300" dirty="0" err="1"/>
-              <a:t>очевидно</a:t>
-            </a:r>
-            <a:r>
-              <a:rPr lang="en-US" sz="2300" dirty="0"/>
-              <a:t> </a:t>
-            </a:r>
-            <a:r>
-              <a:rPr lang="en-US" sz="2300" dirty="0" err="1"/>
-              <a:t>коррелирующие</a:t>
-            </a:r>
-            <a:r>
-              <a:rPr lang="en-US" sz="2300" dirty="0"/>
-              <a:t> </a:t>
-            </a:r>
-            <a:r>
-              <a:rPr lang="en-US" sz="2300" dirty="0" err="1"/>
-              <a:t>с</a:t>
-            </a:r>
-            <a:r>
-              <a:rPr lang="en-US" sz="2300" dirty="0"/>
-              <a:t> </a:t>
-            </a:r>
-            <a:r>
-              <a:rPr lang="ru-RU" sz="2300" dirty="0"/>
-              <a:t>ВР</a:t>
-            </a:r>
-            <a:r>
-              <a:rPr lang="en-US" sz="2300" dirty="0"/>
-              <a:t>. </a:t>
-            </a:r>
-            <a:endParaRPr lang="ru-RU" sz="2300" dirty="0"/>
-          </a:p>
-          <a:p>
-            <a:pPr lvl="1">
-              <a:lnSpc>
-                <a:spcPct val="120000"/>
-              </a:lnSpc>
-              <a:spcBef>
-                <a:spcPts val="0"/>
-              </a:spcBef>
-            </a:pPr>
-            <a:r>
-              <a:rPr lang="ru-RU" sz="2300" dirty="0"/>
-              <a:t>Лаги ВР, преобразованные значения, значения автокорреляций, тренда или сезонности, и </a:t>
-            </a:r>
-            <a:r>
-              <a:rPr lang="ru-RU" sz="2300" dirty="0" err="1"/>
-              <a:t>тд</a:t>
-            </a:r>
-            <a:endParaRPr lang="ru-RU" sz="2300" dirty="0"/>
-          </a:p>
-          <a:p>
             <a:endParaRPr lang="ru-RU" dirty="0"/>
           </a:p>
         </p:txBody>
@@ -638,7 +568,7 @@
             <a:spLocks noGrp="1"/>
           </p:cNvSpPr>
           <p:nvPr>
-            <p:ph type="sldNum" sz="quarter" idx="5"/>
+            <p:ph type="sldNum" sz="quarter" idx="10"/>
           </p:nvPr>
         </p:nvSpPr>
         <p:spPr/>
@@ -646,9 +576,9 @@
           <a:bodyPr/>
           <a:lstStyle/>
           <a:p>
-            <a:fld id="{26E69999-DA45-44A1-83D2-44E2B03D187B}" type="slidenum">
+            <a:fld id="{9DA1EE30-E435-D745-B23A-FF31C831763F}" type="slidenum">
               <a:rPr lang="ru-RU" smtClean="0"/>
-              <a:t>13</a:t>
+              <a:t>2</a:t>
             </a:fld>
             <a:endParaRPr lang="ru-RU"/>
           </a:p>
@@ -657,7 +587,7 @@
     </p:spTree>
     <p:extLst>
       <p:ext uri="{BB962C8B-B14F-4D97-AF65-F5344CB8AC3E}">
-        <p14:creationId xmlns:p14="http://schemas.microsoft.com/office/powerpoint/2010/main" val="3308149847"/>
+        <p14:creationId xmlns:p14="http://schemas.microsoft.com/office/powerpoint/2010/main" val="160347686"/>
       </p:ext>
     </p:extLst>
   </p:cSld>
@@ -711,129 +641,78 @@
           <a:bodyPr/>
           <a:lstStyle/>
           <a:p>
-            <a:r>
-              <a:rPr lang="ru-RU" sz="1200" b="1" i="0" kern="1200" dirty="0">
-                <a:solidFill>
-                  <a:schemeClr val="tx1"/>
-                </a:solidFill>
-                <a:effectLst/>
-                <a:latin typeface="+mn-lt"/>
-                <a:ea typeface="+mn-ea"/>
-                <a:cs typeface="+mn-cs"/>
-              </a:rPr>
-              <a:t>Признаки </a:t>
-            </a:r>
-            <a:r>
-              <a:rPr lang="ru-RU" sz="1200" b="1" i="0" kern="1200" dirty="0" err="1">
-                <a:solidFill>
-                  <a:schemeClr val="tx1"/>
-                </a:solidFill>
-                <a:effectLst/>
-                <a:latin typeface="+mn-lt"/>
-                <a:ea typeface="+mn-ea"/>
-                <a:cs typeface="+mn-cs"/>
-              </a:rPr>
-              <a:t>data</a:t>
-            </a:r>
-            <a:r>
-              <a:rPr lang="ru-RU" sz="1200" b="1" i="0" kern="1200" dirty="0">
-                <a:solidFill>
-                  <a:schemeClr val="tx1"/>
-                </a:solidFill>
-                <a:effectLst/>
-                <a:latin typeface="+mn-lt"/>
-                <a:ea typeface="+mn-ea"/>
-                <a:cs typeface="+mn-cs"/>
-              </a:rPr>
+            <a:pPr>
+              <a:lnSpc>
+                <a:spcPct val="120000"/>
+              </a:lnSpc>
+              <a:spcBef>
+                <a:spcPts val="0"/>
+              </a:spcBef>
+            </a:pPr>
+            <a:r>
+              <a:rPr lang="ru-RU" altLang="ru-RU" sz="2300" b="1" dirty="0"/>
+              <a:t>Эндогенные ф</a:t>
+            </a:r>
+            <a:r>
+              <a:rPr lang="en-US" sz="2300" b="1" dirty="0" err="1"/>
+              <a:t>акторы</a:t>
+            </a:r>
+            <a:r>
+              <a:rPr lang="en-US" sz="2300" dirty="0"/>
+              <a:t>, </a:t>
+            </a:r>
+            <a:r>
+              <a:rPr lang="en-US" sz="2300" dirty="0" err="1"/>
+              <a:t>очевидно</a:t>
+            </a:r>
+            <a:r>
+              <a:rPr lang="en-US" sz="2300" dirty="0"/>
               <a:t> </a:t>
             </a:r>
             <a:r>
-              <a:rPr lang="ru-RU" sz="1200" b="1" i="0" kern="1200" dirty="0" err="1">
-                <a:solidFill>
-                  <a:schemeClr val="tx1"/>
-                </a:solidFill>
-                <a:effectLst/>
-                <a:latin typeface="+mn-lt"/>
-                <a:ea typeface="+mn-ea"/>
-                <a:cs typeface="+mn-cs"/>
-              </a:rPr>
-              <a:t>leakage</a:t>
-            </a:r>
-            <a:r>
-              <a:rPr lang="ru-RU" sz="1200" b="1" i="0" kern="1200" dirty="0">
-                <a:solidFill>
-                  <a:schemeClr val="tx1"/>
-                </a:solidFill>
-                <a:effectLst/>
-                <a:latin typeface="+mn-lt"/>
-                <a:ea typeface="+mn-ea"/>
-                <a:cs typeface="+mn-cs"/>
-              </a:rPr>
-              <a:t>:</a:t>
-            </a:r>
-          </a:p>
-          <a:p>
-            <a:r>
-              <a:rPr lang="ru-RU" sz="1200" b="0" i="0" kern="1200" dirty="0">
-                <a:solidFill>
-                  <a:schemeClr val="tx1"/>
-                </a:solidFill>
-                <a:effectLst/>
-                <a:latin typeface="+mn-lt"/>
-                <a:ea typeface="+mn-ea"/>
-                <a:cs typeface="+mn-cs"/>
-              </a:rPr>
-              <a:t>Резко высокая точность на </a:t>
-            </a:r>
-            <a:r>
-              <a:rPr lang="ru-RU" sz="1200" b="0" i="0" kern="1200" dirty="0" err="1">
-                <a:solidFill>
-                  <a:schemeClr val="tx1"/>
-                </a:solidFill>
-                <a:effectLst/>
-                <a:latin typeface="+mn-lt"/>
-                <a:ea typeface="+mn-ea"/>
-                <a:cs typeface="+mn-cs"/>
-              </a:rPr>
-              <a:t>валидации</a:t>
-            </a:r>
-            <a:endParaRPr lang="ru-RU" sz="1200" b="0" i="0" kern="1200" dirty="0">
-              <a:solidFill>
-                <a:schemeClr val="tx1"/>
-              </a:solidFill>
-              <a:effectLst/>
-              <a:latin typeface="+mn-lt"/>
-              <a:ea typeface="+mn-ea"/>
-              <a:cs typeface="+mn-cs"/>
-            </a:endParaRPr>
-          </a:p>
-          <a:p>
-            <a:r>
-              <a:rPr lang="ru-RU" sz="1200" b="0" i="0" kern="1200" dirty="0">
-                <a:solidFill>
-                  <a:schemeClr val="tx1"/>
-                </a:solidFill>
-                <a:effectLst/>
-                <a:latin typeface="+mn-lt"/>
-                <a:ea typeface="+mn-ea"/>
-                <a:cs typeface="+mn-cs"/>
-              </a:rPr>
-              <a:t>Модель "знает" о событиях, которые ещё не произошли</a:t>
-            </a:r>
-          </a:p>
-          <a:p>
-            <a:r>
-              <a:rPr lang="ru-RU" sz="1200" b="0" i="0" kern="1200" dirty="0">
-                <a:solidFill>
-                  <a:schemeClr val="tx1"/>
-                </a:solidFill>
-                <a:effectLst/>
-                <a:latin typeface="+mn-lt"/>
-                <a:ea typeface="+mn-ea"/>
-                <a:cs typeface="+mn-cs"/>
-              </a:rPr>
-              <a:t>Важность признака слишком высока</a:t>
-            </a:r>
+              <a:rPr lang="en-US" sz="2300" dirty="0" err="1"/>
+              <a:t>коррелирующие</a:t>
+            </a:r>
+            <a:r>
+              <a:rPr lang="en-US" sz="2300" dirty="0"/>
+              <a:t> </a:t>
+            </a:r>
+            <a:r>
+              <a:rPr lang="en-US" sz="2300" dirty="0" err="1"/>
+              <a:t>с</a:t>
+            </a:r>
+            <a:r>
+              <a:rPr lang="en-US" sz="2300" dirty="0"/>
+              <a:t> </a:t>
+            </a:r>
+            <a:r>
+              <a:rPr lang="ru-RU" sz="2300" dirty="0"/>
+              <a:t>ВР</a:t>
+            </a:r>
+            <a:r>
+              <a:rPr lang="en-US" sz="2300" dirty="0"/>
+              <a:t>. </a:t>
+            </a:r>
+            <a:endParaRPr lang="ru-RU" sz="2300" dirty="0"/>
+          </a:p>
+          <a:p>
+            <a:pPr lvl="1">
+              <a:lnSpc>
+                <a:spcPct val="120000"/>
+              </a:lnSpc>
+              <a:spcBef>
+                <a:spcPts val="0"/>
+              </a:spcBef>
+            </a:pPr>
+            <a:r>
+              <a:rPr lang="ru-RU" sz="2300" dirty="0"/>
+              <a:t>Лаги ВР, преобразованные значения, значения автокорреляций, тренда или сезонности, и </a:t>
+            </a:r>
+            <a:r>
+              <a:rPr lang="ru-RU" sz="2300" dirty="0" err="1"/>
+              <a:t>тд</a:t>
+            </a:r>
+            <a:endParaRPr lang="ru-RU" sz="2300" dirty="0"/>
           </a:p>
           <a:p>
             <a:endParaRPr lang="ru-RU" dirty="0"/>
@@ -847,7 +726,7 @@
             <a:spLocks noGrp="1"/>
           </p:cNvSpPr>
           <p:nvPr>
-            <p:ph type="sldNum" sz="quarter" idx="10"/>
+            <p:ph type="sldNum" sz="quarter" idx="5"/>
           </p:nvPr>
         </p:nvSpPr>
         <p:spPr/>
@@ -857,7 +736,7 @@
           <a:p>
             <a:fld id="{26E69999-DA45-44A1-83D2-44E2B03D187B}" type="slidenum">
               <a:rPr lang="ru-RU" smtClean="0"/>
-              <a:t>14</a:t>
+              <a:t>16</a:t>
             </a:fld>
             <a:endParaRPr lang="ru-RU"/>
           </a:p>
@@ -866,7 +745,7 @@
     </p:spTree>
     <p:extLst>
       <p:ext uri="{BB962C8B-B14F-4D97-AF65-F5344CB8AC3E}">
-        <p14:creationId xmlns:p14="http://schemas.microsoft.com/office/powerpoint/2010/main" val="1065724184"/>
+        <p14:creationId xmlns:p14="http://schemas.microsoft.com/office/powerpoint/2010/main" val="3308149847"/>
       </p:ext>
     </p:extLst>
   </p:cSld>
@@ -920,6 +799,424 @@
           <a:bodyPr/>
           <a:lstStyle/>
           <a:p>
+            <a:r>
+              <a:rPr lang="ru-RU" sz="1200" b="1" i="0" kern="1200" dirty="0">
+                <a:solidFill>
+                  <a:schemeClr val="tx1"/>
+                </a:solidFill>
+                <a:effectLst/>
+                <a:latin typeface="+mn-lt"/>
+                <a:ea typeface="+mn-ea"/>
+                <a:cs typeface="+mn-cs"/>
+              </a:rPr>
+              <a:t>Признаки </a:t>
+            </a:r>
+            <a:r>
+              <a:rPr lang="ru-RU" sz="1200" b="1" i="0" kern="1200" dirty="0" err="1">
+                <a:solidFill>
+                  <a:schemeClr val="tx1"/>
+                </a:solidFill>
+                <a:effectLst/>
+                <a:latin typeface="+mn-lt"/>
+                <a:ea typeface="+mn-ea"/>
+                <a:cs typeface="+mn-cs"/>
+              </a:rPr>
+              <a:t>data</a:t>
+            </a:r>
+            <a:r>
+              <a:rPr lang="ru-RU" sz="1200" b="1" i="0" kern="1200" dirty="0">
+                <a:solidFill>
+                  <a:schemeClr val="tx1"/>
+                </a:solidFill>
+                <a:effectLst/>
+                <a:latin typeface="+mn-lt"/>
+                <a:ea typeface="+mn-ea"/>
+                <a:cs typeface="+mn-cs"/>
+              </a:rPr>
+              <a:t> </a:t>
+            </a:r>
+            <a:r>
+              <a:rPr lang="ru-RU" sz="1200" b="1" i="0" kern="1200" dirty="0" err="1">
+                <a:solidFill>
+                  <a:schemeClr val="tx1"/>
+                </a:solidFill>
+                <a:effectLst/>
+                <a:latin typeface="+mn-lt"/>
+                <a:ea typeface="+mn-ea"/>
+                <a:cs typeface="+mn-cs"/>
+              </a:rPr>
+              <a:t>leakage</a:t>
+            </a:r>
+            <a:r>
+              <a:rPr lang="ru-RU" sz="1200" b="1" i="0" kern="1200" dirty="0">
+                <a:solidFill>
+                  <a:schemeClr val="tx1"/>
+                </a:solidFill>
+                <a:effectLst/>
+                <a:latin typeface="+mn-lt"/>
+                <a:ea typeface="+mn-ea"/>
+                <a:cs typeface="+mn-cs"/>
+              </a:rPr>
+              <a:t>:</a:t>
+            </a:r>
+          </a:p>
+          <a:p>
+            <a:r>
+              <a:rPr lang="ru-RU" sz="1200" b="0" i="0" kern="1200" dirty="0">
+                <a:solidFill>
+                  <a:schemeClr val="tx1"/>
+                </a:solidFill>
+                <a:effectLst/>
+                <a:latin typeface="+mn-lt"/>
+                <a:ea typeface="+mn-ea"/>
+                <a:cs typeface="+mn-cs"/>
+              </a:rPr>
+              <a:t>Резко высокая точность на </a:t>
+            </a:r>
+            <a:r>
+              <a:rPr lang="ru-RU" sz="1200" b="0" i="0" kern="1200" dirty="0" err="1">
+                <a:solidFill>
+                  <a:schemeClr val="tx1"/>
+                </a:solidFill>
+                <a:effectLst/>
+                <a:latin typeface="+mn-lt"/>
+                <a:ea typeface="+mn-ea"/>
+                <a:cs typeface="+mn-cs"/>
+              </a:rPr>
+              <a:t>валидации</a:t>
+            </a:r>
+            <a:endParaRPr lang="ru-RU" sz="1200" b="0" i="0" kern="1200" dirty="0">
+              <a:solidFill>
+                <a:schemeClr val="tx1"/>
+              </a:solidFill>
+              <a:effectLst/>
+              <a:latin typeface="+mn-lt"/>
+              <a:ea typeface="+mn-ea"/>
+              <a:cs typeface="+mn-cs"/>
+            </a:endParaRPr>
+          </a:p>
+          <a:p>
+            <a:r>
+              <a:rPr lang="ru-RU" sz="1200" b="0" i="0" kern="1200" dirty="0">
+                <a:solidFill>
+                  <a:schemeClr val="tx1"/>
+                </a:solidFill>
+                <a:effectLst/>
+                <a:latin typeface="+mn-lt"/>
+                <a:ea typeface="+mn-ea"/>
+                <a:cs typeface="+mn-cs"/>
+              </a:rPr>
+              <a:t>Модель "знает" о событиях, которые ещё не произошли</a:t>
+            </a:r>
+          </a:p>
+          <a:p>
+            <a:r>
+              <a:rPr lang="ru-RU" sz="1200" b="0" i="0" kern="1200" dirty="0">
+                <a:solidFill>
+                  <a:schemeClr val="tx1"/>
+                </a:solidFill>
+                <a:effectLst/>
+                <a:latin typeface="+mn-lt"/>
+                <a:ea typeface="+mn-ea"/>
+                <a:cs typeface="+mn-cs"/>
+              </a:rPr>
+              <a:t>Важность признака слишком высока</a:t>
+            </a:r>
+          </a:p>
+          <a:p>
+            <a:endParaRPr lang="ru-RU" dirty="0"/>
+          </a:p>
+        </p:txBody>
+      </p:sp>
+      <p:sp>
+        <p:nvSpPr>
+          <p:cNvPr id="4" name="Номер слайда 3"/>
+          <p:cNvSpPr>
+            <a:spLocks noGrp="1"/>
+          </p:cNvSpPr>
+          <p:nvPr>
+            <p:ph type="sldNum" sz="quarter" idx="10"/>
+          </p:nvPr>
+        </p:nvSpPr>
+        <p:spPr/>
+        <p:txBody>
+          <a:bodyPr/>
+          <a:lstStyle/>
+          <a:p>
+            <a:fld id="{26E69999-DA45-44A1-83D2-44E2B03D187B}" type="slidenum">
+              <a:rPr lang="ru-RU" smtClean="0"/>
+              <a:t>17</a:t>
+            </a:fld>
+            <a:endParaRPr lang="ru-RU"/>
+          </a:p>
+        </p:txBody>
+      </p:sp>
+    </p:spTree>
+    <p:extLst>
+      <p:ext uri="{BB962C8B-B14F-4D97-AF65-F5344CB8AC3E}">
+        <p14:creationId xmlns:p14="http://schemas.microsoft.com/office/powerpoint/2010/main" val="1065724184"/>
+      </p:ext>
+    </p:extLst>
+  </p:cSld>
+  <p:clrMapOvr>
+    <a:masterClrMapping/>
+  </p:clrMapOvr>
+</p:notes>
+</file>
+
+<file path=ppt/notesSlides/notesSlide4.xml><?xml version="1.0" encoding="utf-8"?>
+<p:notes xmlns:a="http://schemas.openxmlformats.org/drawingml/2006/main" xmlns:r="http://schemas.openxmlformats.org/officeDocument/2006/relationships" xmlns:p="http://schemas.openxmlformats.org/presentationml/2006/main">
+  <p:cSld>
+    <p:spTree>
+      <p:nvGrpSpPr>
+        <p:cNvPr id="1" name=""/>
+        <p:cNvGrpSpPr/>
+        <p:nvPr/>
+      </p:nvGrpSpPr>
+      <p:grpSpPr>
+        <a:xfrm>
+          <a:off x="0" y="0"/>
+          <a:ext cx="0" cy="0"/>
+          <a:chOff x="0" y="0"/>
+          <a:chExt cx="0" cy="0"/>
+        </a:xfrm>
+      </p:grpSpPr>
+      <p:sp>
+        <p:nvSpPr>
+          <p:cNvPr id="2" name="Образ слайда 1"/>
+          <p:cNvSpPr>
+            <a:spLocks noGrp="1" noRot="1" noChangeAspect="1"/>
+          </p:cNvSpPr>
+          <p:nvPr>
+            <p:ph type="sldImg"/>
+          </p:nvPr>
+        </p:nvSpPr>
+        <p:spPr/>
+      </p:sp>
+      <p:sp>
+        <p:nvSpPr>
+          <p:cNvPr id="3" name="Заметки 2"/>
+          <p:cNvSpPr>
+            <a:spLocks noGrp="1"/>
+          </p:cNvSpPr>
+          <p:nvPr>
+            <p:ph type="body" idx="1"/>
+          </p:nvPr>
+        </p:nvSpPr>
+        <p:spPr/>
+        <p:txBody>
+          <a:bodyPr/>
+          <a:lstStyle/>
+          <a:p>
+            <a:r>
+              <a:rPr lang="ru-RU" sz="1200" b="1" i="0" kern="1200" dirty="0">
+                <a:solidFill>
+                  <a:schemeClr val="tx1"/>
+                </a:solidFill>
+                <a:effectLst/>
+                <a:latin typeface="+mn-lt"/>
+                <a:ea typeface="+mn-ea"/>
+                <a:cs typeface="+mn-cs"/>
+              </a:rPr>
+              <a:t>Признаки </a:t>
+            </a:r>
+            <a:r>
+              <a:rPr lang="ru-RU" sz="1200" b="1" i="0" kern="1200" dirty="0" err="1">
+                <a:solidFill>
+                  <a:schemeClr val="tx1"/>
+                </a:solidFill>
+                <a:effectLst/>
+                <a:latin typeface="+mn-lt"/>
+                <a:ea typeface="+mn-ea"/>
+                <a:cs typeface="+mn-cs"/>
+              </a:rPr>
+              <a:t>data</a:t>
+            </a:r>
+            <a:r>
+              <a:rPr lang="ru-RU" sz="1200" b="1" i="0" kern="1200" dirty="0">
+                <a:solidFill>
+                  <a:schemeClr val="tx1"/>
+                </a:solidFill>
+                <a:effectLst/>
+                <a:latin typeface="+mn-lt"/>
+                <a:ea typeface="+mn-ea"/>
+                <a:cs typeface="+mn-cs"/>
+              </a:rPr>
+              <a:t> </a:t>
+            </a:r>
+            <a:r>
+              <a:rPr lang="ru-RU" sz="1200" b="1" i="0" kern="1200" dirty="0" err="1">
+                <a:solidFill>
+                  <a:schemeClr val="tx1"/>
+                </a:solidFill>
+                <a:effectLst/>
+                <a:latin typeface="+mn-lt"/>
+                <a:ea typeface="+mn-ea"/>
+                <a:cs typeface="+mn-cs"/>
+              </a:rPr>
+              <a:t>leakage</a:t>
+            </a:r>
+            <a:r>
+              <a:rPr lang="ru-RU" sz="1200" b="1" i="0" kern="1200" dirty="0">
+                <a:solidFill>
+                  <a:schemeClr val="tx1"/>
+                </a:solidFill>
+                <a:effectLst/>
+                <a:latin typeface="+mn-lt"/>
+                <a:ea typeface="+mn-ea"/>
+                <a:cs typeface="+mn-cs"/>
+              </a:rPr>
+              <a:t>:</a:t>
+            </a:r>
+          </a:p>
+          <a:p>
+            <a:r>
+              <a:rPr lang="ru-RU" sz="1200" b="0" i="0" kern="1200" dirty="0">
+                <a:solidFill>
+                  <a:schemeClr val="tx1"/>
+                </a:solidFill>
+                <a:effectLst/>
+                <a:latin typeface="+mn-lt"/>
+                <a:ea typeface="+mn-ea"/>
+                <a:cs typeface="+mn-cs"/>
+              </a:rPr>
+              <a:t>Резко высокая точность на </a:t>
+            </a:r>
+            <a:r>
+              <a:rPr lang="ru-RU" sz="1200" b="0" i="0" kern="1200" dirty="0" err="1">
+                <a:solidFill>
+                  <a:schemeClr val="tx1"/>
+                </a:solidFill>
+                <a:effectLst/>
+                <a:latin typeface="+mn-lt"/>
+                <a:ea typeface="+mn-ea"/>
+                <a:cs typeface="+mn-cs"/>
+              </a:rPr>
+              <a:t>валидации</a:t>
+            </a:r>
+            <a:endParaRPr lang="ru-RU" sz="1200" b="0" i="0" kern="1200" dirty="0">
+              <a:solidFill>
+                <a:schemeClr val="tx1"/>
+              </a:solidFill>
+              <a:effectLst/>
+              <a:latin typeface="+mn-lt"/>
+              <a:ea typeface="+mn-ea"/>
+              <a:cs typeface="+mn-cs"/>
+            </a:endParaRPr>
+          </a:p>
+          <a:p>
+            <a:r>
+              <a:rPr lang="ru-RU" sz="1200" b="0" i="0" kern="1200" dirty="0">
+                <a:solidFill>
+                  <a:schemeClr val="tx1"/>
+                </a:solidFill>
+                <a:effectLst/>
+                <a:latin typeface="+mn-lt"/>
+                <a:ea typeface="+mn-ea"/>
+                <a:cs typeface="+mn-cs"/>
+              </a:rPr>
+              <a:t>Модель "знает" о событиях, которые ещё не произошли</a:t>
+            </a:r>
+          </a:p>
+          <a:p>
+            <a:r>
+              <a:rPr lang="ru-RU" sz="1200" b="0" i="0" kern="1200" dirty="0">
+                <a:solidFill>
+                  <a:schemeClr val="tx1"/>
+                </a:solidFill>
+                <a:effectLst/>
+                <a:latin typeface="+mn-lt"/>
+                <a:ea typeface="+mn-ea"/>
+                <a:cs typeface="+mn-cs"/>
+              </a:rPr>
+              <a:t>Важность признака слишком высока</a:t>
+            </a:r>
+          </a:p>
+          <a:p>
+            <a:endParaRPr lang="ru-RU" dirty="0"/>
+          </a:p>
+        </p:txBody>
+      </p:sp>
+      <p:sp>
+        <p:nvSpPr>
+          <p:cNvPr id="4" name="Номер слайда 3"/>
+          <p:cNvSpPr>
+            <a:spLocks noGrp="1"/>
+          </p:cNvSpPr>
+          <p:nvPr>
+            <p:ph type="sldNum" sz="quarter" idx="10"/>
+          </p:nvPr>
+        </p:nvSpPr>
+        <p:spPr/>
+        <p:txBody>
+          <a:bodyPr/>
+          <a:lstStyle/>
+          <a:p>
+            <a:fld id="{26E69999-DA45-44A1-83D2-44E2B03D187B}" type="slidenum">
+              <a:rPr lang="ru-RU" smtClean="0"/>
+              <a:t>18</a:t>
+            </a:fld>
+            <a:endParaRPr lang="ru-RU"/>
+          </a:p>
+        </p:txBody>
+      </p:sp>
+    </p:spTree>
+    <p:extLst>
+      <p:ext uri="{BB962C8B-B14F-4D97-AF65-F5344CB8AC3E}">
+        <p14:creationId xmlns:p14="http://schemas.microsoft.com/office/powerpoint/2010/main" val="3594700596"/>
+      </p:ext>
+    </p:extLst>
+  </p:cSld>
+  <p:clrMapOvr>
+    <a:masterClrMapping/>
+  </p:clrMapOvr>
+</p:notes>
+</file>
+
+<file path=ppt/notesSlides/notesSlide5.xml><?xml version="1.0" encoding="utf-8"?>
+<p:notes xmlns:a="http://schemas.openxmlformats.org/drawingml/2006/main" xmlns:r="http://schemas.openxmlformats.org/officeDocument/2006/relationships" xmlns:p="http://schemas.openxmlformats.org/presentationml/2006/main">
+  <p:cSld>
+    <p:spTree>
+      <p:nvGrpSpPr>
+        <p:cNvPr id="1" name=""/>
+        <p:cNvGrpSpPr/>
+        <p:nvPr/>
+      </p:nvGrpSpPr>
+      <p:grpSpPr>
+        <a:xfrm>
+          <a:off x="0" y="0"/>
+          <a:ext cx="0" cy="0"/>
+          <a:chOff x="0" y="0"/>
+          <a:chExt cx="0" cy="0"/>
+        </a:xfrm>
+      </p:grpSpPr>
+      <p:sp>
+        <p:nvSpPr>
+          <p:cNvPr id="2" name="Образ слайда 1"/>
+          <p:cNvSpPr>
+            <a:spLocks noGrp="1" noRot="1" noChangeAspect="1"/>
+          </p:cNvSpPr>
+          <p:nvPr>
+            <p:ph type="sldImg"/>
+          </p:nvPr>
+        </p:nvSpPr>
+        <p:spPr/>
+      </p:sp>
+      <p:sp>
+        <p:nvSpPr>
+          <p:cNvPr id="3" name="Заметки 2"/>
+          <p:cNvSpPr>
+            <a:spLocks noGrp="1"/>
+          </p:cNvSpPr>
+          <p:nvPr>
+            <p:ph type="body" idx="1"/>
+          </p:nvPr>
+        </p:nvSpPr>
+        <p:spPr/>
+        <p:txBody>
+          <a:bodyPr/>
+          <a:lstStyle/>
+          <a:p>
             <a:endParaRPr lang="ru-RU" dirty="0"/>
           </a:p>
         </p:txBody>
@@ -941,7 +1238,7 @@
           <a:p>
             <a:fld id="{E5904A68-FE9C-41D3-96AD-A1A68ED6C497}" type="slidenum">
               <a:rPr lang="ru-RU" smtClean="0"/>
-              <a:t>18</a:t>
+              <a:t>22</a:t>
             </a:fld>
             <a:endParaRPr lang="ru-RU"/>
           </a:p>
@@ -1089,7 +1386,7 @@
           <a:p>
             <a:fld id="{43B237C4-111C-4636-B222-D785A341FF5A}" type="datetimeFigureOut">
               <a:rPr lang="ru-RU" smtClean="0"/>
-              <a:t>20.08.2025</a:t>
+              <a:t>09.04.2026</a:t>
             </a:fld>
             <a:endParaRPr lang="ru-RU"/>
           </a:p>
@@ -1257,7 +1554,7 @@
           <a:p>
             <a:fld id="{43B237C4-111C-4636-B222-D785A341FF5A}" type="datetimeFigureOut">
               <a:rPr lang="ru-RU" smtClean="0"/>
-              <a:t>20.08.2025</a:t>
+              <a:t>09.04.2026</a:t>
             </a:fld>
             <a:endParaRPr lang="ru-RU"/>
           </a:p>
@@ -1435,7 +1732,7 @@
           <a:p>
             <a:fld id="{43B237C4-111C-4636-B222-D785A341FF5A}" type="datetimeFigureOut">
               <a:rPr lang="ru-RU" smtClean="0"/>
-              <a:t>20.08.2025</a:t>
+              <a:t>09.04.2026</a:t>
             </a:fld>
             <a:endParaRPr lang="ru-RU"/>
           </a:p>
@@ -1603,7 +1900,7 @@
           <a:p>
             <a:fld id="{43B237C4-111C-4636-B222-D785A341FF5A}" type="datetimeFigureOut">
               <a:rPr lang="ru-RU" smtClean="0"/>
-              <a:t>20.08.2025</a:t>
+              <a:t>09.04.2026</a:t>
             </a:fld>
             <a:endParaRPr lang="ru-RU"/>
           </a:p>
@@ -1848,7 +2145,7 @@
           <a:p>
             <a:fld id="{43B237C4-111C-4636-B222-D785A341FF5A}" type="datetimeFigureOut">
               <a:rPr lang="ru-RU" smtClean="0"/>
-              <a:t>20.08.2025</a:t>
+              <a:t>09.04.2026</a:t>
             </a:fld>
             <a:endParaRPr lang="ru-RU"/>
           </a:p>
@@ -2077,7 +2374,7 @@
           <a:p>
             <a:fld id="{43B237C4-111C-4636-B222-D785A341FF5A}" type="datetimeFigureOut">
               <a:rPr lang="ru-RU" smtClean="0"/>
-              <a:t>20.08.2025</a:t>
+              <a:t>09.04.2026</a:t>
             </a:fld>
             <a:endParaRPr lang="ru-RU"/>
           </a:p>
@@ -2441,7 +2738,7 @@
           <a:p>
             <a:fld id="{43B237C4-111C-4636-B222-D785A341FF5A}" type="datetimeFigureOut">
               <a:rPr lang="ru-RU" smtClean="0"/>
-              <a:t>20.08.2025</a:t>
+              <a:t>09.04.2026</a:t>
             </a:fld>
             <a:endParaRPr lang="ru-RU"/>
           </a:p>
@@ -2558,7 +2855,7 @@
           <a:p>
             <a:fld id="{43B237C4-111C-4636-B222-D785A341FF5A}" type="datetimeFigureOut">
               <a:rPr lang="ru-RU" smtClean="0"/>
-              <a:t>20.08.2025</a:t>
+              <a:t>09.04.2026</a:t>
             </a:fld>
             <a:endParaRPr lang="ru-RU"/>
           </a:p>
@@ -2653,7 +2950,7 @@
           <a:p>
             <a:fld id="{43B237C4-111C-4636-B222-D785A341FF5A}" type="datetimeFigureOut">
               <a:rPr lang="ru-RU" smtClean="0"/>
-              <a:t>20.08.2025</a:t>
+              <a:t>09.04.2026</a:t>
             </a:fld>
             <a:endParaRPr lang="ru-RU"/>
           </a:p>
@@ -2928,7 +3225,7 @@
           <a:p>
             <a:fld id="{43B237C4-111C-4636-B222-D785A341FF5A}" type="datetimeFigureOut">
               <a:rPr lang="ru-RU" smtClean="0"/>
-              <a:t>20.08.2025</a:t>
+              <a:t>09.04.2026</a:t>
             </a:fld>
             <a:endParaRPr lang="ru-RU"/>
           </a:p>
@@ -3180,7 +3477,7 @@
           <a:p>
             <a:fld id="{43B237C4-111C-4636-B222-D785A341FF5A}" type="datetimeFigureOut">
               <a:rPr lang="ru-RU" smtClean="0"/>
-              <a:t>20.08.2025</a:t>
+              <a:t>09.04.2026</a:t>
             </a:fld>
             <a:endParaRPr lang="ru-RU"/>
           </a:p>
@@ -3391,7 +3688,7 @@
           <a:p>
             <a:fld id="{43B237C4-111C-4636-B222-D785A341FF5A}" type="datetimeFigureOut">
               <a:rPr lang="ru-RU" smtClean="0"/>
-              <a:t>20.08.2025</a:t>
+              <a:t>09.04.2026</a:t>
             </a:fld>
             <a:endParaRPr lang="ru-RU"/>
           </a:p>
@@ -3847,10 +4144,1072 @@
   <p:clrMapOvr>
     <a:masterClrMapping/>
   </p:clrMapOvr>
+  <p:timing>
+    <p:tnLst>
+      <p:par>
+        <p:cTn id="1" dur="indefinite" restart="never" nodeType="tmRoot"/>
+      </p:par>
+    </p:tnLst>
+  </p:timing>
 </p:sld>
 </file>
 
 <file path=ppt/slides/slide10.xml><?xml version="1.0" encoding="utf-8"?>
+<p:sld xmlns:a="http://schemas.openxmlformats.org/drawingml/2006/main" xmlns:r="http://schemas.openxmlformats.org/officeDocument/2006/relationships" xmlns:p="http://schemas.openxmlformats.org/presentationml/2006/main">
+  <p:cSld>
+    <p:spTree>
+      <p:nvGrpSpPr>
+        <p:cNvPr id="1" name=""/>
+        <p:cNvGrpSpPr/>
+        <p:nvPr/>
+      </p:nvGrpSpPr>
+      <p:grpSpPr>
+        <a:xfrm>
+          <a:off x="0" y="0"/>
+          <a:ext cx="0" cy="0"/>
+          <a:chOff x="0" y="0"/>
+          <a:chExt cx="0" cy="0"/>
+        </a:xfrm>
+      </p:grpSpPr>
+      <p:sp>
+        <p:nvSpPr>
+          <p:cNvPr id="2" name="Заголовок 1"/>
+          <p:cNvSpPr>
+            <a:spLocks noGrp="1"/>
+          </p:cNvSpPr>
+          <p:nvPr>
+            <p:ph type="title"/>
+          </p:nvPr>
+        </p:nvSpPr>
+        <p:spPr>
+          <a:xfrm>
+            <a:off x="125505" y="320303"/>
+            <a:ext cx="12227859" cy="773392"/>
+          </a:xfrm>
+        </p:spPr>
+        <p:txBody>
+          <a:bodyPr/>
+          <a:lstStyle/>
+          <a:p>
+            <a:r>
+              <a:rPr lang="ru-RU" dirty="0"/>
+              <a:t>Признаки во временных рядах</a:t>
+            </a:r>
+          </a:p>
+        </p:txBody>
+      </p:sp>
+      <p:sp>
+        <p:nvSpPr>
+          <p:cNvPr id="3" name="Объект 2"/>
+          <p:cNvSpPr>
+            <a:spLocks noGrp="1"/>
+          </p:cNvSpPr>
+          <p:nvPr>
+            <p:ph idx="1"/>
+          </p:nvPr>
+        </p:nvSpPr>
+        <p:spPr>
+          <a:xfrm>
+            <a:off x="125505" y="1053547"/>
+            <a:ext cx="11228295" cy="4930869"/>
+          </a:xfrm>
+        </p:spPr>
+        <p:txBody>
+          <a:bodyPr>
+            <a:normAutofit/>
+          </a:bodyPr>
+          <a:lstStyle/>
+          <a:p>
+            <a:pPr marL="0" indent="0">
+              <a:buNone/>
+            </a:pPr>
+            <a:r>
+              <a:rPr lang="ru-RU" sz="2400" dirty="0"/>
+              <a:t>Может быть несколько вариантов редукции. </a:t>
+            </a:r>
+          </a:p>
+          <a:p>
+            <a:endParaRPr lang="ru-RU" sz="2400" dirty="0"/>
+          </a:p>
+        </p:txBody>
+      </p:sp>
+      <p:pic>
+        <p:nvPicPr>
+          <p:cNvPr id="2050" name="Picture 2" descr="https://cienciadedatos.net/images/matrix_transformation_with_exog_variable.png"/>
+          <p:cNvPicPr>
+            <a:picLocks noChangeAspect="1" noChangeArrowheads="1"/>
+          </p:cNvPicPr>
+          <p:nvPr/>
+        </p:nvPicPr>
+        <p:blipFill>
+          <a:blip r:embed="rId2">
+            <a:extLst>
+              <a:ext uri="{28A0092B-C50C-407E-A947-70E740481C1C}">
+                <a14:useLocalDpi xmlns:a14="http://schemas.microsoft.com/office/drawing/2010/main" val="0"/>
+              </a:ext>
+            </a:extLst>
+          </a:blip>
+          <a:srcRect/>
+          <a:stretch>
+            <a:fillRect/>
+          </a:stretch>
+        </p:blipFill>
+        <p:spPr bwMode="auto">
+          <a:xfrm>
+            <a:off x="6421953" y="1875650"/>
+            <a:ext cx="5431629" cy="2060272"/>
+          </a:xfrm>
+          <a:prstGeom prst="rect">
+            <a:avLst/>
+          </a:prstGeom>
+          <a:noFill/>
+          <a:extLst>
+            <a:ext uri="{909E8E84-426E-40DD-AFC4-6F175D3DCCD1}">
+              <a14:hiddenFill xmlns:a14="http://schemas.microsoft.com/office/drawing/2010/main">
+                <a:solidFill>
+                  <a:srgbClr val="FFFFFF"/>
+                </a:solidFill>
+              </a14:hiddenFill>
+            </a:ext>
+          </a:extLst>
+        </p:spPr>
+      </p:pic>
+      <p:sp>
+        <p:nvSpPr>
+          <p:cNvPr id="5" name="Прямоугольник 4"/>
+          <p:cNvSpPr/>
+          <p:nvPr/>
+        </p:nvSpPr>
+        <p:spPr>
+          <a:xfrm>
+            <a:off x="0" y="6520957"/>
+            <a:ext cx="6096000" cy="276999"/>
+          </a:xfrm>
+          <a:prstGeom prst="rect">
+            <a:avLst/>
+          </a:prstGeom>
+        </p:spPr>
+        <p:txBody>
+          <a:bodyPr>
+            <a:spAutoFit/>
+          </a:bodyPr>
+          <a:lstStyle/>
+          <a:p>
+            <a:r>
+              <a:rPr lang="ru-RU" sz="1200" dirty="0"/>
+              <a:t>https://cienciadedatos.net/documentos/py27-time-series-forecasting-python-scikitlearn.html</a:t>
+            </a:r>
+          </a:p>
+        </p:txBody>
+      </p:sp>
+      <p:pic>
+        <p:nvPicPr>
+          <p:cNvPr id="2052" name="Picture 4" descr="https://cienciadedatos.net/images/diagram-recursive-mutistep-forecasting.png"/>
+          <p:cNvPicPr>
+            <a:picLocks noChangeAspect="1" noChangeArrowheads="1"/>
+          </p:cNvPicPr>
+          <p:nvPr/>
+        </p:nvPicPr>
+        <p:blipFill>
+          <a:blip r:embed="rId3" cstate="print">
+            <a:extLst>
+              <a:ext uri="{28A0092B-C50C-407E-A947-70E740481C1C}">
+                <a14:useLocalDpi xmlns:a14="http://schemas.microsoft.com/office/drawing/2010/main" val="0"/>
+              </a:ext>
+            </a:extLst>
+          </a:blip>
+          <a:srcRect/>
+          <a:stretch>
+            <a:fillRect/>
+          </a:stretch>
+        </p:blipFill>
+        <p:spPr bwMode="auto">
+          <a:xfrm>
+            <a:off x="519952" y="2509227"/>
+            <a:ext cx="4737848" cy="2321450"/>
+          </a:xfrm>
+          <a:prstGeom prst="rect">
+            <a:avLst/>
+          </a:prstGeom>
+          <a:noFill/>
+          <a:extLst>
+            <a:ext uri="{909E8E84-426E-40DD-AFC4-6F175D3DCCD1}">
+              <a14:hiddenFill xmlns:a14="http://schemas.microsoft.com/office/drawing/2010/main">
+                <a:solidFill>
+                  <a:srgbClr val="FFFFFF"/>
+                </a:solidFill>
+              </a14:hiddenFill>
+            </a:ext>
+          </a:extLst>
+        </p:spPr>
+      </p:pic>
+      <p:pic>
+        <p:nvPicPr>
+          <p:cNvPr id="2054" name="Picture 6" descr="https://cienciadedatos.net/images/diagram-direct-multi-step-forecasting.png"/>
+          <p:cNvPicPr>
+            <a:picLocks noChangeAspect="1" noChangeArrowheads="1"/>
+          </p:cNvPicPr>
+          <p:nvPr/>
+        </p:nvPicPr>
+        <p:blipFill>
+          <a:blip r:embed="rId4" cstate="print">
+            <a:extLst>
+              <a:ext uri="{28A0092B-C50C-407E-A947-70E740481C1C}">
+                <a14:useLocalDpi xmlns:a14="http://schemas.microsoft.com/office/drawing/2010/main" val="0"/>
+              </a:ext>
+            </a:extLst>
+          </a:blip>
+          <a:srcRect/>
+          <a:stretch>
+            <a:fillRect/>
+          </a:stretch>
+        </p:blipFill>
+        <p:spPr bwMode="auto">
+          <a:xfrm>
+            <a:off x="6525953" y="4172247"/>
+            <a:ext cx="5129776" cy="2446001"/>
+          </a:xfrm>
+          <a:prstGeom prst="rect">
+            <a:avLst/>
+          </a:prstGeom>
+          <a:noFill/>
+          <a:extLst>
+            <a:ext uri="{909E8E84-426E-40DD-AFC4-6F175D3DCCD1}">
+              <a14:hiddenFill xmlns:a14="http://schemas.microsoft.com/office/drawing/2010/main">
+                <a:solidFill>
+                  <a:srgbClr val="FFFFFF"/>
+                </a:solidFill>
+              </a14:hiddenFill>
+            </a:ext>
+          </a:extLst>
+        </p:spPr>
+      </p:pic>
+      <p:sp>
+        <p:nvSpPr>
+          <p:cNvPr id="6" name="TextBox 5"/>
+          <p:cNvSpPr txBox="1"/>
+          <p:nvPr/>
+        </p:nvSpPr>
+        <p:spPr>
+          <a:xfrm>
+            <a:off x="7175894" y="1748610"/>
+            <a:ext cx="4707314" cy="369332"/>
+          </a:xfrm>
+          <a:prstGeom prst="rect">
+            <a:avLst/>
+          </a:prstGeom>
+          <a:noFill/>
+        </p:spPr>
+        <p:txBody>
+          <a:bodyPr wrap="none" rtlCol="0">
+            <a:spAutoFit/>
+          </a:bodyPr>
+          <a:lstStyle/>
+          <a:p>
+            <a:r>
+              <a:rPr lang="ru-RU" dirty="0"/>
+              <a:t>Добавление экзогенных факторов к редукции</a:t>
+            </a:r>
+          </a:p>
+        </p:txBody>
+      </p:sp>
+      <p:sp>
+        <p:nvSpPr>
+          <p:cNvPr id="10" name="TextBox 9"/>
+          <p:cNvSpPr txBox="1"/>
+          <p:nvPr/>
+        </p:nvSpPr>
+        <p:spPr>
+          <a:xfrm>
+            <a:off x="811516" y="1945873"/>
+            <a:ext cx="2462213" cy="369332"/>
+          </a:xfrm>
+          <a:prstGeom prst="rect">
+            <a:avLst/>
+          </a:prstGeom>
+          <a:noFill/>
+        </p:spPr>
+        <p:txBody>
+          <a:bodyPr wrap="none" rtlCol="0">
+            <a:spAutoFit/>
+          </a:bodyPr>
+          <a:lstStyle/>
+          <a:p>
+            <a:r>
+              <a:rPr lang="ru-RU" dirty="0"/>
+              <a:t>Рекурсивная редукция </a:t>
+            </a:r>
+          </a:p>
+        </p:txBody>
+      </p:sp>
+      <p:pic>
+        <p:nvPicPr>
+          <p:cNvPr id="11" name="Рисунок 10"/>
+          <p:cNvPicPr>
+            <a:picLocks noChangeAspect="1"/>
+          </p:cNvPicPr>
+          <p:nvPr/>
+        </p:nvPicPr>
+        <p:blipFill rotWithShape="1">
+          <a:blip r:embed="rId5"/>
+          <a:srcRect l="51108" t="7033" r="6647" b="22856"/>
+          <a:stretch/>
+        </p:blipFill>
+        <p:spPr>
+          <a:xfrm>
+            <a:off x="417732" y="4838172"/>
+            <a:ext cx="2931460" cy="1652007"/>
+          </a:xfrm>
+          <a:prstGeom prst="rect">
+            <a:avLst/>
+          </a:prstGeom>
+        </p:spPr>
+      </p:pic>
+      <p:sp>
+        <p:nvSpPr>
+          <p:cNvPr id="12" name="TextBox 11"/>
+          <p:cNvSpPr txBox="1"/>
+          <p:nvPr/>
+        </p:nvSpPr>
+        <p:spPr>
+          <a:xfrm>
+            <a:off x="7175894" y="3908394"/>
+            <a:ext cx="1971758" cy="369332"/>
+          </a:xfrm>
+          <a:prstGeom prst="rect">
+            <a:avLst/>
+          </a:prstGeom>
+          <a:noFill/>
+        </p:spPr>
+        <p:txBody>
+          <a:bodyPr wrap="none" rtlCol="0">
+            <a:spAutoFit/>
+          </a:bodyPr>
+          <a:lstStyle/>
+          <a:p>
+            <a:r>
+              <a:rPr lang="ru-RU" dirty="0"/>
+              <a:t>Прямая редукция </a:t>
+            </a:r>
+          </a:p>
+        </p:txBody>
+      </p:sp>
+      <p:cxnSp>
+        <p:nvCxnSpPr>
+          <p:cNvPr id="8" name="Прямая соединительная линия 7"/>
+          <p:cNvCxnSpPr/>
+          <p:nvPr/>
+        </p:nvCxnSpPr>
+        <p:spPr>
+          <a:xfrm>
+            <a:off x="5818094" y="2315205"/>
+            <a:ext cx="0" cy="3986983"/>
+          </a:xfrm>
+          <a:prstGeom prst="line">
+            <a:avLst/>
+          </a:prstGeom>
+        </p:spPr>
+        <p:style>
+          <a:lnRef idx="1">
+            <a:schemeClr val="accent1"/>
+          </a:lnRef>
+          <a:fillRef idx="0">
+            <a:schemeClr val="accent1"/>
+          </a:fillRef>
+          <a:effectRef idx="0">
+            <a:schemeClr val="accent1"/>
+          </a:effectRef>
+          <a:fontRef idx="minor">
+            <a:schemeClr val="tx1"/>
+          </a:fontRef>
+        </p:style>
+      </p:cxnSp>
+      <p:cxnSp>
+        <p:nvCxnSpPr>
+          <p:cNvPr id="13" name="Прямая соединительная линия 12"/>
+          <p:cNvCxnSpPr/>
+          <p:nvPr/>
+        </p:nvCxnSpPr>
+        <p:spPr>
+          <a:xfrm>
+            <a:off x="5818094" y="3908394"/>
+            <a:ext cx="5884561" cy="0"/>
+          </a:xfrm>
+          <a:prstGeom prst="line">
+            <a:avLst/>
+          </a:prstGeom>
+        </p:spPr>
+        <p:style>
+          <a:lnRef idx="1">
+            <a:schemeClr val="accent1"/>
+          </a:lnRef>
+          <a:fillRef idx="0">
+            <a:schemeClr val="accent1"/>
+          </a:fillRef>
+          <a:effectRef idx="0">
+            <a:schemeClr val="accent1"/>
+          </a:effectRef>
+          <a:fontRef idx="minor">
+            <a:schemeClr val="tx1"/>
+          </a:fontRef>
+        </p:style>
+      </p:cxnSp>
+      <p:sp>
+        <p:nvSpPr>
+          <p:cNvPr id="14" name="Прямоугольник 13"/>
+          <p:cNvSpPr/>
+          <p:nvPr/>
+        </p:nvSpPr>
+        <p:spPr>
+          <a:xfrm>
+            <a:off x="6239434" y="6576151"/>
+            <a:ext cx="6096000" cy="261610"/>
+          </a:xfrm>
+          <a:prstGeom prst="rect">
+            <a:avLst/>
+          </a:prstGeom>
+        </p:spPr>
+        <p:txBody>
+          <a:bodyPr>
+            <a:spAutoFit/>
+          </a:bodyPr>
+          <a:lstStyle/>
+          <a:p>
+            <a:r>
+              <a:rPr lang="ru-RU" sz="1100" dirty="0"/>
+              <a:t>https://machinelearningmastery.com/multi-step-time-series-forecasting/</a:t>
+            </a:r>
+          </a:p>
+        </p:txBody>
+      </p:sp>
+      <p:sp>
+        <p:nvSpPr>
+          <p:cNvPr id="15" name="Прямоугольник 14"/>
+          <p:cNvSpPr/>
+          <p:nvPr/>
+        </p:nvSpPr>
+        <p:spPr>
+          <a:xfrm>
+            <a:off x="8905533" y="6464143"/>
+            <a:ext cx="2977675" cy="276999"/>
+          </a:xfrm>
+          <a:prstGeom prst="rect">
+            <a:avLst/>
+          </a:prstGeom>
+        </p:spPr>
+        <p:txBody>
+          <a:bodyPr wrap="none">
+            <a:spAutoFit/>
+          </a:bodyPr>
+          <a:lstStyle/>
+          <a:p>
+            <a:r>
+              <a:rPr lang="ru-RU" sz="1200" dirty="0"/>
+              <a:t>https://robjhyndman.com/papers/rectify.pdf</a:t>
+            </a:r>
+          </a:p>
+        </p:txBody>
+      </p:sp>
+    </p:spTree>
+    <p:extLst>
+      <p:ext uri="{BB962C8B-B14F-4D97-AF65-F5344CB8AC3E}">
+        <p14:creationId xmlns:p14="http://schemas.microsoft.com/office/powerpoint/2010/main" val="3143492277"/>
+      </p:ext>
+    </p:extLst>
+  </p:cSld>
+  <p:clrMapOvr>
+    <a:masterClrMapping/>
+  </p:clrMapOvr>
+  <p:timing>
+    <p:tnLst>
+      <p:par>
+        <p:cTn id="1" dur="indefinite" restart="never" nodeType="tmRoot"/>
+      </p:par>
+    </p:tnLst>
+  </p:timing>
+</p:sld>
+</file>
+
+<file path=ppt/slides/slide11.xml><?xml version="1.0" encoding="utf-8"?>
+<p:sld xmlns:a="http://schemas.openxmlformats.org/drawingml/2006/main" xmlns:r="http://schemas.openxmlformats.org/officeDocument/2006/relationships" xmlns:p="http://schemas.openxmlformats.org/presentationml/2006/main">
+  <p:cSld>
+    <p:spTree>
+      <p:nvGrpSpPr>
+        <p:cNvPr id="1" name=""/>
+        <p:cNvGrpSpPr/>
+        <p:nvPr/>
+      </p:nvGrpSpPr>
+      <p:grpSpPr>
+        <a:xfrm>
+          <a:off x="0" y="0"/>
+          <a:ext cx="0" cy="0"/>
+          <a:chOff x="0" y="0"/>
+          <a:chExt cx="0" cy="0"/>
+        </a:xfrm>
+      </p:grpSpPr>
+      <p:sp>
+        <p:nvSpPr>
+          <p:cNvPr id="2" name="Заголовок 1"/>
+          <p:cNvSpPr>
+            <a:spLocks noGrp="1"/>
+          </p:cNvSpPr>
+          <p:nvPr>
+            <p:ph type="title"/>
+          </p:nvPr>
+        </p:nvSpPr>
+        <p:spPr/>
+        <p:txBody>
+          <a:bodyPr/>
+          <a:lstStyle/>
+          <a:p>
+            <a:r>
+              <a:rPr lang="ru-RU" dirty="0"/>
+              <a:t>Учет экзогенных и других типов признаков</a:t>
+            </a:r>
+          </a:p>
+        </p:txBody>
+      </p:sp>
+      <p:sp>
+        <p:nvSpPr>
+          <p:cNvPr id="3" name="Объект 2"/>
+          <p:cNvSpPr>
+            <a:spLocks noGrp="1"/>
+          </p:cNvSpPr>
+          <p:nvPr>
+            <p:ph idx="1"/>
+          </p:nvPr>
+        </p:nvSpPr>
+        <p:spPr>
+          <a:xfrm>
+            <a:off x="600075" y="1368425"/>
+            <a:ext cx="10515600" cy="4351338"/>
+          </a:xfrm>
+        </p:spPr>
+        <p:txBody>
+          <a:bodyPr/>
+          <a:lstStyle/>
+          <a:p>
+            <a:pPr marL="0" indent="0">
+              <a:buNone/>
+            </a:pPr>
+            <a:r>
+              <a:rPr lang="ru-RU" dirty="0"/>
+              <a:t>К лаговым признакам могут быть добавлены и другие признаки.</a:t>
+            </a:r>
+          </a:p>
+          <a:p>
+            <a:endParaRPr lang="ru-RU" dirty="0"/>
+          </a:p>
+        </p:txBody>
+      </p:sp>
+      <p:pic>
+        <p:nvPicPr>
+          <p:cNvPr id="1026" name="Picture 2" descr="https://cienciadedatos.net/images/matrix_transformation_with_exog_variable.png"/>
+          <p:cNvPicPr>
+            <a:picLocks noChangeAspect="1" noChangeArrowheads="1"/>
+          </p:cNvPicPr>
+          <p:nvPr/>
+        </p:nvPicPr>
+        <p:blipFill>
+          <a:blip r:embed="rId2">
+            <a:extLst>
+              <a:ext uri="{28A0092B-C50C-407E-A947-70E740481C1C}">
+                <a14:useLocalDpi xmlns:a14="http://schemas.microsoft.com/office/drawing/2010/main" val="0"/>
+              </a:ext>
+            </a:extLst>
+          </a:blip>
+          <a:srcRect/>
+          <a:stretch>
+            <a:fillRect/>
+          </a:stretch>
+        </p:blipFill>
+        <p:spPr bwMode="auto">
+          <a:xfrm>
+            <a:off x="123825" y="1825625"/>
+            <a:ext cx="5854699" cy="2220748"/>
+          </a:xfrm>
+          <a:prstGeom prst="rect">
+            <a:avLst/>
+          </a:prstGeom>
+          <a:noFill/>
+          <a:extLst>
+            <a:ext uri="{909E8E84-426E-40DD-AFC4-6F175D3DCCD1}">
+              <a14:hiddenFill xmlns:a14="http://schemas.microsoft.com/office/drawing/2010/main">
+                <a:solidFill>
+                  <a:srgbClr val="FFFFFF"/>
+                </a:solidFill>
+              </a14:hiddenFill>
+            </a:ext>
+          </a:extLst>
+        </p:spPr>
+      </p:pic>
+      <p:pic>
+        <p:nvPicPr>
+          <p:cNvPr id="1028" name="Picture 4" descr="https://cienciadedatos.net/images/diagram_skforecast_multioutput.png"/>
+          <p:cNvPicPr>
+            <a:picLocks noChangeAspect="1" noChangeArrowheads="1"/>
+          </p:cNvPicPr>
+          <p:nvPr/>
+        </p:nvPicPr>
+        <p:blipFill rotWithShape="1">
+          <a:blip r:embed="rId3">
+            <a:extLst>
+              <a:ext uri="{28A0092B-C50C-407E-A947-70E740481C1C}">
+                <a14:useLocalDpi xmlns:a14="http://schemas.microsoft.com/office/drawing/2010/main" val="0"/>
+              </a:ext>
+            </a:extLst>
+          </a:blip>
+          <a:srcRect l="7271" r="7931"/>
+          <a:stretch/>
+        </p:blipFill>
+        <p:spPr bwMode="auto">
+          <a:xfrm>
+            <a:off x="5857874" y="2512679"/>
+            <a:ext cx="6162883" cy="4088145"/>
+          </a:xfrm>
+          <a:prstGeom prst="rect">
+            <a:avLst/>
+          </a:prstGeom>
+          <a:noFill/>
+          <a:extLst>
+            <a:ext uri="{909E8E84-426E-40DD-AFC4-6F175D3DCCD1}">
+              <a14:hiddenFill xmlns:a14="http://schemas.microsoft.com/office/drawing/2010/main">
+                <a:solidFill>
+                  <a:srgbClr val="FFFFFF"/>
+                </a:solidFill>
+              </a14:hiddenFill>
+            </a:ext>
+          </a:extLst>
+        </p:spPr>
+      </p:pic>
+      <p:sp>
+        <p:nvSpPr>
+          <p:cNvPr id="4" name="Прямоугольник 3"/>
+          <p:cNvSpPr/>
+          <p:nvPr/>
+        </p:nvSpPr>
+        <p:spPr>
+          <a:xfrm>
+            <a:off x="180975" y="6541754"/>
+            <a:ext cx="6096000" cy="276999"/>
+          </a:xfrm>
+          <a:prstGeom prst="rect">
+            <a:avLst/>
+          </a:prstGeom>
+        </p:spPr>
+        <p:txBody>
+          <a:bodyPr>
+            <a:spAutoFit/>
+          </a:bodyPr>
+          <a:lstStyle/>
+          <a:p>
+            <a:r>
+              <a:rPr lang="ru-RU" sz="1200" dirty="0"/>
+              <a:t>https://skforecast.org/0.16.0/introduction-forecasting/introduction-forecasting</a:t>
+            </a:r>
+          </a:p>
+        </p:txBody>
+      </p:sp>
+    </p:spTree>
+    <p:extLst>
+      <p:ext uri="{BB962C8B-B14F-4D97-AF65-F5344CB8AC3E}">
+        <p14:creationId xmlns:p14="http://schemas.microsoft.com/office/powerpoint/2010/main" val="2981377548"/>
+      </p:ext>
+    </p:extLst>
+  </p:cSld>
+  <p:clrMapOvr>
+    <a:masterClrMapping/>
+  </p:clrMapOvr>
+  <p:timing>
+    <p:tnLst>
+      <p:par>
+        <p:cTn id="1" dur="indefinite" restart="never" nodeType="tmRoot"/>
+      </p:par>
+    </p:tnLst>
+  </p:timing>
+</p:sld>
+</file>
+
+<file path=ppt/slides/slide12.xml><?xml version="1.0" encoding="utf-8"?>
+<p:sld xmlns:a="http://schemas.openxmlformats.org/drawingml/2006/main" xmlns:r="http://schemas.openxmlformats.org/officeDocument/2006/relationships" xmlns:p="http://schemas.openxmlformats.org/presentationml/2006/main">
+  <p:cSld>
+    <p:spTree>
+      <p:nvGrpSpPr>
+        <p:cNvPr id="1" name=""/>
+        <p:cNvGrpSpPr/>
+        <p:nvPr/>
+      </p:nvGrpSpPr>
+      <p:grpSpPr>
+        <a:xfrm>
+          <a:off x="0" y="0"/>
+          <a:ext cx="0" cy="0"/>
+          <a:chOff x="0" y="0"/>
+          <a:chExt cx="0" cy="0"/>
+        </a:xfrm>
+      </p:grpSpPr>
+      <p:sp>
+        <p:nvSpPr>
+          <p:cNvPr id="2" name="Заголовок 1"/>
+          <p:cNvSpPr>
+            <a:spLocks noGrp="1"/>
+          </p:cNvSpPr>
+          <p:nvPr>
+            <p:ph type="title"/>
+          </p:nvPr>
+        </p:nvSpPr>
+        <p:spPr>
+          <a:xfrm>
+            <a:off x="125504" y="179411"/>
+            <a:ext cx="12227859" cy="773392"/>
+          </a:xfrm>
+        </p:spPr>
+        <p:txBody>
+          <a:bodyPr/>
+          <a:lstStyle/>
+          <a:p>
+            <a:pPr algn="ctr"/>
+            <a:r>
+              <a:rPr lang="ru-RU" dirty="0"/>
+              <a:t>Признаки во временных рядах</a:t>
+            </a:r>
+          </a:p>
+        </p:txBody>
+      </p:sp>
+      <p:sp>
+        <p:nvSpPr>
+          <p:cNvPr id="3" name="Объект 2"/>
+          <p:cNvSpPr>
+            <a:spLocks noGrp="1"/>
+          </p:cNvSpPr>
+          <p:nvPr>
+            <p:ph idx="1"/>
+          </p:nvPr>
+        </p:nvSpPr>
+        <p:spPr>
+          <a:xfrm>
+            <a:off x="125504" y="810174"/>
+            <a:ext cx="11660842" cy="5304876"/>
+          </a:xfrm>
+        </p:spPr>
+        <p:txBody>
+          <a:bodyPr>
+            <a:normAutofit fontScale="85000" lnSpcReduction="20000"/>
+          </a:bodyPr>
+          <a:lstStyle/>
+          <a:p>
+            <a:r>
+              <a:rPr lang="ru-RU" dirty="0"/>
+              <a:t>Лаги временных рядов</a:t>
+            </a:r>
+          </a:p>
+          <a:p>
+            <a:r>
+              <a:rPr lang="ru-RU" dirty="0"/>
+              <a:t>Преобразования лагов (степенное, разность и </a:t>
+            </a:r>
+            <a:r>
+              <a:rPr lang="ru-RU" dirty="0" err="1"/>
+              <a:t>тд</a:t>
+            </a:r>
+            <a:r>
+              <a:rPr lang="ru-RU" dirty="0"/>
+              <a:t>)</a:t>
+            </a:r>
+            <a:endParaRPr lang="en-US" dirty="0"/>
+          </a:p>
+          <a:p>
+            <a:r>
+              <a:rPr lang="ru-RU" dirty="0"/>
+              <a:t>Оконные статистики лагов</a:t>
+            </a:r>
+            <a:r>
+              <a:rPr lang="en-US" dirty="0"/>
+              <a:t>:</a:t>
+            </a:r>
+          </a:p>
+          <a:p>
+            <a:pPr lvl="1"/>
+            <a:r>
+              <a:rPr lang="en-US" dirty="0"/>
+              <a:t>Max/min value of series in a window</a:t>
+            </a:r>
+          </a:p>
+          <a:p>
+            <a:pPr lvl="1"/>
+            <a:r>
+              <a:rPr lang="en-US" dirty="0"/>
+              <a:t>Average/median value in a window</a:t>
+            </a:r>
+          </a:p>
+          <a:p>
+            <a:pPr lvl="1"/>
+            <a:r>
+              <a:rPr lang="en-US" dirty="0"/>
+              <a:t>Window variance</a:t>
+            </a:r>
+          </a:p>
+          <a:p>
+            <a:pPr lvl="1"/>
+            <a:r>
+              <a:rPr lang="en-US" dirty="0"/>
+              <a:t>etc.</a:t>
+            </a:r>
+          </a:p>
+          <a:p>
+            <a:r>
+              <a:rPr lang="ru-RU" dirty="0"/>
+              <a:t>Даты и время</a:t>
+            </a:r>
+            <a:r>
+              <a:rPr lang="en-US" dirty="0"/>
+              <a:t>:</a:t>
+            </a:r>
+          </a:p>
+          <a:p>
+            <a:pPr lvl="1"/>
+            <a:r>
+              <a:rPr lang="ru-RU" dirty="0"/>
+              <a:t>Порядковые (категориальные) данные: Число, день недели, месяц, квартал и </a:t>
+            </a:r>
+            <a:r>
+              <a:rPr lang="ru-RU" dirty="0" err="1"/>
+              <a:t>тд</a:t>
+            </a:r>
+            <a:r>
+              <a:rPr lang="ru-RU" dirty="0"/>
+              <a:t>,</a:t>
+            </a:r>
+            <a:endParaRPr lang="en-US" dirty="0"/>
+          </a:p>
+          <a:p>
+            <a:pPr lvl="1"/>
+            <a:r>
+              <a:rPr lang="ru-RU" dirty="0"/>
+              <a:t>Бинарные (дискретные): </a:t>
+            </a:r>
+            <a:r>
+              <a:rPr lang="en-US" dirty="0"/>
+              <a:t>Is this day a holiday? Maybe there is a special event? </a:t>
+            </a:r>
+            <a:endParaRPr lang="ru-RU" dirty="0"/>
+          </a:p>
+          <a:p>
+            <a:r>
+              <a:rPr lang="ru-RU" dirty="0"/>
+              <a:t>Экзогенные факторы, объясняющие (в домене) целевую переменную</a:t>
+            </a:r>
+          </a:p>
+          <a:p>
+            <a:r>
+              <a:rPr lang="ru-RU" dirty="0"/>
+              <a:t>Результаты, статистики остатков и другие характеристики предсказаний других моделей (напр. </a:t>
+            </a:r>
+            <a:r>
+              <a:rPr lang="ru-RU" dirty="0" err="1"/>
+              <a:t>A</a:t>
+            </a:r>
+            <a:r>
+              <a:rPr lang="en-US" dirty="0"/>
+              <a:t>RIMA)</a:t>
+            </a:r>
+            <a:endParaRPr lang="ru-RU" dirty="0"/>
+          </a:p>
+          <a:p>
+            <a:r>
+              <a:rPr lang="ru-RU" dirty="0"/>
+              <a:t>Другие признаки: напр. Частотные переменные, значения статистик и </a:t>
+            </a:r>
+            <a:r>
+              <a:rPr lang="ru-RU" dirty="0" err="1"/>
+              <a:t>тд</a:t>
+            </a:r>
+            <a:endParaRPr lang="en-US" dirty="0"/>
+          </a:p>
+          <a:p>
+            <a:r>
+              <a:rPr lang="ru-RU" dirty="0"/>
+              <a:t>Также используют - Преобразования метки (степенное, разность, кодирование и </a:t>
+            </a:r>
+            <a:r>
+              <a:rPr lang="ru-RU" dirty="0" err="1"/>
+              <a:t>тд</a:t>
+            </a:r>
+            <a:r>
+              <a:rPr lang="ru-RU" dirty="0"/>
+              <a:t>)</a:t>
+            </a:r>
+            <a:endParaRPr lang="en-US" dirty="0"/>
+          </a:p>
+          <a:p>
+            <a:endParaRPr lang="ru-RU" dirty="0"/>
+          </a:p>
+        </p:txBody>
+      </p:sp>
+      <p:sp>
+        <p:nvSpPr>
+          <p:cNvPr id="4" name="Прямоугольник 3"/>
+          <p:cNvSpPr/>
+          <p:nvPr/>
+        </p:nvSpPr>
+        <p:spPr>
+          <a:xfrm>
+            <a:off x="6553480" y="6581001"/>
+            <a:ext cx="4894170" cy="276999"/>
+          </a:xfrm>
+          <a:prstGeom prst="rect">
+            <a:avLst/>
+          </a:prstGeom>
+        </p:spPr>
+        <p:txBody>
+          <a:bodyPr wrap="square">
+            <a:spAutoFit/>
+          </a:bodyPr>
+          <a:lstStyle/>
+          <a:p>
+            <a:r>
+              <a:rPr lang="ru-RU" sz="1200" dirty="0"/>
+              <a:t>https://mlcourse.ai/book/topic09/topic9_part1_time_series_python.html</a:t>
+            </a:r>
+          </a:p>
+        </p:txBody>
+      </p:sp>
+      <p:sp>
+        <p:nvSpPr>
+          <p:cNvPr id="5" name="Прямоугольник 4"/>
+          <p:cNvSpPr/>
+          <p:nvPr/>
+        </p:nvSpPr>
+        <p:spPr>
+          <a:xfrm>
+            <a:off x="5753100" y="6428109"/>
+            <a:ext cx="6096000" cy="276999"/>
+          </a:xfrm>
+          <a:prstGeom prst="rect">
+            <a:avLst/>
+          </a:prstGeom>
+        </p:spPr>
+        <p:txBody>
+          <a:bodyPr>
+            <a:spAutoFit/>
+          </a:bodyPr>
+          <a:lstStyle/>
+          <a:p>
+            <a:r>
+              <a:rPr lang="ru-RU" sz="1200" dirty="0"/>
+              <a:t>https://nixtlaverse.nixtla.io/mlforecast/docs/getting-started/end_to_end_walkthrough.htm</a:t>
+            </a:r>
+          </a:p>
+        </p:txBody>
+      </p:sp>
+      <p:sp>
+        <p:nvSpPr>
+          <p:cNvPr id="7" name="TextBox 6">
+            <a:extLst>
+              <a:ext uri="{FF2B5EF4-FFF2-40B4-BE49-F238E27FC236}">
+                <a16:creationId xmlns:a16="http://schemas.microsoft.com/office/drawing/2014/main" id="{843D709B-8C57-6B5A-961D-91A269E0454F}"/>
+              </a:ext>
+            </a:extLst>
+          </p:cNvPr>
+          <p:cNvSpPr txBox="1"/>
+          <p:nvPr/>
+        </p:nvSpPr>
+        <p:spPr>
+          <a:xfrm>
+            <a:off x="3888" y="6417190"/>
+            <a:ext cx="6235546" cy="276999"/>
+          </a:xfrm>
+          <a:prstGeom prst="rect">
+            <a:avLst/>
+          </a:prstGeom>
+          <a:noFill/>
+        </p:spPr>
+        <p:txBody>
+          <a:bodyPr wrap="square">
+            <a:spAutoFit/>
+          </a:bodyPr>
+          <a:lstStyle/>
+          <a:p>
+            <a:r>
+              <a:rPr lang="ru-RU" sz="1200" dirty="0" err="1"/>
+              <a:t>https</a:t>
+            </a:r>
+            <a:r>
+              <a:rPr lang="ru-RU" sz="1200" dirty="0"/>
+              <a:t>://</a:t>
+            </a:r>
+            <a:r>
+              <a:rPr lang="ru-RU" sz="1200" dirty="0" err="1"/>
+              <a:t>skforecast.org</a:t>
+            </a:r>
+            <a:r>
+              <a:rPr lang="ru-RU" sz="1200" dirty="0"/>
+              <a:t>/0.16.0/</a:t>
+            </a:r>
+            <a:r>
+              <a:rPr lang="ru-RU" sz="1200" dirty="0" err="1"/>
+              <a:t>user_guides</a:t>
+            </a:r>
+            <a:r>
+              <a:rPr lang="ru-RU" sz="1200" dirty="0"/>
+              <a:t>/</a:t>
+            </a:r>
+            <a:r>
+              <a:rPr lang="ru-RU" sz="1200" dirty="0" err="1"/>
+              <a:t>categorical-features</a:t>
+            </a:r>
+            <a:endParaRPr lang="ru-RU" sz="1200" dirty="0"/>
+          </a:p>
+        </p:txBody>
+      </p:sp>
+      <p:sp>
+        <p:nvSpPr>
+          <p:cNvPr id="6" name="Прямоугольник 5"/>
+          <p:cNvSpPr/>
+          <p:nvPr/>
+        </p:nvSpPr>
+        <p:spPr>
+          <a:xfrm>
+            <a:off x="0" y="6611252"/>
+            <a:ext cx="6972300" cy="261610"/>
+          </a:xfrm>
+          <a:prstGeom prst="rect">
+            <a:avLst/>
+          </a:prstGeom>
+        </p:spPr>
+        <p:txBody>
+          <a:bodyPr wrap="square">
+            <a:spAutoFit/>
+          </a:bodyPr>
+          <a:lstStyle/>
+          <a:p>
+            <a:r>
+              <a:rPr lang="ru-RU" sz="1100" dirty="0"/>
+              <a:t>https://readmedium.com/feature-engineering-for-time-series-data-a-deep-yet-intuitive-guide-b544aeb26ec2</a:t>
+            </a:r>
+          </a:p>
+        </p:txBody>
+      </p:sp>
+    </p:spTree>
+    <p:extLst>
+      <p:ext uri="{BB962C8B-B14F-4D97-AF65-F5344CB8AC3E}">
+        <p14:creationId xmlns:p14="http://schemas.microsoft.com/office/powerpoint/2010/main" val="139361784"/>
+      </p:ext>
+    </p:extLst>
+  </p:cSld>
+  <p:clrMapOvr>
+    <a:masterClrMapping/>
+  </p:clrMapOvr>
+  <p:timing>
+    <p:tnLst>
+      <p:par>
+        <p:cTn id="1" dur="indefinite" restart="never" nodeType="tmRoot"/>
+      </p:par>
+    </p:tnLst>
+  </p:timing>
+</p:sld>
+</file>
+
+<file path=ppt/slides/slide13.xml><?xml version="1.0" encoding="utf-8"?>
 <p:sld xmlns:a="http://schemas.openxmlformats.org/drawingml/2006/main" xmlns:r="http://schemas.openxmlformats.org/officeDocument/2006/relationships" xmlns:p="http://schemas.openxmlformats.org/presentationml/2006/main">
   <p:cSld>
     <p:spTree>
@@ -4436,6 +5795,93 @@
           </a:p>
         </p:txBody>
       </p:sp>
+      <p:sp>
+        <p:nvSpPr>
+          <p:cNvPr id="6" name="Прямоугольник 5"/>
+          <p:cNvSpPr/>
+          <p:nvPr/>
+        </p:nvSpPr>
+        <p:spPr>
+          <a:xfrm>
+            <a:off x="421339" y="5793031"/>
+            <a:ext cx="10703859" cy="923330"/>
+          </a:xfrm>
+          <a:prstGeom prst="rect">
+            <a:avLst/>
+          </a:prstGeom>
+        </p:spPr>
+        <p:txBody>
+          <a:bodyPr wrap="square">
+            <a:spAutoFit/>
+          </a:bodyPr>
+          <a:lstStyle/>
+          <a:p>
+            <a:pPr lvl="0" eaLnBrk="0" fontAlgn="base" hangingPunct="0">
+              <a:spcBef>
+                <a:spcPct val="0"/>
+              </a:spcBef>
+              <a:spcAft>
+                <a:spcPct val="0"/>
+              </a:spcAft>
+            </a:pPr>
+            <a:r>
+              <a:rPr lang="ru-RU" altLang="ru-RU" b="1" dirty="0" smtClean="0">
+                <a:latin typeface="system-ui"/>
+              </a:rPr>
+              <a:t>Даже если прогноз </a:t>
+            </a:r>
+            <a:r>
+              <a:rPr lang="ru-RU" altLang="ru-RU" dirty="0" smtClean="0">
+                <a:latin typeface="system-ui"/>
+              </a:rPr>
+              <a:t>преобразован в регрессию, </a:t>
+            </a:r>
+            <a:r>
+              <a:rPr lang="ru-RU" altLang="ru-RU" dirty="0" err="1" smtClean="0">
+                <a:latin typeface="system-ui"/>
+              </a:rPr>
+              <a:t>валидация</a:t>
+            </a:r>
+            <a:r>
+              <a:rPr lang="ru-RU" altLang="ru-RU" dirty="0" smtClean="0">
+                <a:latin typeface="system-ui"/>
+              </a:rPr>
+              <a:t> и тест не перемешивают с </a:t>
+            </a:r>
+            <a:r>
+              <a:rPr lang="ru-RU" altLang="ru-RU" dirty="0" err="1" smtClean="0">
+                <a:latin typeface="system-ui"/>
+              </a:rPr>
+              <a:t>трейном</a:t>
+            </a:r>
+            <a:r>
+              <a:rPr lang="ru-RU" altLang="ru-RU" dirty="0" smtClean="0">
+                <a:latin typeface="system-ui"/>
+              </a:rPr>
+              <a:t> (последовательность сохраняется!). </a:t>
+            </a:r>
+          </a:p>
+          <a:p>
+            <a:pPr lvl="0" eaLnBrk="0" fontAlgn="base" hangingPunct="0">
+              <a:spcBef>
+                <a:spcPct val="0"/>
+              </a:spcBef>
+              <a:spcAft>
+                <a:spcPct val="0"/>
+              </a:spcAft>
+            </a:pPr>
+            <a:r>
+              <a:rPr lang="ru-RU" altLang="ru-RU" dirty="0" smtClean="0">
+                <a:latin typeface="system-ui"/>
+              </a:rPr>
+              <a:t>Лучше делать операции редукции после разделения выборок!</a:t>
+            </a:r>
+            <a:endParaRPr lang="ru-RU" altLang="ru-RU" dirty="0">
+              <a:latin typeface="system-ui"/>
+            </a:endParaRPr>
+          </a:p>
+        </p:txBody>
+      </p:sp>
     </p:spTree>
     <p:extLst>
       <p:ext uri="{BB962C8B-B14F-4D97-AF65-F5344CB8AC3E}">
@@ -4446,10 +5892,17 @@
   <p:clrMapOvr>
     <a:masterClrMapping/>
   </p:clrMapOvr>
+  <p:timing>
+    <p:tnLst>
+      <p:par>
+        <p:cTn id="1" dur="indefinite" restart="never" nodeType="tmRoot"/>
+      </p:par>
+    </p:tnLst>
+  </p:timing>
 </p:sld>
 </file>
 
-<file path=ppt/slides/slide11.xml><?xml version="1.0" encoding="utf-8"?>
+<file path=ppt/slides/slide14.xml><?xml version="1.0" encoding="utf-8"?>
 <p:sld xmlns:a="http://schemas.openxmlformats.org/drawingml/2006/main" xmlns:r="http://schemas.openxmlformats.org/officeDocument/2006/relationships" xmlns:p="http://schemas.openxmlformats.org/presentationml/2006/main">
   <p:cSld>
     <p:spTree>
@@ -4677,10 +6130,17 @@
   <p:clrMapOvr>
     <a:masterClrMapping/>
   </p:clrMapOvr>
+  <p:timing>
+    <p:tnLst>
+      <p:par>
+        <p:cTn id="1" dur="indefinite" restart="never" nodeType="tmRoot"/>
+      </p:par>
+    </p:tnLst>
+  </p:timing>
 </p:sld>
 </file>
 
-<file path=ppt/slides/slide12.xml><?xml version="1.0" encoding="utf-8"?>
+<file path=ppt/slides/slide15.xml><?xml version="1.0" encoding="utf-8"?>
 <p:sld xmlns:a="http://schemas.openxmlformats.org/drawingml/2006/main" xmlns:r="http://schemas.openxmlformats.org/officeDocument/2006/relationships" xmlns:p="http://schemas.openxmlformats.org/presentationml/2006/main">
   <p:cSld>
     <p:spTree>
@@ -4825,7 +6285,7 @@
               <a:rPr lang="ru-RU" altLang="ru-RU" sz="2300" dirty="0"/>
               <a:t> – то есть утечке информации (или появление ложных зависимостей). </a:t>
             </a:r>
-            <a:endParaRPr lang="en-US" altLang="ru-RU" sz="2300" dirty="0"/>
+            <a:endParaRPr lang="ru-RU" altLang="ru-RU" sz="2300" dirty="0" smtClean="0"/>
           </a:p>
           <a:p>
             <a:pPr marL="0" indent="0" eaLnBrk="0" fontAlgn="base" hangingPunct="0">
@@ -4840,16 +6300,31 @@
               </a:spcAft>
               <a:buNone/>
             </a:pPr>
-            <a:r>
-              <a:rPr lang="ru-RU" altLang="ru-RU" sz="2300" dirty="0"/>
+            <a:endParaRPr lang="en-US" altLang="ru-RU" sz="2300" dirty="0"/>
+          </a:p>
+          <a:p>
+            <a:pPr marL="0" indent="0" eaLnBrk="0" fontAlgn="base" hangingPunct="0">
+              <a:lnSpc>
+                <a:spcPct val="100000"/>
+              </a:lnSpc>
+              <a:spcBef>
+                <a:spcPts val="300"/>
+              </a:spcBef>
+              <a:spcAft>
+                <a:spcPct val="0"/>
+              </a:spcAft>
+              <a:buNone/>
+            </a:pPr>
+            <a:r>
+              <a:rPr lang="ru-RU" altLang="ru-RU" sz="2300" b="1" dirty="0"/>
               <a:t>Для </a:t>
             </a:r>
             <a:r>
-              <a:rPr lang="ru-RU" altLang="ru-RU" sz="2300" dirty="0" err="1"/>
+              <a:rPr lang="ru-RU" altLang="ru-RU" sz="2300" b="1" dirty="0" err="1"/>
               <a:t>преотвращения</a:t>
             </a:r>
             <a:r>
-              <a:rPr lang="ru-RU" altLang="ru-RU" sz="2300" dirty="0"/>
+              <a:rPr lang="ru-RU" altLang="ru-RU" sz="2300" b="1" dirty="0"/>
               <a:t>:</a:t>
             </a:r>
           </a:p>
@@ -5009,12 +6484,12 @@
               <a:t>При добавлении признаков в окно прогноза нужно смотреть чтобы </a:t>
             </a:r>
             <a:r>
-              <a:rPr lang="ru-RU" altLang="ru-RU" sz="2300" dirty="0" err="1"/>
-              <a:t>небыло</a:t>
+              <a:rPr lang="ru-RU" altLang="ru-RU" sz="2300" dirty="0" smtClean="0"/>
+              <a:t>не было </a:t>
             </a:r>
             <a:r>
               <a:rPr lang="ru-RU" altLang="ru-RU" sz="2300" dirty="0"/>
-              <a:t> утечки данных – признаки не должны опережать временную метку предсказываемого значения.</a:t>
+              <a:t>утечки данных – признаки не должны опережать временную метку предсказываемого значения.</a:t>
             </a:r>
           </a:p>
           <a:p>
@@ -5107,10 +6582,17 @@
   <p:clrMapOvr>
     <a:masterClrMapping/>
   </p:clrMapOvr>
+  <p:timing>
+    <p:tnLst>
+      <p:par>
+        <p:cTn id="1" dur="indefinite" restart="never" nodeType="tmRoot"/>
+      </p:par>
+    </p:tnLst>
+  </p:timing>
 </p:sld>
 </file>
 
-<file path=ppt/slides/slide13.xml><?xml version="1.0" encoding="utf-8"?>
+<file path=ppt/slides/slide16.xml><?xml version="1.0" encoding="utf-8"?>
 <p:sld xmlns:a="http://schemas.openxmlformats.org/drawingml/2006/main" xmlns:r="http://schemas.openxmlformats.org/officeDocument/2006/relationships" xmlns:p="http://schemas.openxmlformats.org/presentationml/2006/main">
   <p:cSld>
     <p:spTree>
@@ -5461,10 +6943,17 @@
   <p:clrMapOvr>
     <a:masterClrMapping/>
   </p:clrMapOvr>
+  <p:timing>
+    <p:tnLst>
+      <p:par>
+        <p:cTn id="1" dur="indefinite" restart="never" nodeType="tmRoot"/>
+      </p:par>
+    </p:tnLst>
+  </p:timing>
 </p:sld>
 </file>
 
-<file path=ppt/slides/slide14.xml><?xml version="1.0" encoding="utf-8"?>
+<file path=ppt/slides/slide17.xml><?xml version="1.0" encoding="utf-8"?>
 <p:sld xmlns:a="http://schemas.openxmlformats.org/drawingml/2006/main" xmlns:r="http://schemas.openxmlformats.org/officeDocument/2006/relationships" xmlns:p="http://schemas.openxmlformats.org/presentationml/2006/main">
   <p:cSld>
     <p:spTree>
@@ -5563,7 +7052,7 @@
         </p:spPr>
         <p:txBody>
           <a:bodyPr>
-            <a:normAutofit fontScale="92500"/>
+            <a:normAutofit fontScale="92500" lnSpcReduction="10000"/>
           </a:bodyPr>
           <a:lstStyle/>
           <a:p>
@@ -5602,8 +7091,12 @@
               </a:spcAft>
             </a:pPr>
             <a:r>
+              <a:rPr lang="ru-RU" altLang="ru-RU" dirty="0" smtClean="0"/>
+              <a:t>Несут </a:t>
+            </a:r>
+            <a:r>
               <a:rPr lang="ru-RU" altLang="ru-RU" dirty="0"/>
-              <a:t>несут неизменную во времени информацию для каждого временного ряда.</a:t>
+              <a:t>неизменную во времени информацию для каждого временного ряда.</a:t>
             </a:r>
             <a:endParaRPr lang="en-US" altLang="ru-RU" dirty="0"/>
           </a:p>
@@ -5625,8 +7118,26 @@
             </a:r>
             <a:r>
               <a:rPr lang="ru-RU" altLang="ru-RU" sz="2400" dirty="0"/>
-              <a:t> идентификаторы регионов, групп товаров и т. д.</a:t>
-            </a:r>
+              <a:t> идентификаторы регионов, групп товаров и т. д</a:t>
+            </a:r>
+            <a:r>
+              <a:rPr lang="ru-RU" altLang="ru-RU" sz="2400" dirty="0" smtClean="0"/>
+              <a:t>.</a:t>
+            </a:r>
+          </a:p>
+          <a:p>
+            <a:pPr lvl="2" eaLnBrk="0" fontAlgn="base" hangingPunct="0">
+              <a:lnSpc>
+                <a:spcPct val="120000"/>
+              </a:lnSpc>
+              <a:spcBef>
+                <a:spcPct val="0"/>
+              </a:spcBef>
+              <a:spcAft>
+                <a:spcPct val="0"/>
+              </a:spcAft>
+            </a:pPr>
+            <a:endParaRPr lang="ru-RU" altLang="ru-RU" sz="2400" dirty="0"/>
           </a:p>
           <a:p>
             <a:pPr eaLnBrk="0" fontAlgn="base" hangingPunct="0">
@@ -5671,8 +7182,26 @@
             </a:r>
             <a:r>
               <a:rPr lang="ru-RU" altLang="ru-RU" sz="2600" dirty="0"/>
-              <a:t> на казуальность.</a:t>
-            </a:r>
+              <a:t> на казуальность</a:t>
+            </a:r>
+            <a:r>
+              <a:rPr lang="ru-RU" altLang="ru-RU" sz="2600" dirty="0" smtClean="0"/>
+              <a:t>.</a:t>
+            </a:r>
+          </a:p>
+          <a:p>
+            <a:pPr lvl="1" eaLnBrk="0" fontAlgn="base" hangingPunct="0">
+              <a:lnSpc>
+                <a:spcPct val="120000"/>
+              </a:lnSpc>
+              <a:spcBef>
+                <a:spcPct val="0"/>
+              </a:spcBef>
+              <a:spcAft>
+                <a:spcPct val="0"/>
+              </a:spcAft>
+            </a:pPr>
+            <a:endParaRPr lang="ru-RU" altLang="ru-RU" sz="2600" dirty="0"/>
           </a:p>
           <a:p>
             <a:pPr eaLnBrk="0" fontAlgn="base" hangingPunct="0">
@@ -5709,7 +7238,32 @@
             </a:pPr>
             <a:r>
               <a:rPr lang="ru-RU" altLang="ru-RU" dirty="0"/>
-              <a:t>Напр. календарные переменные, известные события, (напр. запланированные акции), прогнозы факторов (напр. прогноз погоды для прогноза электропотребления на 1 день).</a:t>
+              <a:t>Напр. календарные переменные, известные события, (напр. запланированные акции</a:t>
+            </a:r>
+            <a:r>
+              <a:rPr lang="ru-RU" altLang="ru-RU" dirty="0" smtClean="0"/>
+              <a:t>),</a:t>
+            </a:r>
+          </a:p>
+          <a:p>
+            <a:pPr lvl="1" eaLnBrk="0" fontAlgn="base" hangingPunct="0">
+              <a:lnSpc>
+                <a:spcPct val="120000"/>
+              </a:lnSpc>
+              <a:spcBef>
+                <a:spcPct val="0"/>
+              </a:spcBef>
+              <a:spcAft>
+                <a:spcPct val="0"/>
+              </a:spcAft>
+            </a:pPr>
+            <a:r>
+              <a:rPr lang="ru-RU" altLang="ru-RU" dirty="0" smtClean="0"/>
+              <a:t>Прогнозы </a:t>
+            </a:r>
+            <a:r>
+              <a:rPr lang="ru-RU" altLang="ru-RU" dirty="0"/>
+              <a:t>факторов (напр. прогноз погоды для прогноза электропотребления на 1 день).</a:t>
             </a:r>
             <a:endParaRPr lang="en-US" altLang="ru-RU" dirty="0"/>
           </a:p>
@@ -5842,10 +7396,17 @@
   <p:clrMapOvr>
     <a:masterClrMapping/>
   </p:clrMapOvr>
+  <p:timing>
+    <p:tnLst>
+      <p:par>
+        <p:cTn id="1" dur="indefinite" restart="never" nodeType="tmRoot"/>
+      </p:par>
+    </p:tnLst>
+  </p:timing>
 </p:sld>
 </file>
 
-<file path=ppt/slides/slide15.xml><?xml version="1.0" encoding="utf-8"?>
+<file path=ppt/slides/slide18.xml><?xml version="1.0" encoding="utf-8"?>
 <p:sld xmlns:a="http://schemas.openxmlformats.org/drawingml/2006/main" xmlns:r="http://schemas.openxmlformats.org/officeDocument/2006/relationships" xmlns:p="http://schemas.openxmlformats.org/presentationml/2006/main">
   <p:cSld>
     <p:spTree>
@@ -5874,6 +7435,322 @@
         </p:nvSpPr>
         <p:spPr>
           <a:xfrm>
+            <a:off x="280146" y="238498"/>
+            <a:ext cx="11111753" cy="656851"/>
+          </a:xfrm>
+        </p:spPr>
+        <p:txBody>
+          <a:bodyPr>
+            <a:normAutofit fontScale="90000"/>
+          </a:bodyPr>
+          <a:lstStyle/>
+          <a:p>
+            <a:pPr lvl="0"/>
+            <a:r>
+              <a:rPr lang="ru-RU" altLang="ru-RU" b="1" dirty="0" smtClean="0">
+                <a:solidFill>
+                  <a:srgbClr val="0D47A1"/>
+                </a:solidFill>
+                <a:latin typeface="system-ui"/>
+              </a:rPr>
+              <a:t>Многомерные ВР</a:t>
+            </a:r>
+            <a:r>
+              <a:rPr lang="ru-RU" altLang="ru-RU" dirty="0" smtClean="0"/>
+              <a:t>:</a:t>
+            </a:r>
+            <a:r>
+              <a:rPr lang="ru-RU" altLang="ru-RU" dirty="0">
+                <a:latin typeface="system-ui"/>
+              </a:rPr>
+              <a:t> </a:t>
+            </a:r>
+            <a:endParaRPr lang="ru-RU" dirty="0"/>
+          </a:p>
+        </p:txBody>
+      </p:sp>
+      <p:sp>
+        <p:nvSpPr>
+          <p:cNvPr id="3" name="Объект 2"/>
+          <p:cNvSpPr>
+            <a:spLocks noGrp="1"/>
+          </p:cNvSpPr>
+          <p:nvPr>
+            <p:ph idx="1"/>
+          </p:nvPr>
+        </p:nvSpPr>
+        <p:spPr>
+          <a:xfrm>
+            <a:off x="134470" y="761998"/>
+            <a:ext cx="11949953" cy="5862919"/>
+          </a:xfrm>
+        </p:spPr>
+        <p:txBody>
+          <a:bodyPr>
+            <a:normAutofit/>
+          </a:bodyPr>
+          <a:lstStyle/>
+          <a:p>
+            <a:pPr lvl="1" eaLnBrk="0" fontAlgn="base" hangingPunct="0">
+              <a:lnSpc>
+                <a:spcPct val="120000"/>
+              </a:lnSpc>
+              <a:spcBef>
+                <a:spcPct val="0"/>
+              </a:spcBef>
+              <a:spcAft>
+                <a:spcPct val="0"/>
+              </a:spcAft>
+            </a:pPr>
+            <a:endParaRPr lang="ru-RU" altLang="ru-RU" dirty="0"/>
+          </a:p>
+          <a:p>
+            <a:pPr marL="0" lvl="0" indent="0" eaLnBrk="0" fontAlgn="base" hangingPunct="0">
+              <a:lnSpc>
+                <a:spcPct val="100000"/>
+              </a:lnSpc>
+              <a:spcBef>
+                <a:spcPct val="0"/>
+              </a:spcBef>
+              <a:spcAft>
+                <a:spcPct val="0"/>
+              </a:spcAft>
+              <a:buNone/>
+            </a:pPr>
+            <a:endParaRPr kumimoji="0" lang="ru-RU" altLang="ru-RU" sz="5400" b="0" i="0" u="none" strike="noStrike" cap="none" normalizeH="0" baseline="0" dirty="0">
+              <a:ln>
+                <a:noFill/>
+              </a:ln>
+              <a:solidFill>
+                <a:schemeClr val="tx1"/>
+              </a:solidFill>
+              <a:effectLst/>
+            </a:endParaRPr>
+          </a:p>
+          <a:p>
+            <a:endParaRPr lang="ru-RU" dirty="0"/>
+          </a:p>
+        </p:txBody>
+      </p:sp>
+      <p:pic>
+        <p:nvPicPr>
+          <p:cNvPr id="2050" name="Picture 2" descr="No description has been provided for this image"/>
+          <p:cNvPicPr>
+            <a:picLocks noChangeAspect="1" noChangeArrowheads="1"/>
+          </p:cNvPicPr>
+          <p:nvPr/>
+        </p:nvPicPr>
+        <p:blipFill>
+          <a:blip r:embed="rId3" cstate="print">
+            <a:extLst>
+              <a:ext uri="{28A0092B-C50C-407E-A947-70E740481C1C}">
+                <a14:useLocalDpi xmlns:a14="http://schemas.microsoft.com/office/drawing/2010/main" val="0"/>
+              </a:ext>
+            </a:extLst>
+          </a:blip>
+          <a:srcRect/>
+          <a:stretch>
+            <a:fillRect/>
+          </a:stretch>
+        </p:blipFill>
+        <p:spPr bwMode="auto">
+          <a:xfrm>
+            <a:off x="4714874" y="3704520"/>
+            <a:ext cx="6391275" cy="2920397"/>
+          </a:xfrm>
+          <a:prstGeom prst="rect">
+            <a:avLst/>
+          </a:prstGeom>
+          <a:noFill/>
+          <a:extLst>
+            <a:ext uri="{909E8E84-426E-40DD-AFC4-6F175D3DCCD1}">
+              <a14:hiddenFill xmlns:a14="http://schemas.microsoft.com/office/drawing/2010/main">
+                <a:solidFill>
+                  <a:srgbClr val="FFFFFF"/>
+                </a:solidFill>
+              </a14:hiddenFill>
+            </a:ext>
+          </a:extLst>
+        </p:spPr>
+      </p:pic>
+      <p:pic>
+        <p:nvPicPr>
+          <p:cNvPr id="2052" name="Picture 4" descr="No description has been provided for this image"/>
+          <p:cNvPicPr>
+            <a:picLocks noChangeAspect="1" noChangeArrowheads="1"/>
+          </p:cNvPicPr>
+          <p:nvPr/>
+        </p:nvPicPr>
+        <p:blipFill>
+          <a:blip r:embed="rId4" cstate="print">
+            <a:extLst>
+              <a:ext uri="{28A0092B-C50C-407E-A947-70E740481C1C}">
+                <a14:useLocalDpi xmlns:a14="http://schemas.microsoft.com/office/drawing/2010/main" val="0"/>
+              </a:ext>
+            </a:extLst>
+          </a:blip>
+          <a:srcRect/>
+          <a:stretch>
+            <a:fillRect/>
+          </a:stretch>
+        </p:blipFill>
+        <p:spPr bwMode="auto">
+          <a:xfrm>
+            <a:off x="596900" y="969307"/>
+            <a:ext cx="8223249" cy="3151578"/>
+          </a:xfrm>
+          <a:prstGeom prst="rect">
+            <a:avLst/>
+          </a:prstGeom>
+          <a:noFill/>
+          <a:extLst>
+            <a:ext uri="{909E8E84-426E-40DD-AFC4-6F175D3DCCD1}">
+              <a14:hiddenFill xmlns:a14="http://schemas.microsoft.com/office/drawing/2010/main">
+                <a:solidFill>
+                  <a:srgbClr val="FFFFFF"/>
+                </a:solidFill>
+              </a14:hiddenFill>
+            </a:ext>
+          </a:extLst>
+        </p:spPr>
+      </p:pic>
+      <p:sp>
+        <p:nvSpPr>
+          <p:cNvPr id="4" name="Прямоугольник 3"/>
+          <p:cNvSpPr/>
+          <p:nvPr/>
+        </p:nvSpPr>
+        <p:spPr>
+          <a:xfrm>
+            <a:off x="723900" y="6624917"/>
+            <a:ext cx="6096000" cy="276999"/>
+          </a:xfrm>
+          <a:prstGeom prst="rect">
+            <a:avLst/>
+          </a:prstGeom>
+        </p:spPr>
+        <p:txBody>
+          <a:bodyPr>
+            <a:spAutoFit/>
+          </a:bodyPr>
+          <a:lstStyle/>
+          <a:p>
+            <a:r>
+              <a:rPr lang="ru-RU" sz="1200" dirty="0"/>
+              <a:t>https://skforecast.org/latest/user_guides/independent-multi-time-series-forecasting</a:t>
+            </a:r>
+          </a:p>
+        </p:txBody>
+      </p:sp>
+      <p:sp>
+        <p:nvSpPr>
+          <p:cNvPr id="5" name="TextBox 4"/>
+          <p:cNvSpPr txBox="1"/>
+          <p:nvPr/>
+        </p:nvSpPr>
+        <p:spPr>
+          <a:xfrm>
+            <a:off x="1057275" y="1049517"/>
+            <a:ext cx="1832553" cy="369332"/>
+          </a:xfrm>
+          <a:prstGeom prst="rect">
+            <a:avLst/>
+          </a:prstGeom>
+          <a:noFill/>
+        </p:spPr>
+        <p:txBody>
+          <a:bodyPr wrap="none" rtlCol="0">
+            <a:spAutoFit/>
+          </a:bodyPr>
+          <a:lstStyle/>
+          <a:p>
+            <a:r>
+              <a:rPr lang="ru-RU" dirty="0" smtClean="0"/>
+              <a:t>Независимые ВР</a:t>
+            </a:r>
+            <a:endParaRPr lang="ru-RU" dirty="0"/>
+          </a:p>
+        </p:txBody>
+      </p:sp>
+      <p:sp>
+        <p:nvSpPr>
+          <p:cNvPr id="8" name="TextBox 7"/>
+          <p:cNvSpPr txBox="1"/>
+          <p:nvPr/>
+        </p:nvSpPr>
+        <p:spPr>
+          <a:xfrm>
+            <a:off x="5476875" y="4074719"/>
+            <a:ext cx="1547027" cy="369332"/>
+          </a:xfrm>
+          <a:prstGeom prst="rect">
+            <a:avLst/>
+          </a:prstGeom>
+          <a:noFill/>
+        </p:spPr>
+        <p:txBody>
+          <a:bodyPr wrap="none" rtlCol="0">
+            <a:spAutoFit/>
+          </a:bodyPr>
+          <a:lstStyle/>
+          <a:p>
+            <a:r>
+              <a:rPr lang="ru-RU" dirty="0" smtClean="0"/>
+              <a:t>Связанные ВР</a:t>
+            </a:r>
+            <a:endParaRPr lang="ru-RU" dirty="0"/>
+          </a:p>
+        </p:txBody>
+      </p:sp>
+    </p:spTree>
+    <p:extLst>
+      <p:ext uri="{BB962C8B-B14F-4D97-AF65-F5344CB8AC3E}">
+        <p14:creationId xmlns:p14="http://schemas.microsoft.com/office/powerpoint/2010/main" val="804076351"/>
+      </p:ext>
+    </p:extLst>
+  </p:cSld>
+  <p:clrMapOvr>
+    <a:masterClrMapping/>
+  </p:clrMapOvr>
+  <p:timing>
+    <p:tnLst>
+      <p:par>
+        <p:cTn id="1" dur="indefinite" restart="never" nodeType="tmRoot"/>
+      </p:par>
+    </p:tnLst>
+  </p:timing>
+</p:sld>
+</file>
+
+<file path=ppt/slides/slide19.xml><?xml version="1.0" encoding="utf-8"?>
+<p:sld xmlns:a="http://schemas.openxmlformats.org/drawingml/2006/main" xmlns:r="http://schemas.openxmlformats.org/officeDocument/2006/relationships" xmlns:p="http://schemas.openxmlformats.org/presentationml/2006/main">
+  <p:cSld>
+    <p:spTree>
+      <p:nvGrpSpPr>
+        <p:cNvPr id="1" name=""/>
+        <p:cNvGrpSpPr/>
+        <p:nvPr/>
+      </p:nvGrpSpPr>
+      <p:grpSpPr>
+        <a:xfrm>
+          <a:off x="0" y="0"/>
+          <a:ext cx="0" cy="0"/>
+          <a:chOff x="0" y="0"/>
+          <a:chExt cx="0" cy="0"/>
+        </a:xfrm>
+      </p:grpSpPr>
+      <p:sp>
+        <p:nvSpPr>
+          <p:cNvPr id="2" name="Заголовок 1"/>
+          <p:cNvSpPr>
+            <a:spLocks noGrp="1"/>
+          </p:cNvSpPr>
+          <p:nvPr>
+            <p:ph type="title"/>
+          </p:nvPr>
+        </p:nvSpPr>
+        <p:spPr>
+          <a:xfrm>
             <a:off x="228600" y="266721"/>
             <a:ext cx="11134725" cy="863600"/>
           </a:xfrm>
@@ -6147,10 +8024,2505 @@
   <p:clrMapOvr>
     <a:masterClrMapping/>
   </p:clrMapOvr>
+  <p:timing>
+    <p:tnLst>
+      <p:par>
+        <p:cTn id="1" dur="indefinite" restart="never" nodeType="tmRoot"/>
+      </p:par>
+    </p:tnLst>
+  </p:timing>
 </p:sld>
 </file>
 
-<file path=ppt/slides/slide16.xml><?xml version="1.0" encoding="utf-8"?>
+<file path=ppt/slides/slide2.xml><?xml version="1.0" encoding="utf-8"?>
+<p:sld xmlns:a="http://schemas.openxmlformats.org/drawingml/2006/main" xmlns:r="http://schemas.openxmlformats.org/officeDocument/2006/relationships" xmlns:p="http://schemas.openxmlformats.org/presentationml/2006/main">
+  <p:cSld>
+    <p:spTree>
+      <p:nvGrpSpPr>
+        <p:cNvPr id="1" name=""/>
+        <p:cNvGrpSpPr/>
+        <p:nvPr/>
+      </p:nvGrpSpPr>
+      <p:grpSpPr>
+        <a:xfrm>
+          <a:off x="0" y="0"/>
+          <a:ext cx="0" cy="0"/>
+          <a:chOff x="0" y="0"/>
+          <a:chExt cx="0" cy="0"/>
+        </a:xfrm>
+      </p:grpSpPr>
+      <p:sp>
+        <p:nvSpPr>
+          <p:cNvPr id="2" name="Заголовок 1"/>
+          <p:cNvSpPr>
+            <a:spLocks noGrp="1"/>
+          </p:cNvSpPr>
+          <p:nvPr>
+            <p:ph type="title"/>
+          </p:nvPr>
+        </p:nvSpPr>
+        <p:spPr>
+          <a:xfrm>
+            <a:off x="300443" y="102210"/>
+            <a:ext cx="10927080" cy="557984"/>
+          </a:xfrm>
+        </p:spPr>
+        <p:txBody>
+          <a:bodyPr>
+            <a:normAutofit fontScale="90000"/>
+          </a:bodyPr>
+          <a:lstStyle/>
+          <a:p>
+            <a:r>
+              <a:rPr lang="ru-RU" dirty="0" err="1"/>
+              <a:t>Бенчмарки</a:t>
+            </a:r>
+            <a:r>
+              <a:rPr lang="ru-RU" dirty="0"/>
+              <a:t> предсказания временных рядов</a:t>
+            </a:r>
+          </a:p>
+        </p:txBody>
+      </p:sp>
+      <p:graphicFrame>
+        <p:nvGraphicFramePr>
+          <p:cNvPr id="5" name="Объект 4"/>
+          <p:cNvGraphicFramePr>
+            <a:graphicFrameLocks noGrp="1"/>
+          </p:cNvGraphicFramePr>
+          <p:nvPr>
+            <p:ph idx="1"/>
+          </p:nvPr>
+        </p:nvGraphicFramePr>
+        <p:xfrm>
+          <a:off x="228598" y="1401333"/>
+          <a:ext cx="11671666" cy="4494123"/>
+        </p:xfrm>
+        <a:graphic>
+          <a:graphicData uri="http://schemas.openxmlformats.org/drawingml/2006/table">
+            <a:tbl>
+              <a:tblPr firstRow="1" firstCol="1" bandRow="1">
+                <a:tableStyleId>{5C22544A-7EE6-4342-B048-85BDC9FD1C3A}</a:tableStyleId>
+              </a:tblPr>
+              <a:tblGrid>
+                <a:gridCol w="745472">
+                  <a:extLst>
+                    <a:ext uri="{9D8B030D-6E8A-4147-A177-3AD203B41FA5}">
+                      <a16:colId xmlns:a16="http://schemas.microsoft.com/office/drawing/2014/main" val="361956609"/>
+                    </a:ext>
+                  </a:extLst>
+                </a:gridCol>
+                <a:gridCol w="2770616">
+                  <a:extLst>
+                    <a:ext uri="{9D8B030D-6E8A-4147-A177-3AD203B41FA5}">
+                      <a16:colId xmlns:a16="http://schemas.microsoft.com/office/drawing/2014/main" val="3343733240"/>
+                    </a:ext>
+                  </a:extLst>
+                </a:gridCol>
+                <a:gridCol w="2011680">
+                  <a:extLst>
+                    <a:ext uri="{9D8B030D-6E8A-4147-A177-3AD203B41FA5}">
+                      <a16:colId xmlns:a16="http://schemas.microsoft.com/office/drawing/2014/main" val="1153032671"/>
+                    </a:ext>
+                  </a:extLst>
+                </a:gridCol>
+                <a:gridCol w="1619794">
+                  <a:extLst>
+                    <a:ext uri="{9D8B030D-6E8A-4147-A177-3AD203B41FA5}">
+                      <a16:colId xmlns:a16="http://schemas.microsoft.com/office/drawing/2014/main" val="2248710687"/>
+                    </a:ext>
+                  </a:extLst>
+                </a:gridCol>
+                <a:gridCol w="1245326">
+                  <a:extLst>
+                    <a:ext uri="{9D8B030D-6E8A-4147-A177-3AD203B41FA5}">
+                      <a16:colId xmlns:a16="http://schemas.microsoft.com/office/drawing/2014/main" val="1572364774"/>
+                    </a:ext>
+                  </a:extLst>
+                </a:gridCol>
+                <a:gridCol w="1140823">
+                  <a:extLst>
+                    <a:ext uri="{9D8B030D-6E8A-4147-A177-3AD203B41FA5}">
+                      <a16:colId xmlns:a16="http://schemas.microsoft.com/office/drawing/2014/main" val="428262337"/>
+                    </a:ext>
+                  </a:extLst>
+                </a:gridCol>
+                <a:gridCol w="2137955">
+                  <a:extLst>
+                    <a:ext uri="{9D8B030D-6E8A-4147-A177-3AD203B41FA5}">
+                      <a16:colId xmlns:a16="http://schemas.microsoft.com/office/drawing/2014/main" val="584638817"/>
+                    </a:ext>
+                  </a:extLst>
+                </a:gridCol>
+              </a:tblGrid>
+              <a:tr h="199095">
+                <a:tc>
+                  <a:txBody>
+                    <a:bodyPr/>
+                    <a:lstStyle/>
+                    <a:p>
+                      <a:pPr algn="ctr">
+                        <a:lnSpc>
+                          <a:spcPct val="107000"/>
+                        </a:lnSpc>
+                        <a:spcAft>
+                          <a:spcPts val="0"/>
+                        </a:spcAft>
+                      </a:pPr>
+                      <a:r>
+                        <a:rPr lang="en-US" sz="1600" dirty="0">
+                          <a:effectLst/>
+                          <a:latin typeface="+mn-lt"/>
+                          <a:ea typeface="+mn-ea"/>
+                          <a:cs typeface="+mn-cs"/>
+                        </a:rPr>
+                        <a:t>bench</a:t>
+                      </a:r>
+                      <a:endParaRPr lang="ru-RU" sz="1600" dirty="0">
+                        <a:effectLst/>
+                        <a:latin typeface="Calibri" panose="020F0502020204030204" pitchFamily="34" charset="0"/>
+                        <a:ea typeface="Calibri" panose="020F0502020204030204" pitchFamily="34" charset="0"/>
+                        <a:cs typeface="Times New Roman" panose="02020603050405020304" pitchFamily="18" charset="0"/>
+                      </a:endParaRPr>
+                    </a:p>
+                  </a:txBody>
+                  <a:tcPr marL="4248" marR="4248" marT="4248" marB="4248" anchor="ctr"/>
+                </a:tc>
+                <a:tc>
+                  <a:txBody>
+                    <a:bodyPr/>
+                    <a:lstStyle/>
+                    <a:p>
+                      <a:pPr algn="ctr">
+                        <a:lnSpc>
+                          <a:spcPct val="107000"/>
+                        </a:lnSpc>
+                        <a:spcAft>
+                          <a:spcPts val="0"/>
+                        </a:spcAft>
+                      </a:pPr>
+                      <a:r>
+                        <a:rPr lang="ru-RU" sz="1600" dirty="0">
+                          <a:effectLst/>
+                          <a:latin typeface="+mn-lt"/>
+                          <a:ea typeface="+mn-ea"/>
+                          <a:cs typeface="+mn-cs"/>
+                        </a:rPr>
+                        <a:t>Данные/задачи</a:t>
+                      </a:r>
+                      <a:endParaRPr lang="ru-RU" sz="1600" dirty="0">
+                        <a:effectLst/>
+                        <a:latin typeface="Calibri" panose="020F0502020204030204" pitchFamily="34" charset="0"/>
+                        <a:ea typeface="Calibri" panose="020F0502020204030204" pitchFamily="34" charset="0"/>
+                        <a:cs typeface="Times New Roman" panose="02020603050405020304" pitchFamily="18" charset="0"/>
+                      </a:endParaRPr>
+                    </a:p>
+                  </a:txBody>
+                  <a:tcPr marL="4248" marR="4248" marT="4248" marB="4248" anchor="ctr"/>
+                </a:tc>
+                <a:tc>
+                  <a:txBody>
+                    <a:bodyPr/>
+                    <a:lstStyle/>
+                    <a:p>
+                      <a:pPr algn="ctr">
+                        <a:lnSpc>
+                          <a:spcPct val="107000"/>
+                        </a:lnSpc>
+                        <a:spcAft>
+                          <a:spcPts val="0"/>
+                        </a:spcAft>
+                      </a:pPr>
+                      <a:r>
+                        <a:rPr lang="ru-RU" sz="1600">
+                          <a:effectLst/>
+                        </a:rPr>
+                        <a:t>Цель бенчмарка</a:t>
+                      </a:r>
+                      <a:endParaRPr lang="ru-RU" sz="1600">
+                        <a:effectLst/>
+                        <a:latin typeface="Calibri" panose="020F0502020204030204" pitchFamily="34" charset="0"/>
+                        <a:ea typeface="Calibri" panose="020F0502020204030204" pitchFamily="34" charset="0"/>
+                        <a:cs typeface="Times New Roman" panose="02020603050405020304" pitchFamily="18" charset="0"/>
+                      </a:endParaRPr>
+                    </a:p>
+                  </a:txBody>
+                  <a:tcPr marL="4248" marR="4248" marT="4248" marB="4248" anchor="ctr"/>
+                </a:tc>
+                <a:tc>
+                  <a:txBody>
+                    <a:bodyPr/>
+                    <a:lstStyle/>
+                    <a:p>
+                      <a:pPr algn="ctr">
+                        <a:lnSpc>
+                          <a:spcPct val="107000"/>
+                        </a:lnSpc>
+                        <a:spcAft>
+                          <a:spcPts val="0"/>
+                        </a:spcAft>
+                      </a:pPr>
+                      <a:r>
+                        <a:rPr lang="ru-RU" sz="1600" dirty="0">
+                          <a:effectLst/>
+                        </a:rPr>
+                        <a:t>Модели</a:t>
+                      </a:r>
+                      <a:endParaRPr lang="ru-RU" sz="1600" dirty="0">
+                        <a:effectLst/>
+                        <a:latin typeface="Calibri" panose="020F0502020204030204" pitchFamily="34" charset="0"/>
+                        <a:ea typeface="Calibri" panose="020F0502020204030204" pitchFamily="34" charset="0"/>
+                        <a:cs typeface="Times New Roman" panose="02020603050405020304" pitchFamily="18" charset="0"/>
+                      </a:endParaRPr>
+                    </a:p>
+                  </a:txBody>
+                  <a:tcPr marL="4248" marR="4248" marT="4248" marB="4248" anchor="ctr"/>
+                </a:tc>
+                <a:tc>
+                  <a:txBody>
+                    <a:bodyPr/>
+                    <a:lstStyle/>
+                    <a:p>
+                      <a:pPr algn="ctr">
+                        <a:lnSpc>
+                          <a:spcPct val="107000"/>
+                        </a:lnSpc>
+                        <a:spcAft>
+                          <a:spcPts val="0"/>
+                        </a:spcAft>
+                      </a:pPr>
+                      <a:r>
+                        <a:rPr lang="ru-RU" sz="1600">
+                          <a:effectLst/>
+                        </a:rPr>
+                        <a:t>Метрики</a:t>
+                      </a:r>
+                      <a:endParaRPr lang="ru-RU" sz="1600">
+                        <a:effectLst/>
+                        <a:latin typeface="Calibri" panose="020F0502020204030204" pitchFamily="34" charset="0"/>
+                        <a:ea typeface="Calibri" panose="020F0502020204030204" pitchFamily="34" charset="0"/>
+                        <a:cs typeface="Times New Roman" panose="02020603050405020304" pitchFamily="18" charset="0"/>
+                      </a:endParaRPr>
+                    </a:p>
+                  </a:txBody>
+                  <a:tcPr marL="4248" marR="4248" marT="4248" marB="4248" anchor="ctr"/>
+                </a:tc>
+                <a:tc>
+                  <a:txBody>
+                    <a:bodyPr/>
+                    <a:lstStyle/>
+                    <a:p>
+                      <a:pPr algn="ctr">
+                        <a:lnSpc>
+                          <a:spcPct val="107000"/>
+                        </a:lnSpc>
+                        <a:spcAft>
+                          <a:spcPts val="0"/>
+                        </a:spcAft>
+                      </a:pPr>
+                      <a:r>
+                        <a:rPr lang="ru-RU" sz="1600" dirty="0">
+                          <a:effectLst/>
+                        </a:rPr>
+                        <a:t>Победители</a:t>
+                      </a:r>
+                      <a:endParaRPr lang="ru-RU" sz="1600" dirty="0">
+                        <a:effectLst/>
+                        <a:latin typeface="Calibri" panose="020F0502020204030204" pitchFamily="34" charset="0"/>
+                        <a:ea typeface="Calibri" panose="020F0502020204030204" pitchFamily="34" charset="0"/>
+                        <a:cs typeface="Times New Roman" panose="02020603050405020304" pitchFamily="18" charset="0"/>
+                      </a:endParaRPr>
+                    </a:p>
+                  </a:txBody>
+                  <a:tcPr marL="4248" marR="4248" marT="4248" marB="4248" anchor="ctr"/>
+                </a:tc>
+                <a:tc>
+                  <a:txBody>
+                    <a:bodyPr/>
+                    <a:lstStyle/>
+                    <a:p>
+                      <a:pPr algn="ctr">
+                        <a:lnSpc>
+                          <a:spcPct val="107000"/>
+                        </a:lnSpc>
+                        <a:spcAft>
+                          <a:spcPts val="0"/>
+                        </a:spcAft>
+                      </a:pPr>
+                      <a:r>
+                        <a:rPr lang="ru-RU" sz="1600" dirty="0">
+                          <a:effectLst/>
+                          <a:latin typeface="Calibri" panose="020F0502020204030204" pitchFamily="34" charset="0"/>
+                          <a:ea typeface="Calibri" panose="020F0502020204030204" pitchFamily="34" charset="0"/>
+                          <a:cs typeface="Times New Roman" panose="02020603050405020304" pitchFamily="18" charset="0"/>
+                        </a:rPr>
+                        <a:t>Выводы </a:t>
+                      </a:r>
+                    </a:p>
+                  </a:txBody>
+                  <a:tcPr marL="4248" marR="4248" marT="4248" marB="4248" anchor="ctr"/>
+                </a:tc>
+                <a:extLst>
+                  <a:ext uri="{0D108BD9-81ED-4DB2-BD59-A6C34878D82A}">
+                    <a16:rowId xmlns:a16="http://schemas.microsoft.com/office/drawing/2014/main" val="1178824914"/>
+                  </a:ext>
+                </a:extLst>
+              </a:tr>
+              <a:tr h="391912">
+                <a:tc>
+                  <a:txBody>
+                    <a:bodyPr/>
+                    <a:lstStyle/>
+                    <a:p>
+                      <a:pPr algn="ctr">
+                        <a:lnSpc>
+                          <a:spcPct val="107000"/>
+                        </a:lnSpc>
+                        <a:spcAft>
+                          <a:spcPts val="0"/>
+                        </a:spcAft>
+                      </a:pPr>
+                      <a:r>
+                        <a:rPr lang="ru-RU" sz="1600" dirty="0">
+                          <a:effectLst/>
+                        </a:rPr>
+                        <a:t>M1 (1982)</a:t>
+                      </a:r>
+                      <a:endParaRPr lang="ru-RU" sz="1600" dirty="0">
+                        <a:effectLst/>
+                        <a:latin typeface="Calibri" panose="020F0502020204030204" pitchFamily="34" charset="0"/>
+                        <a:ea typeface="Calibri" panose="020F0502020204030204" pitchFamily="34" charset="0"/>
+                        <a:cs typeface="Times New Roman" panose="02020603050405020304" pitchFamily="18" charset="0"/>
+                      </a:endParaRPr>
+                    </a:p>
+                  </a:txBody>
+                  <a:tcPr marL="4248" marR="4248" marT="4248" marB="4248" anchor="ctr"/>
+                </a:tc>
+                <a:tc>
+                  <a:txBody>
+                    <a:bodyPr/>
+                    <a:lstStyle/>
+                    <a:p>
+                      <a:pPr marL="0" marR="0" indent="0" algn="l" defTabSz="914400" rtl="0" eaLnBrk="1" fontAlgn="auto" latinLnBrk="0" hangingPunct="1">
+                        <a:lnSpc>
+                          <a:spcPct val="107000"/>
+                        </a:lnSpc>
+                        <a:spcBef>
+                          <a:spcPts val="0"/>
+                        </a:spcBef>
+                        <a:spcAft>
+                          <a:spcPts val="0"/>
+                        </a:spcAft>
+                        <a:buClrTx/>
+                        <a:buSzTx/>
+                        <a:buFontTx/>
+                        <a:buNone/>
+                        <a:tabLst/>
+                        <a:defRPr/>
+                      </a:pPr>
+                      <a:r>
+                        <a:rPr lang="en-US" sz="1600" dirty="0">
+                          <a:effectLst/>
+                        </a:rPr>
+                        <a:t>1001 </a:t>
+                      </a:r>
+                      <a:r>
+                        <a:rPr lang="ru-RU" sz="1600" dirty="0" err="1">
+                          <a:effectLst/>
+                        </a:rPr>
+                        <a:t>Univariate</a:t>
+                      </a:r>
+                      <a:r>
+                        <a:rPr lang="ru-RU" sz="1600" dirty="0">
+                          <a:effectLst/>
+                        </a:rPr>
+                        <a:t> финансы, демография</a:t>
+                      </a:r>
+                      <a:endParaRPr lang="ru-RU" sz="1600" dirty="0">
+                        <a:effectLst/>
+                        <a:latin typeface="Calibri" panose="020F0502020204030204" pitchFamily="34" charset="0"/>
+                        <a:ea typeface="Calibri" panose="020F0502020204030204" pitchFamily="34" charset="0"/>
+                        <a:cs typeface="Times New Roman" panose="02020603050405020304" pitchFamily="18" charset="0"/>
+                      </a:endParaRPr>
+                    </a:p>
+                  </a:txBody>
+                  <a:tcPr marL="4248" marR="4248" marT="4248" marB="4248" anchor="ctr"/>
+                </a:tc>
+                <a:tc>
+                  <a:txBody>
+                    <a:bodyPr/>
+                    <a:lstStyle/>
+                    <a:p>
+                      <a:pPr>
+                        <a:lnSpc>
+                          <a:spcPct val="107000"/>
+                        </a:lnSpc>
+                        <a:spcAft>
+                          <a:spcPts val="0"/>
+                        </a:spcAft>
+                      </a:pPr>
+                      <a:r>
+                        <a:rPr lang="ru-RU" sz="1600" dirty="0">
+                          <a:effectLst/>
+                        </a:rPr>
+                        <a:t>Сравнение классических моделей</a:t>
+                      </a:r>
+                      <a:endParaRPr lang="ru-RU" sz="1600" dirty="0">
+                        <a:effectLst/>
+                        <a:latin typeface="Calibri" panose="020F0502020204030204" pitchFamily="34" charset="0"/>
+                        <a:ea typeface="Calibri" panose="020F0502020204030204" pitchFamily="34" charset="0"/>
+                        <a:cs typeface="Times New Roman" panose="02020603050405020304" pitchFamily="18" charset="0"/>
+                      </a:endParaRPr>
+                    </a:p>
+                  </a:txBody>
+                  <a:tcPr marL="4248" marR="4248" marT="4248" marB="4248" anchor="ctr"/>
+                </a:tc>
+                <a:tc>
+                  <a:txBody>
+                    <a:bodyPr/>
+                    <a:lstStyle/>
+                    <a:p>
+                      <a:pPr>
+                        <a:lnSpc>
+                          <a:spcPct val="107000"/>
+                        </a:lnSpc>
+                        <a:spcAft>
+                          <a:spcPts val="0"/>
+                        </a:spcAft>
+                      </a:pPr>
+                      <a:r>
+                        <a:rPr lang="ru-RU" sz="1700" dirty="0">
+                          <a:effectLst/>
+                        </a:rPr>
+                        <a:t>ARIMA, ETS</a:t>
+                      </a:r>
+                      <a:endParaRPr lang="ru-RU" sz="1700" dirty="0">
+                        <a:effectLst/>
+                        <a:latin typeface="Calibri" panose="020F0502020204030204" pitchFamily="34" charset="0"/>
+                        <a:ea typeface="Calibri" panose="020F0502020204030204" pitchFamily="34" charset="0"/>
+                        <a:cs typeface="Times New Roman" panose="02020603050405020304" pitchFamily="18" charset="0"/>
+                      </a:endParaRPr>
+                    </a:p>
+                  </a:txBody>
+                  <a:tcPr marL="4248" marR="4248" marT="4248" marB="4248" anchor="ctr"/>
+                </a:tc>
+                <a:tc>
+                  <a:txBody>
+                    <a:bodyPr/>
+                    <a:lstStyle/>
+                    <a:p>
+                      <a:pPr>
+                        <a:lnSpc>
+                          <a:spcPct val="107000"/>
+                        </a:lnSpc>
+                        <a:spcAft>
+                          <a:spcPts val="0"/>
+                        </a:spcAft>
+                      </a:pPr>
+                      <a:r>
+                        <a:rPr lang="ru-RU" sz="1600">
+                          <a:effectLst/>
+                        </a:rPr>
+                        <a:t>MAPE, RMSE</a:t>
+                      </a:r>
+                      <a:endParaRPr lang="ru-RU" sz="1600">
+                        <a:effectLst/>
+                        <a:latin typeface="Calibri" panose="020F0502020204030204" pitchFamily="34" charset="0"/>
+                        <a:ea typeface="Calibri" panose="020F0502020204030204" pitchFamily="34" charset="0"/>
+                        <a:cs typeface="Times New Roman" panose="02020603050405020304" pitchFamily="18" charset="0"/>
+                      </a:endParaRPr>
+                    </a:p>
+                  </a:txBody>
+                  <a:tcPr marL="4248" marR="4248" marT="4248" marB="4248" anchor="ctr"/>
+                </a:tc>
+                <a:tc>
+                  <a:txBody>
+                    <a:bodyPr/>
+                    <a:lstStyle/>
+                    <a:p>
+                      <a:pPr>
+                        <a:lnSpc>
+                          <a:spcPct val="107000"/>
+                        </a:lnSpc>
+                        <a:spcAft>
+                          <a:spcPts val="0"/>
+                        </a:spcAft>
+                      </a:pPr>
+                      <a:r>
+                        <a:rPr lang="ru-RU" sz="1600" dirty="0">
+                          <a:effectLst/>
+                        </a:rPr>
+                        <a:t>ETS, ARIMA</a:t>
+                      </a:r>
+                      <a:endParaRPr lang="ru-RU" sz="1600" dirty="0">
+                        <a:effectLst/>
+                        <a:latin typeface="Calibri" panose="020F0502020204030204" pitchFamily="34" charset="0"/>
+                        <a:ea typeface="Calibri" panose="020F0502020204030204" pitchFamily="34" charset="0"/>
+                        <a:cs typeface="Times New Roman" panose="02020603050405020304" pitchFamily="18" charset="0"/>
+                      </a:endParaRPr>
+                    </a:p>
+                  </a:txBody>
+                  <a:tcPr marL="4248" marR="4248" marT="4248" marB="4248" anchor="ctr"/>
+                </a:tc>
+                <a:tc>
+                  <a:txBody>
+                    <a:bodyPr/>
+                    <a:lstStyle/>
+                    <a:p>
+                      <a:pPr>
+                        <a:lnSpc>
+                          <a:spcPct val="107000"/>
+                        </a:lnSpc>
+                        <a:spcAft>
+                          <a:spcPts val="0"/>
+                        </a:spcAft>
+                      </a:pPr>
+                      <a:r>
+                        <a:rPr lang="en-US" sz="1600" dirty="0">
+                          <a:effectLst/>
+                          <a:latin typeface="Calibri" panose="020F0502020204030204" pitchFamily="34" charset="0"/>
+                          <a:ea typeface="Calibri" panose="020F0502020204030204" pitchFamily="34" charset="0"/>
+                          <a:cs typeface="Times New Roman" panose="02020603050405020304" pitchFamily="18" charset="0"/>
+                        </a:rPr>
+                        <a:t>Baseline</a:t>
+                      </a:r>
+                      <a:r>
+                        <a:rPr lang="en-US" sz="1600" baseline="0" dirty="0">
+                          <a:effectLst/>
+                          <a:latin typeface="Calibri" panose="020F0502020204030204" pitchFamily="34" charset="0"/>
+                          <a:ea typeface="Calibri" panose="020F0502020204030204" pitchFamily="34" charset="0"/>
+                          <a:cs typeface="Times New Roman" panose="02020603050405020304" pitchFamily="18" charset="0"/>
+                        </a:rPr>
+                        <a:t> univariate</a:t>
+                      </a:r>
+                      <a:endParaRPr lang="ru-RU" sz="1600" dirty="0">
+                        <a:effectLst/>
+                        <a:latin typeface="Calibri" panose="020F0502020204030204" pitchFamily="34" charset="0"/>
+                        <a:ea typeface="Calibri" panose="020F0502020204030204" pitchFamily="34" charset="0"/>
+                        <a:cs typeface="Times New Roman" panose="02020603050405020304" pitchFamily="18" charset="0"/>
+                      </a:endParaRPr>
+                    </a:p>
+                  </a:txBody>
+                  <a:tcPr marL="4248" marR="4248" marT="4248" marB="4248" anchor="ctr"/>
+                </a:tc>
+                <a:extLst>
+                  <a:ext uri="{0D108BD9-81ED-4DB2-BD59-A6C34878D82A}">
+                    <a16:rowId xmlns:a16="http://schemas.microsoft.com/office/drawing/2014/main" val="1348426979"/>
+                  </a:ext>
+                </a:extLst>
+              </a:tr>
+              <a:tr h="576141">
+                <a:tc>
+                  <a:txBody>
+                    <a:bodyPr/>
+                    <a:lstStyle/>
+                    <a:p>
+                      <a:pPr algn="ctr">
+                        <a:lnSpc>
+                          <a:spcPct val="107000"/>
+                        </a:lnSpc>
+                        <a:spcAft>
+                          <a:spcPts val="0"/>
+                        </a:spcAft>
+                      </a:pPr>
+                      <a:r>
+                        <a:rPr lang="ru-RU" sz="1600" dirty="0">
+                          <a:effectLst/>
+                        </a:rPr>
+                        <a:t>M2 (1993)</a:t>
+                      </a:r>
+                      <a:endParaRPr lang="ru-RU" sz="1600" dirty="0">
+                        <a:effectLst/>
+                        <a:latin typeface="Calibri" panose="020F0502020204030204" pitchFamily="34" charset="0"/>
+                        <a:ea typeface="Calibri" panose="020F0502020204030204" pitchFamily="34" charset="0"/>
+                        <a:cs typeface="Times New Roman" panose="02020603050405020304" pitchFamily="18" charset="0"/>
+                      </a:endParaRPr>
+                    </a:p>
+                  </a:txBody>
+                  <a:tcPr marL="4248" marR="4248" marT="4248" marB="4248" anchor="ctr"/>
+                </a:tc>
+                <a:tc>
+                  <a:txBody>
+                    <a:bodyPr/>
+                    <a:lstStyle/>
+                    <a:p>
+                      <a:pPr marL="0" marR="0" indent="0" algn="l" defTabSz="914400" rtl="0" eaLnBrk="1" fontAlgn="auto" latinLnBrk="0" hangingPunct="1">
+                        <a:lnSpc>
+                          <a:spcPct val="107000"/>
+                        </a:lnSpc>
+                        <a:spcBef>
+                          <a:spcPts val="0"/>
+                        </a:spcBef>
+                        <a:spcAft>
+                          <a:spcPts val="0"/>
+                        </a:spcAft>
+                        <a:buClrTx/>
+                        <a:buSzTx/>
+                        <a:buFontTx/>
+                        <a:buNone/>
+                        <a:tabLst/>
+                        <a:defRPr/>
+                      </a:pPr>
+                      <a:r>
+                        <a:rPr lang="en-US" sz="1600" dirty="0">
+                          <a:effectLst/>
+                        </a:rPr>
+                        <a:t>29 </a:t>
+                      </a:r>
+                      <a:r>
+                        <a:rPr lang="ru-RU" sz="1600" dirty="0" err="1">
+                          <a:effectLst/>
+                        </a:rPr>
+                        <a:t>Univariate</a:t>
+                      </a:r>
+                      <a:r>
+                        <a:rPr lang="en-US" sz="1600" dirty="0">
+                          <a:effectLst/>
+                        </a:rPr>
+                        <a:t>, real-time forecasting</a:t>
+                      </a:r>
+                      <a:r>
+                        <a:rPr lang="ru-RU" sz="1600" dirty="0">
+                          <a:effectLst/>
+                        </a:rPr>
+                        <a:t>,</a:t>
+                      </a:r>
+                      <a:r>
+                        <a:rPr lang="ru-RU" sz="1600" baseline="0" dirty="0">
+                          <a:effectLst/>
+                        </a:rPr>
+                        <a:t> </a:t>
+                      </a:r>
+                      <a:r>
+                        <a:rPr lang="ru-RU" sz="1600" dirty="0">
+                          <a:effectLst/>
+                        </a:rPr>
+                        <a:t>Анализ экспертных суждений</a:t>
+                      </a:r>
+                      <a:endParaRPr lang="ru-RU" sz="1600" dirty="0">
+                        <a:effectLst/>
+                        <a:latin typeface="Calibri" panose="020F0502020204030204" pitchFamily="34" charset="0"/>
+                        <a:ea typeface="Calibri" panose="020F0502020204030204" pitchFamily="34" charset="0"/>
+                        <a:cs typeface="Times New Roman" panose="02020603050405020304" pitchFamily="18" charset="0"/>
+                      </a:endParaRPr>
+                    </a:p>
+                  </a:txBody>
+                  <a:tcPr marL="4248" marR="4248" marT="4248" marB="4248" anchor="ctr"/>
+                </a:tc>
+                <a:tc>
+                  <a:txBody>
+                    <a:bodyPr/>
+                    <a:lstStyle/>
+                    <a:p>
+                      <a:pPr>
+                        <a:lnSpc>
+                          <a:spcPct val="107000"/>
+                        </a:lnSpc>
+                        <a:spcAft>
+                          <a:spcPts val="0"/>
+                        </a:spcAft>
+                      </a:pPr>
+                      <a:r>
+                        <a:rPr lang="ru-RU" sz="1600" dirty="0">
+                          <a:effectLst/>
+                        </a:rPr>
+                        <a:t>Влияние экспертных прогнозов</a:t>
+                      </a:r>
+                      <a:endParaRPr lang="ru-RU" sz="1600" dirty="0">
+                        <a:effectLst/>
+                        <a:latin typeface="Calibri" panose="020F0502020204030204" pitchFamily="34" charset="0"/>
+                        <a:ea typeface="Calibri" panose="020F0502020204030204" pitchFamily="34" charset="0"/>
+                        <a:cs typeface="Times New Roman" panose="02020603050405020304" pitchFamily="18" charset="0"/>
+                      </a:endParaRPr>
+                    </a:p>
+                  </a:txBody>
+                  <a:tcPr marL="4248" marR="4248" marT="4248" marB="4248" anchor="ctr"/>
+                </a:tc>
+                <a:tc>
+                  <a:txBody>
+                    <a:bodyPr/>
+                    <a:lstStyle/>
+                    <a:p>
+                      <a:pPr>
+                        <a:lnSpc>
+                          <a:spcPct val="107000"/>
+                        </a:lnSpc>
+                        <a:spcAft>
+                          <a:spcPts val="0"/>
+                        </a:spcAft>
+                      </a:pPr>
+                      <a:r>
+                        <a:rPr lang="ru-RU" sz="1700" dirty="0" err="1">
+                          <a:effectLst/>
+                        </a:rPr>
+                        <a:t>Judgment</a:t>
+                      </a:r>
+                      <a:r>
+                        <a:rPr lang="ru-RU" sz="1700" dirty="0">
+                          <a:effectLst/>
+                        </a:rPr>
+                        <a:t> </a:t>
+                      </a:r>
+                      <a:r>
+                        <a:rPr lang="ru-RU" sz="1700" dirty="0" err="1">
+                          <a:effectLst/>
+                        </a:rPr>
+                        <a:t>vs</a:t>
+                      </a:r>
+                      <a:r>
+                        <a:rPr lang="ru-RU" sz="1700" dirty="0">
+                          <a:effectLst/>
+                        </a:rPr>
+                        <a:t> </a:t>
+                      </a:r>
+                      <a:r>
+                        <a:rPr lang="ru-RU" sz="1700" dirty="0" err="1">
+                          <a:effectLst/>
+                        </a:rPr>
+                        <a:t>models</a:t>
+                      </a:r>
+                      <a:endParaRPr lang="ru-RU" sz="1700" dirty="0">
+                        <a:effectLst/>
+                        <a:latin typeface="Calibri" panose="020F0502020204030204" pitchFamily="34" charset="0"/>
+                        <a:ea typeface="Calibri" panose="020F0502020204030204" pitchFamily="34" charset="0"/>
+                        <a:cs typeface="Times New Roman" panose="02020603050405020304" pitchFamily="18" charset="0"/>
+                      </a:endParaRPr>
+                    </a:p>
+                  </a:txBody>
+                  <a:tcPr marL="4248" marR="4248" marT="4248" marB="4248" anchor="ctr"/>
+                </a:tc>
+                <a:tc>
+                  <a:txBody>
+                    <a:bodyPr/>
+                    <a:lstStyle/>
+                    <a:p>
+                      <a:pPr>
+                        <a:lnSpc>
+                          <a:spcPct val="107000"/>
+                        </a:lnSpc>
+                        <a:spcAft>
+                          <a:spcPts val="0"/>
+                        </a:spcAft>
+                      </a:pPr>
+                      <a:r>
+                        <a:rPr lang="ru-RU" sz="1600">
+                          <a:effectLst/>
+                        </a:rPr>
+                        <a:t>RMSE, MAE</a:t>
+                      </a:r>
+                      <a:endParaRPr lang="ru-RU" sz="1600">
+                        <a:effectLst/>
+                        <a:latin typeface="Calibri" panose="020F0502020204030204" pitchFamily="34" charset="0"/>
+                        <a:ea typeface="Calibri" panose="020F0502020204030204" pitchFamily="34" charset="0"/>
+                        <a:cs typeface="Times New Roman" panose="02020603050405020304" pitchFamily="18" charset="0"/>
+                      </a:endParaRPr>
+                    </a:p>
+                  </a:txBody>
+                  <a:tcPr marL="4248" marR="4248" marT="4248" marB="4248" anchor="ctr"/>
+                </a:tc>
+                <a:tc>
+                  <a:txBody>
+                    <a:bodyPr/>
+                    <a:lstStyle/>
+                    <a:p>
+                      <a:pPr>
+                        <a:lnSpc>
+                          <a:spcPct val="107000"/>
+                        </a:lnSpc>
+                        <a:spcAft>
+                          <a:spcPts val="0"/>
+                        </a:spcAft>
+                      </a:pPr>
+                      <a:r>
+                        <a:rPr lang="ru-RU" sz="1600" dirty="0" err="1">
+                          <a:effectLst/>
+                        </a:rPr>
+                        <a:t>Experts</a:t>
+                      </a:r>
+                      <a:r>
+                        <a:rPr lang="ru-RU" sz="1600" dirty="0">
+                          <a:effectLst/>
+                        </a:rPr>
+                        <a:t> ≈ </a:t>
+                      </a:r>
+                      <a:r>
+                        <a:rPr lang="en-US" sz="1600" dirty="0">
+                          <a:effectLst/>
+                        </a:rPr>
+                        <a:t>ETS</a:t>
+                      </a:r>
+                      <a:endParaRPr lang="ru-RU" sz="1600" dirty="0">
+                        <a:effectLst/>
+                        <a:latin typeface="Calibri" panose="020F0502020204030204" pitchFamily="34" charset="0"/>
+                        <a:ea typeface="Calibri" panose="020F0502020204030204" pitchFamily="34" charset="0"/>
+                        <a:cs typeface="Times New Roman" panose="02020603050405020304" pitchFamily="18" charset="0"/>
+                      </a:endParaRPr>
+                    </a:p>
+                  </a:txBody>
+                  <a:tcPr marL="4248" marR="4248" marT="4248" marB="4248" anchor="ctr"/>
+                </a:tc>
+                <a:tc>
+                  <a:txBody>
+                    <a:bodyPr/>
+                    <a:lstStyle/>
+                    <a:p>
+                      <a:pPr>
+                        <a:lnSpc>
+                          <a:spcPct val="107000"/>
+                        </a:lnSpc>
+                        <a:spcAft>
+                          <a:spcPts val="0"/>
+                        </a:spcAft>
+                      </a:pPr>
+                      <a:r>
+                        <a:rPr lang="ru-RU" sz="1600" dirty="0">
+                          <a:effectLst/>
+                          <a:latin typeface="Calibri" panose="020F0502020204030204" pitchFamily="34" charset="0"/>
+                          <a:ea typeface="Calibri" panose="020F0502020204030204" pitchFamily="34" charset="0"/>
+                          <a:cs typeface="Times New Roman" panose="02020603050405020304" pitchFamily="18" charset="0"/>
+                        </a:rPr>
+                        <a:t>Модели</a:t>
+                      </a:r>
+                      <a:r>
+                        <a:rPr lang="ru-RU" sz="1600" baseline="0" dirty="0">
+                          <a:effectLst/>
+                          <a:latin typeface="Calibri" panose="020F0502020204030204" pitchFamily="34" charset="0"/>
+                          <a:ea typeface="Calibri" panose="020F0502020204030204" pitchFamily="34" charset="0"/>
+                          <a:cs typeface="Times New Roman" panose="02020603050405020304" pitchFamily="18" charset="0"/>
+                        </a:rPr>
+                        <a:t> не хуже экспертов</a:t>
+                      </a:r>
+                      <a:endParaRPr lang="ru-RU" sz="1600" dirty="0">
+                        <a:effectLst/>
+                        <a:latin typeface="Calibri" panose="020F0502020204030204" pitchFamily="34" charset="0"/>
+                        <a:ea typeface="Calibri" panose="020F0502020204030204" pitchFamily="34" charset="0"/>
+                        <a:cs typeface="Times New Roman" panose="02020603050405020304" pitchFamily="18" charset="0"/>
+                      </a:endParaRPr>
+                    </a:p>
+                  </a:txBody>
+                  <a:tcPr marL="4248" marR="4248" marT="4248" marB="4248" anchor="ctr"/>
+                </a:tc>
+                <a:extLst>
+                  <a:ext uri="{0D108BD9-81ED-4DB2-BD59-A6C34878D82A}">
+                    <a16:rowId xmlns:a16="http://schemas.microsoft.com/office/drawing/2014/main" val="1062539383"/>
+                  </a:ext>
+                </a:extLst>
+              </a:tr>
+              <a:tr h="416031">
+                <a:tc>
+                  <a:txBody>
+                    <a:bodyPr/>
+                    <a:lstStyle/>
+                    <a:p>
+                      <a:pPr algn="ctr">
+                        <a:lnSpc>
+                          <a:spcPct val="107000"/>
+                        </a:lnSpc>
+                        <a:spcAft>
+                          <a:spcPts val="0"/>
+                        </a:spcAft>
+                      </a:pPr>
+                      <a:r>
+                        <a:rPr lang="ru-RU" sz="1600" dirty="0">
+                          <a:effectLst/>
+                        </a:rPr>
+                        <a:t>M3 (2000)</a:t>
+                      </a:r>
+                      <a:endParaRPr lang="ru-RU" sz="1600" dirty="0">
+                        <a:effectLst/>
+                        <a:latin typeface="Calibri" panose="020F0502020204030204" pitchFamily="34" charset="0"/>
+                        <a:ea typeface="Calibri" panose="020F0502020204030204" pitchFamily="34" charset="0"/>
+                        <a:cs typeface="Times New Roman" panose="02020603050405020304" pitchFamily="18" charset="0"/>
+                      </a:endParaRPr>
+                    </a:p>
+                  </a:txBody>
+                  <a:tcPr marL="4248" marR="4248" marT="4248" marB="4248" anchor="ctr"/>
+                </a:tc>
+                <a:tc>
+                  <a:txBody>
+                    <a:bodyPr/>
+                    <a:lstStyle/>
+                    <a:p>
+                      <a:pPr algn="l">
+                        <a:lnSpc>
+                          <a:spcPct val="107000"/>
+                        </a:lnSpc>
+                        <a:spcAft>
+                          <a:spcPts val="0"/>
+                        </a:spcAft>
+                      </a:pPr>
+                      <a:r>
+                        <a:rPr lang="en-US" sz="1600" dirty="0">
+                          <a:effectLst/>
+                        </a:rPr>
+                        <a:t>3003 </a:t>
+                      </a:r>
+                      <a:r>
+                        <a:rPr lang="ru-RU" sz="1600" dirty="0" err="1">
+                          <a:effectLst/>
+                        </a:rPr>
+                        <a:t>Univariate</a:t>
+                      </a:r>
+                      <a:endParaRPr lang="ru-RU" sz="1600" dirty="0">
+                        <a:effectLst/>
+                        <a:latin typeface="Calibri" panose="020F0502020204030204" pitchFamily="34" charset="0"/>
+                        <a:ea typeface="Calibri" panose="020F0502020204030204" pitchFamily="34" charset="0"/>
+                        <a:cs typeface="Times New Roman" panose="02020603050405020304" pitchFamily="18" charset="0"/>
+                      </a:endParaRPr>
+                    </a:p>
+                  </a:txBody>
+                  <a:tcPr marL="4248" marR="4248" marT="4248" marB="4248" anchor="ctr"/>
+                </a:tc>
+                <a:tc>
+                  <a:txBody>
+                    <a:bodyPr/>
+                    <a:lstStyle/>
+                    <a:p>
+                      <a:pPr>
+                        <a:lnSpc>
+                          <a:spcPct val="107000"/>
+                        </a:lnSpc>
+                        <a:spcAft>
+                          <a:spcPts val="0"/>
+                        </a:spcAft>
+                      </a:pPr>
+                      <a:r>
+                        <a:rPr lang="ru-RU" sz="1600" dirty="0">
+                          <a:effectLst/>
+                        </a:rPr>
+                        <a:t>универсальная модель</a:t>
+                      </a:r>
+                      <a:endParaRPr lang="ru-RU" sz="1600" dirty="0">
+                        <a:effectLst/>
+                        <a:latin typeface="Calibri" panose="020F0502020204030204" pitchFamily="34" charset="0"/>
+                        <a:ea typeface="Calibri" panose="020F0502020204030204" pitchFamily="34" charset="0"/>
+                        <a:cs typeface="Times New Roman" panose="02020603050405020304" pitchFamily="18" charset="0"/>
+                      </a:endParaRPr>
+                    </a:p>
+                  </a:txBody>
+                  <a:tcPr marL="4248" marR="4248" marT="4248" marB="4248" anchor="ctr"/>
+                </a:tc>
+                <a:tc>
+                  <a:txBody>
+                    <a:bodyPr/>
+                    <a:lstStyle/>
+                    <a:p>
+                      <a:pPr>
+                        <a:lnSpc>
+                          <a:spcPct val="107000"/>
+                        </a:lnSpc>
+                        <a:spcAft>
+                          <a:spcPts val="0"/>
+                        </a:spcAft>
+                      </a:pPr>
+                      <a:r>
+                        <a:rPr lang="ru-RU" sz="1700" dirty="0">
+                          <a:effectLst/>
+                        </a:rPr>
+                        <a:t>ARIMA,</a:t>
+                      </a:r>
+                      <a:r>
+                        <a:rPr lang="en-US" sz="1700" dirty="0">
+                          <a:effectLst/>
+                        </a:rPr>
+                        <a:t> ETS,</a:t>
+                      </a:r>
+                      <a:r>
+                        <a:rPr lang="ru-RU" sz="1700" dirty="0">
+                          <a:effectLst/>
+                        </a:rPr>
+                        <a:t> </a:t>
+                      </a:r>
+                      <a:r>
+                        <a:rPr lang="ru-RU" sz="1700" dirty="0" err="1">
+                          <a:effectLst/>
+                        </a:rPr>
+                        <a:t>Theta</a:t>
+                      </a:r>
+                      <a:endParaRPr lang="ru-RU" sz="1700" dirty="0">
+                        <a:effectLst/>
+                        <a:latin typeface="Calibri" panose="020F0502020204030204" pitchFamily="34" charset="0"/>
+                        <a:ea typeface="Calibri" panose="020F0502020204030204" pitchFamily="34" charset="0"/>
+                        <a:cs typeface="Times New Roman" panose="02020603050405020304" pitchFamily="18" charset="0"/>
+                      </a:endParaRPr>
+                    </a:p>
+                  </a:txBody>
+                  <a:tcPr marL="4248" marR="4248" marT="4248" marB="4248" anchor="ctr"/>
+                </a:tc>
+                <a:tc>
+                  <a:txBody>
+                    <a:bodyPr/>
+                    <a:lstStyle/>
+                    <a:p>
+                      <a:pPr>
+                        <a:lnSpc>
+                          <a:spcPct val="107000"/>
+                        </a:lnSpc>
+                        <a:spcAft>
+                          <a:spcPts val="0"/>
+                        </a:spcAft>
+                      </a:pPr>
+                      <a:r>
+                        <a:rPr lang="ru-RU" sz="1600" dirty="0">
+                          <a:effectLst/>
+                        </a:rPr>
+                        <a:t>SMAPE, MAPE</a:t>
+                      </a:r>
+                      <a:endParaRPr lang="ru-RU" sz="1600" dirty="0">
+                        <a:effectLst/>
+                        <a:latin typeface="Calibri" panose="020F0502020204030204" pitchFamily="34" charset="0"/>
+                        <a:ea typeface="Calibri" panose="020F0502020204030204" pitchFamily="34" charset="0"/>
+                        <a:cs typeface="Times New Roman" panose="02020603050405020304" pitchFamily="18" charset="0"/>
+                      </a:endParaRPr>
+                    </a:p>
+                  </a:txBody>
+                  <a:tcPr marL="4248" marR="4248" marT="4248" marB="4248" anchor="ctr"/>
+                </a:tc>
+                <a:tc>
+                  <a:txBody>
+                    <a:bodyPr/>
+                    <a:lstStyle/>
+                    <a:p>
+                      <a:pPr>
+                        <a:lnSpc>
+                          <a:spcPct val="107000"/>
+                        </a:lnSpc>
+                        <a:spcAft>
+                          <a:spcPts val="0"/>
+                        </a:spcAft>
+                      </a:pPr>
+                      <a:r>
+                        <a:rPr lang="ru-RU" sz="1600" dirty="0">
+                          <a:effectLst/>
+                        </a:rPr>
+                        <a:t>ARIMA,</a:t>
+                      </a:r>
+                      <a:r>
+                        <a:rPr lang="en-US" sz="1600" dirty="0">
+                          <a:effectLst/>
+                        </a:rPr>
+                        <a:t> ETS,</a:t>
+                      </a:r>
+                      <a:r>
+                        <a:rPr lang="ru-RU" sz="1600" dirty="0">
+                          <a:effectLst/>
+                        </a:rPr>
+                        <a:t> </a:t>
+                      </a:r>
+                      <a:r>
+                        <a:rPr lang="ru-RU" sz="1600" dirty="0" err="1">
+                          <a:effectLst/>
+                        </a:rPr>
+                        <a:t>Theta</a:t>
+                      </a:r>
+                      <a:endParaRPr lang="ru-RU" sz="1600" dirty="0">
+                        <a:effectLst/>
+                        <a:latin typeface="Calibri" panose="020F0502020204030204" pitchFamily="34" charset="0"/>
+                        <a:ea typeface="Calibri" panose="020F0502020204030204" pitchFamily="34" charset="0"/>
+                        <a:cs typeface="Times New Roman" panose="02020603050405020304" pitchFamily="18" charset="0"/>
+                      </a:endParaRPr>
+                    </a:p>
+                  </a:txBody>
+                  <a:tcPr marL="4248" marR="4248" marT="4248" marB="4248" anchor="ctr"/>
+                </a:tc>
+                <a:tc>
+                  <a:txBody>
+                    <a:bodyPr/>
+                    <a:lstStyle/>
+                    <a:p>
+                      <a:pPr marL="0" marR="0" indent="0" algn="l" defTabSz="914400" rtl="0" eaLnBrk="1" fontAlgn="auto" latinLnBrk="0" hangingPunct="1">
+                        <a:lnSpc>
+                          <a:spcPct val="107000"/>
+                        </a:lnSpc>
+                        <a:spcBef>
+                          <a:spcPts val="0"/>
+                        </a:spcBef>
+                        <a:spcAft>
+                          <a:spcPts val="0"/>
+                        </a:spcAft>
+                        <a:buClrTx/>
+                        <a:buSzTx/>
+                        <a:buFontTx/>
+                        <a:buNone/>
+                        <a:tabLst/>
+                        <a:defRPr/>
+                      </a:pPr>
+                      <a:r>
+                        <a:rPr lang="en-US" sz="1600" dirty="0">
+                          <a:effectLst/>
+                          <a:latin typeface="Calibri" panose="020F0502020204030204" pitchFamily="34" charset="0"/>
+                          <a:ea typeface="Calibri" panose="020F0502020204030204" pitchFamily="34" charset="0"/>
+                          <a:cs typeface="Times New Roman" panose="02020603050405020304" pitchFamily="18" charset="0"/>
+                        </a:rPr>
+                        <a:t>Baseline</a:t>
+                      </a:r>
+                      <a:r>
+                        <a:rPr lang="en-US" sz="1600" baseline="0" dirty="0">
+                          <a:effectLst/>
+                          <a:latin typeface="Calibri" panose="020F0502020204030204" pitchFamily="34" charset="0"/>
+                          <a:ea typeface="Calibri" panose="020F0502020204030204" pitchFamily="34" charset="0"/>
+                          <a:cs typeface="Times New Roman" panose="02020603050405020304" pitchFamily="18" charset="0"/>
+                        </a:rPr>
+                        <a:t> univariate</a:t>
+                      </a:r>
+                      <a:endParaRPr lang="ru-RU" sz="1600" dirty="0">
+                        <a:effectLst/>
+                        <a:latin typeface="Calibri" panose="020F0502020204030204" pitchFamily="34" charset="0"/>
+                        <a:ea typeface="Calibri" panose="020F0502020204030204" pitchFamily="34" charset="0"/>
+                        <a:cs typeface="Times New Roman" panose="02020603050405020304" pitchFamily="18" charset="0"/>
+                      </a:endParaRPr>
+                    </a:p>
+                  </a:txBody>
+                  <a:tcPr marL="4248" marR="4248" marT="4248" marB="4248" anchor="ctr"/>
+                </a:tc>
+                <a:extLst>
+                  <a:ext uri="{0D108BD9-81ED-4DB2-BD59-A6C34878D82A}">
+                    <a16:rowId xmlns:a16="http://schemas.microsoft.com/office/drawing/2014/main" val="1972350284"/>
+                  </a:ext>
+                </a:extLst>
+              </a:tr>
+              <a:tr h="584729">
+                <a:tc>
+                  <a:txBody>
+                    <a:bodyPr/>
+                    <a:lstStyle/>
+                    <a:p>
+                      <a:pPr algn="ctr">
+                        <a:lnSpc>
+                          <a:spcPct val="107000"/>
+                        </a:lnSpc>
+                        <a:spcAft>
+                          <a:spcPts val="0"/>
+                        </a:spcAft>
+                      </a:pPr>
+                      <a:r>
+                        <a:rPr lang="ru-RU" sz="1600" dirty="0">
+                          <a:effectLst/>
+                        </a:rPr>
+                        <a:t>M4 (2018)</a:t>
+                      </a:r>
+                      <a:endParaRPr lang="ru-RU" sz="1600" dirty="0">
+                        <a:effectLst/>
+                        <a:latin typeface="Calibri" panose="020F0502020204030204" pitchFamily="34" charset="0"/>
+                        <a:ea typeface="Calibri" panose="020F0502020204030204" pitchFamily="34" charset="0"/>
+                        <a:cs typeface="Times New Roman" panose="02020603050405020304" pitchFamily="18" charset="0"/>
+                      </a:endParaRPr>
+                    </a:p>
+                  </a:txBody>
+                  <a:tcPr marL="4248" marR="4248" marT="4248" marB="4248" anchor="ctr"/>
+                </a:tc>
+                <a:tc>
+                  <a:txBody>
+                    <a:bodyPr/>
+                    <a:lstStyle/>
+                    <a:p>
+                      <a:pPr algn="l">
+                        <a:lnSpc>
+                          <a:spcPct val="107000"/>
+                        </a:lnSpc>
+                        <a:spcAft>
+                          <a:spcPts val="0"/>
+                        </a:spcAft>
+                      </a:pPr>
+                      <a:r>
+                        <a:rPr lang="ru-RU" sz="1600" dirty="0">
+                          <a:effectLst/>
+                        </a:rPr>
+                        <a:t>10</a:t>
+                      </a:r>
+                      <a:r>
+                        <a:rPr lang="ru-RU" sz="1600" baseline="0" dirty="0">
+                          <a:effectLst/>
+                        </a:rPr>
+                        <a:t> 000 </a:t>
+                      </a:r>
+                      <a:r>
+                        <a:rPr lang="ru-RU" sz="1600" dirty="0" err="1">
+                          <a:effectLst/>
+                        </a:rPr>
+                        <a:t>Univariate</a:t>
+                      </a:r>
+                      <a:r>
+                        <a:rPr lang="ru-RU" sz="1600" dirty="0">
+                          <a:effectLst/>
+                        </a:rPr>
+                        <a:t> на разных масштабах</a:t>
+                      </a:r>
+                      <a:r>
+                        <a:rPr lang="ru-RU" sz="1600" baseline="0" dirty="0">
+                          <a:effectLst/>
+                        </a:rPr>
+                        <a:t> (год, месяц, и </a:t>
+                      </a:r>
+                      <a:r>
+                        <a:rPr lang="ru-RU" sz="1600" baseline="0" dirty="0" err="1">
+                          <a:effectLst/>
+                        </a:rPr>
+                        <a:t>тд</a:t>
+                      </a:r>
+                      <a:r>
+                        <a:rPr lang="ru-RU" sz="1600" baseline="0" dirty="0">
+                          <a:effectLst/>
+                        </a:rPr>
+                        <a:t>)</a:t>
+                      </a:r>
+                      <a:endParaRPr lang="ru-RU" sz="1600" dirty="0">
+                        <a:effectLst/>
+                        <a:latin typeface="Calibri" panose="020F0502020204030204" pitchFamily="34" charset="0"/>
+                        <a:ea typeface="Calibri" panose="020F0502020204030204" pitchFamily="34" charset="0"/>
+                        <a:cs typeface="Times New Roman" panose="02020603050405020304" pitchFamily="18" charset="0"/>
+                      </a:endParaRPr>
+                    </a:p>
+                  </a:txBody>
+                  <a:tcPr marL="4248" marR="4248" marT="4248" marB="4248" anchor="ctr"/>
+                </a:tc>
+                <a:tc>
+                  <a:txBody>
+                    <a:bodyPr/>
+                    <a:lstStyle/>
+                    <a:p>
+                      <a:pPr>
+                        <a:lnSpc>
+                          <a:spcPct val="107000"/>
+                        </a:lnSpc>
+                        <a:spcAft>
+                          <a:spcPts val="0"/>
+                        </a:spcAft>
+                      </a:pPr>
+                      <a:r>
+                        <a:rPr lang="ru-RU" sz="1600" dirty="0">
+                          <a:effectLst/>
+                        </a:rPr>
+                        <a:t>Масштабная проверка стратегий</a:t>
+                      </a:r>
+                      <a:endParaRPr lang="ru-RU" sz="1600" dirty="0">
+                        <a:effectLst/>
+                        <a:latin typeface="Calibri" panose="020F0502020204030204" pitchFamily="34" charset="0"/>
+                        <a:ea typeface="Calibri" panose="020F0502020204030204" pitchFamily="34" charset="0"/>
+                        <a:cs typeface="Times New Roman" panose="02020603050405020304" pitchFamily="18" charset="0"/>
+                      </a:endParaRPr>
+                    </a:p>
+                  </a:txBody>
+                  <a:tcPr marL="4248" marR="4248" marT="4248" marB="4248" anchor="ctr"/>
+                </a:tc>
+                <a:tc>
+                  <a:txBody>
+                    <a:bodyPr/>
+                    <a:lstStyle/>
+                    <a:p>
+                      <a:pPr>
+                        <a:lnSpc>
+                          <a:spcPct val="107000"/>
+                        </a:lnSpc>
+                        <a:spcAft>
+                          <a:spcPts val="0"/>
+                        </a:spcAft>
+                      </a:pPr>
+                      <a:r>
+                        <a:rPr lang="ru-RU" sz="1700" dirty="0">
+                          <a:effectLst/>
+                        </a:rPr>
+                        <a:t>ETS + RNN, </a:t>
+                      </a:r>
+                      <a:r>
+                        <a:rPr lang="ru-RU" sz="1700" dirty="0" err="1">
+                          <a:effectLst/>
+                        </a:rPr>
+                        <a:t>Theta</a:t>
+                      </a:r>
+                      <a:r>
+                        <a:rPr lang="ru-RU" sz="1700" dirty="0">
+                          <a:effectLst/>
+                        </a:rPr>
+                        <a:t>,</a:t>
+                      </a:r>
+                      <a:r>
+                        <a:rPr lang="ru-RU" sz="1700" baseline="0" dirty="0">
+                          <a:effectLst/>
+                        </a:rPr>
+                        <a:t> </a:t>
+                      </a:r>
+                      <a:r>
+                        <a:rPr lang="en-US" sz="1700" b="0" i="0" kern="1200" dirty="0">
+                          <a:solidFill>
+                            <a:schemeClr val="dk1"/>
+                          </a:solidFill>
+                          <a:effectLst/>
+                          <a:latin typeface="+mn-lt"/>
+                          <a:ea typeface="+mn-ea"/>
+                          <a:cs typeface="+mn-cs"/>
+                        </a:rPr>
+                        <a:t>Prophet</a:t>
+                      </a:r>
+                      <a:endParaRPr lang="ru-RU" sz="1700" dirty="0">
+                        <a:effectLst/>
+                        <a:latin typeface="Calibri" panose="020F0502020204030204" pitchFamily="34" charset="0"/>
+                        <a:ea typeface="Calibri" panose="020F0502020204030204" pitchFamily="34" charset="0"/>
+                        <a:cs typeface="Times New Roman" panose="02020603050405020304" pitchFamily="18" charset="0"/>
+                      </a:endParaRPr>
+                    </a:p>
+                  </a:txBody>
+                  <a:tcPr marL="4248" marR="4248" marT="4248" marB="4248" anchor="ctr"/>
+                </a:tc>
+                <a:tc>
+                  <a:txBody>
+                    <a:bodyPr/>
+                    <a:lstStyle/>
+                    <a:p>
+                      <a:pPr>
+                        <a:lnSpc>
+                          <a:spcPct val="107000"/>
+                        </a:lnSpc>
+                        <a:spcAft>
+                          <a:spcPts val="0"/>
+                        </a:spcAft>
+                      </a:pPr>
+                      <a:r>
+                        <a:rPr lang="ru-RU" sz="1600" dirty="0">
+                          <a:effectLst/>
+                        </a:rPr>
+                        <a:t>SMAPE, MASE</a:t>
+                      </a:r>
+                      <a:endParaRPr lang="ru-RU" sz="1600" dirty="0">
+                        <a:effectLst/>
+                        <a:latin typeface="Calibri" panose="020F0502020204030204" pitchFamily="34" charset="0"/>
+                        <a:ea typeface="Calibri" panose="020F0502020204030204" pitchFamily="34" charset="0"/>
+                        <a:cs typeface="Times New Roman" panose="02020603050405020304" pitchFamily="18" charset="0"/>
+                      </a:endParaRPr>
+                    </a:p>
+                  </a:txBody>
+                  <a:tcPr marL="4248" marR="4248" marT="4248" marB="4248" anchor="ctr"/>
+                </a:tc>
+                <a:tc>
+                  <a:txBody>
+                    <a:bodyPr/>
+                    <a:lstStyle/>
+                    <a:p>
+                      <a:pPr>
+                        <a:lnSpc>
+                          <a:spcPct val="107000"/>
+                        </a:lnSpc>
+                        <a:spcAft>
+                          <a:spcPts val="0"/>
+                        </a:spcAft>
+                      </a:pPr>
+                      <a:r>
+                        <a:rPr lang="ru-RU" sz="1600" dirty="0">
+                          <a:effectLst/>
+                        </a:rPr>
+                        <a:t>ETS + RNN,</a:t>
+                      </a:r>
+                      <a:r>
+                        <a:rPr lang="ru-RU" sz="1600" baseline="0" dirty="0">
+                          <a:effectLst/>
+                        </a:rPr>
+                        <a:t> </a:t>
+                      </a:r>
+                      <a:r>
+                        <a:rPr lang="ru-RU" sz="1600" dirty="0" err="1">
+                          <a:effectLst/>
+                        </a:rPr>
+                        <a:t>Theta</a:t>
+                      </a:r>
+                      <a:endParaRPr lang="ru-RU" sz="1600" dirty="0">
+                        <a:effectLst/>
+                        <a:latin typeface="Calibri" panose="020F0502020204030204" pitchFamily="34" charset="0"/>
+                        <a:ea typeface="Calibri" panose="020F0502020204030204" pitchFamily="34" charset="0"/>
+                        <a:cs typeface="Times New Roman" panose="02020603050405020304" pitchFamily="18" charset="0"/>
+                      </a:endParaRPr>
+                    </a:p>
+                  </a:txBody>
+                  <a:tcPr marL="4248" marR="4248" marT="4248" marB="4248" anchor="ctr"/>
+                </a:tc>
+                <a:tc>
+                  <a:txBody>
+                    <a:bodyPr/>
+                    <a:lstStyle/>
+                    <a:p>
+                      <a:pPr>
+                        <a:lnSpc>
+                          <a:spcPct val="107000"/>
+                        </a:lnSpc>
+                        <a:spcAft>
+                          <a:spcPts val="0"/>
+                        </a:spcAft>
+                      </a:pPr>
+                      <a:r>
+                        <a:rPr lang="ru-RU" sz="1600" dirty="0">
+                          <a:effectLst/>
+                          <a:latin typeface="Calibri" panose="020F0502020204030204" pitchFamily="34" charset="0"/>
+                          <a:ea typeface="Calibri" panose="020F0502020204030204" pitchFamily="34" charset="0"/>
+                          <a:cs typeface="Times New Roman" panose="02020603050405020304" pitchFamily="18" charset="0"/>
+                        </a:rPr>
+                        <a:t>Гибрид </a:t>
+                      </a:r>
+                      <a:r>
+                        <a:rPr lang="en-US" sz="1600" dirty="0">
+                          <a:effectLst/>
+                          <a:latin typeface="Calibri" panose="020F0502020204030204" pitchFamily="34" charset="0"/>
+                          <a:ea typeface="Calibri" panose="020F0502020204030204" pitchFamily="34" charset="0"/>
+                          <a:cs typeface="Times New Roman" panose="02020603050405020304" pitchFamily="18" charset="0"/>
+                        </a:rPr>
+                        <a:t>(</a:t>
+                      </a:r>
+                      <a:r>
+                        <a:rPr lang="en-US" sz="1600" dirty="0" err="1">
+                          <a:effectLst/>
+                          <a:latin typeface="Calibri" panose="020F0502020204030204" pitchFamily="34" charset="0"/>
+                          <a:ea typeface="Calibri" panose="020F0502020204030204" pitchFamily="34" charset="0"/>
+                          <a:cs typeface="Times New Roman" panose="02020603050405020304" pitchFamily="18" charset="0"/>
+                        </a:rPr>
+                        <a:t>DL+stat</a:t>
+                      </a:r>
+                      <a:r>
+                        <a:rPr lang="en-US" sz="1600" dirty="0">
+                          <a:effectLst/>
+                          <a:latin typeface="Calibri" panose="020F0502020204030204" pitchFamily="34" charset="0"/>
+                          <a:ea typeface="Calibri" panose="020F0502020204030204" pitchFamily="34" charset="0"/>
+                          <a:cs typeface="Times New Roman" panose="02020603050405020304" pitchFamily="18" charset="0"/>
+                        </a:rPr>
+                        <a:t>)</a:t>
+                      </a:r>
+                      <a:r>
+                        <a:rPr lang="en-US" sz="1600" baseline="0" dirty="0">
+                          <a:effectLst/>
+                          <a:latin typeface="Calibri" panose="020F0502020204030204" pitchFamily="34" charset="0"/>
+                          <a:ea typeface="Calibri" panose="020F0502020204030204" pitchFamily="34" charset="0"/>
+                          <a:cs typeface="Times New Roman" panose="02020603050405020304" pitchFamily="18" charset="0"/>
+                        </a:rPr>
+                        <a:t> </a:t>
+                      </a:r>
+                      <a:r>
+                        <a:rPr lang="ru-RU" sz="1600" baseline="0" dirty="0">
+                          <a:effectLst/>
+                          <a:latin typeface="Calibri" panose="020F0502020204030204" pitchFamily="34" charset="0"/>
+                          <a:ea typeface="Calibri" panose="020F0502020204030204" pitchFamily="34" charset="0"/>
+                          <a:cs typeface="Times New Roman" panose="02020603050405020304" pitchFamily="18" charset="0"/>
+                        </a:rPr>
+                        <a:t>лучшие, </a:t>
+                      </a:r>
+                      <a:r>
+                        <a:rPr lang="en-US" sz="1600" baseline="0" dirty="0">
+                          <a:effectLst/>
+                          <a:latin typeface="Calibri" panose="020F0502020204030204" pitchFamily="34" charset="0"/>
+                          <a:ea typeface="Calibri" panose="020F0502020204030204" pitchFamily="34" charset="0"/>
+                          <a:cs typeface="Times New Roman" panose="02020603050405020304" pitchFamily="18" charset="0"/>
+                        </a:rPr>
+                        <a:t>Theta – runner up</a:t>
+                      </a:r>
+                      <a:endParaRPr lang="ru-RU" sz="1600" dirty="0">
+                        <a:effectLst/>
+                        <a:latin typeface="Calibri" panose="020F0502020204030204" pitchFamily="34" charset="0"/>
+                        <a:ea typeface="Calibri" panose="020F0502020204030204" pitchFamily="34" charset="0"/>
+                        <a:cs typeface="Times New Roman" panose="02020603050405020304" pitchFamily="18" charset="0"/>
+                      </a:endParaRPr>
+                    </a:p>
+                  </a:txBody>
+                  <a:tcPr marL="4248" marR="4248" marT="4248" marB="4248" anchor="ctr"/>
+                </a:tc>
+                <a:extLst>
+                  <a:ext uri="{0D108BD9-81ED-4DB2-BD59-A6C34878D82A}">
+                    <a16:rowId xmlns:a16="http://schemas.microsoft.com/office/drawing/2014/main" val="3166983177"/>
+                  </a:ext>
+                </a:extLst>
+              </a:tr>
+              <a:tr h="620908">
+                <a:tc>
+                  <a:txBody>
+                    <a:bodyPr/>
+                    <a:lstStyle/>
+                    <a:p>
+                      <a:pPr algn="ctr">
+                        <a:lnSpc>
+                          <a:spcPct val="107000"/>
+                        </a:lnSpc>
+                        <a:spcAft>
+                          <a:spcPts val="0"/>
+                        </a:spcAft>
+                      </a:pPr>
+                      <a:r>
+                        <a:rPr lang="ru-RU" sz="1600" dirty="0">
+                          <a:effectLst/>
+                        </a:rPr>
+                        <a:t>M5 (2020)</a:t>
+                      </a:r>
+                      <a:endParaRPr lang="ru-RU" sz="1600" dirty="0">
+                        <a:effectLst/>
+                        <a:latin typeface="Calibri" panose="020F0502020204030204" pitchFamily="34" charset="0"/>
+                        <a:ea typeface="Calibri" panose="020F0502020204030204" pitchFamily="34" charset="0"/>
+                        <a:cs typeface="Times New Roman" panose="02020603050405020304" pitchFamily="18" charset="0"/>
+                      </a:endParaRPr>
+                    </a:p>
+                  </a:txBody>
+                  <a:tcPr marL="4248" marR="4248" marT="4248" marB="4248" anchor="ctr"/>
+                </a:tc>
+                <a:tc>
+                  <a:txBody>
+                    <a:bodyPr/>
+                    <a:lstStyle/>
+                    <a:p>
+                      <a:pPr marL="0" marR="0" indent="0" algn="l" defTabSz="914400" rtl="0" eaLnBrk="1" fontAlgn="auto" latinLnBrk="0" hangingPunct="1">
+                        <a:lnSpc>
+                          <a:spcPct val="107000"/>
+                        </a:lnSpc>
+                        <a:spcBef>
+                          <a:spcPts val="0"/>
+                        </a:spcBef>
+                        <a:spcAft>
+                          <a:spcPts val="0"/>
+                        </a:spcAft>
+                        <a:buClrTx/>
+                        <a:buSzTx/>
+                        <a:buFontTx/>
+                        <a:buNone/>
+                        <a:tabLst/>
+                        <a:defRPr/>
+                      </a:pPr>
+                      <a:r>
+                        <a:rPr lang="ru-RU" sz="1600" dirty="0" err="1">
+                          <a:effectLst/>
+                        </a:rPr>
+                        <a:t>Hierarchical</a:t>
+                      </a:r>
+                      <a:r>
+                        <a:rPr lang="ru-RU" sz="1600" dirty="0">
+                          <a:effectLst/>
+                        </a:rPr>
+                        <a:t>, </a:t>
+                      </a:r>
+                      <a:r>
+                        <a:rPr lang="ru-RU" sz="1600" dirty="0" err="1">
+                          <a:effectLst/>
+                        </a:rPr>
+                        <a:t>Multivariate</a:t>
+                      </a:r>
+                      <a:r>
+                        <a:rPr lang="ru-RU" sz="1600" dirty="0">
+                          <a:effectLst/>
+                        </a:rPr>
+                        <a:t> Продажи </a:t>
+                      </a:r>
+                      <a:r>
+                        <a:rPr lang="ru-RU" sz="1600" dirty="0" err="1">
+                          <a:effectLst/>
+                        </a:rPr>
+                        <a:t>Walmart</a:t>
+                      </a:r>
+                      <a:r>
+                        <a:rPr lang="en-US" sz="1600" dirty="0">
+                          <a:effectLst/>
+                        </a:rPr>
+                        <a:t> </a:t>
+                      </a:r>
+                      <a:r>
+                        <a:rPr lang="ru-RU" sz="1600" dirty="0">
+                          <a:effectLst/>
+                        </a:rPr>
+                        <a:t>на</a:t>
+                      </a:r>
+                      <a:r>
+                        <a:rPr lang="ru-RU" sz="1600" baseline="0" dirty="0">
+                          <a:effectLst/>
+                        </a:rPr>
+                        <a:t> месяц</a:t>
+                      </a:r>
+                      <a:r>
+                        <a:rPr lang="ru-RU" sz="1600" dirty="0">
+                          <a:effectLst/>
+                        </a:rPr>
+                        <a:t>, с категориальными признаками</a:t>
+                      </a:r>
+                      <a:endParaRPr lang="ru-RU" sz="1600" dirty="0">
+                        <a:effectLst/>
+                        <a:latin typeface="Calibri" panose="020F0502020204030204" pitchFamily="34" charset="0"/>
+                        <a:ea typeface="Calibri" panose="020F0502020204030204" pitchFamily="34" charset="0"/>
+                        <a:cs typeface="Times New Roman" panose="02020603050405020304" pitchFamily="18" charset="0"/>
+                      </a:endParaRPr>
+                    </a:p>
+                  </a:txBody>
+                  <a:tcPr marL="4248" marR="4248" marT="4248" marB="4248" anchor="ctr"/>
+                </a:tc>
+                <a:tc>
+                  <a:txBody>
+                    <a:bodyPr/>
+                    <a:lstStyle/>
+                    <a:p>
+                      <a:pPr>
+                        <a:lnSpc>
+                          <a:spcPct val="107000"/>
+                        </a:lnSpc>
+                        <a:spcAft>
+                          <a:spcPts val="0"/>
+                        </a:spcAft>
+                      </a:pPr>
+                      <a:r>
+                        <a:rPr lang="ru-RU" sz="1600" dirty="0">
+                          <a:effectLst/>
+                        </a:rPr>
+                        <a:t>Сложные огромные</a:t>
+                      </a:r>
+                      <a:r>
+                        <a:rPr lang="ru-RU" sz="1600" baseline="0" dirty="0">
+                          <a:effectLst/>
+                        </a:rPr>
+                        <a:t> </a:t>
+                      </a:r>
+                      <a:r>
+                        <a:rPr lang="en-US" sz="1600" baseline="0" dirty="0">
+                          <a:effectLst/>
+                        </a:rPr>
+                        <a:t>industrial</a:t>
+                      </a:r>
+                      <a:r>
+                        <a:rPr lang="ru-RU" sz="1600" baseline="0" dirty="0">
+                          <a:effectLst/>
+                        </a:rPr>
+                        <a:t> ВР</a:t>
+                      </a:r>
+                      <a:endParaRPr lang="ru-RU" sz="1600" dirty="0">
+                        <a:effectLst/>
+                        <a:latin typeface="Calibri" panose="020F0502020204030204" pitchFamily="34" charset="0"/>
+                        <a:ea typeface="Calibri" panose="020F0502020204030204" pitchFamily="34" charset="0"/>
+                        <a:cs typeface="Times New Roman" panose="02020603050405020304" pitchFamily="18" charset="0"/>
+                      </a:endParaRPr>
+                    </a:p>
+                  </a:txBody>
+                  <a:tcPr marL="4248" marR="4248" marT="4248" marB="4248" anchor="ctr"/>
+                </a:tc>
+                <a:tc>
+                  <a:txBody>
+                    <a:bodyPr/>
+                    <a:lstStyle/>
+                    <a:p>
+                      <a:pPr>
+                        <a:lnSpc>
+                          <a:spcPct val="107000"/>
+                        </a:lnSpc>
+                        <a:spcAft>
+                          <a:spcPts val="0"/>
+                        </a:spcAft>
+                      </a:pPr>
+                      <a:r>
+                        <a:rPr lang="ru-RU" sz="1700" kern="1200" dirty="0" err="1">
+                          <a:solidFill>
+                            <a:schemeClr val="dk1"/>
+                          </a:solidFill>
+                          <a:effectLst/>
+                          <a:latin typeface="+mn-lt"/>
+                          <a:ea typeface="+mn-ea"/>
+                          <a:cs typeface="+mn-cs"/>
+                        </a:rPr>
+                        <a:t>LightGBM</a:t>
+                      </a:r>
+                      <a:r>
+                        <a:rPr lang="ru-RU" sz="1700" kern="1200" dirty="0">
+                          <a:solidFill>
+                            <a:schemeClr val="dk1"/>
+                          </a:solidFill>
+                          <a:effectLst/>
+                          <a:latin typeface="+mn-lt"/>
+                          <a:ea typeface="+mn-ea"/>
+                          <a:cs typeface="+mn-cs"/>
+                        </a:rPr>
+                        <a:t>, </a:t>
+                      </a:r>
+                      <a:r>
+                        <a:rPr lang="ru-RU" sz="1700" kern="1200" dirty="0" err="1">
+                          <a:solidFill>
+                            <a:schemeClr val="dk1"/>
+                          </a:solidFill>
+                          <a:effectLst/>
+                          <a:latin typeface="+mn-lt"/>
+                          <a:ea typeface="+mn-ea"/>
+                          <a:cs typeface="+mn-cs"/>
+                        </a:rPr>
+                        <a:t>XGBoost</a:t>
+                      </a:r>
+                      <a:r>
+                        <a:rPr lang="ru-RU" sz="1700" kern="1200" dirty="0">
+                          <a:solidFill>
+                            <a:schemeClr val="dk1"/>
+                          </a:solidFill>
+                          <a:effectLst/>
+                          <a:latin typeface="+mn-lt"/>
+                          <a:ea typeface="+mn-ea"/>
+                          <a:cs typeface="+mn-cs"/>
+                        </a:rPr>
+                        <a:t>, </a:t>
+                      </a:r>
+                      <a:r>
+                        <a:rPr lang="en-US" sz="1700" kern="1200" dirty="0">
+                          <a:solidFill>
+                            <a:schemeClr val="dk1"/>
+                          </a:solidFill>
+                          <a:effectLst/>
+                          <a:latin typeface="+mn-lt"/>
+                          <a:ea typeface="+mn-ea"/>
+                          <a:cs typeface="+mn-cs"/>
+                        </a:rPr>
+                        <a:t>Transformer</a:t>
+                      </a:r>
+                      <a:endParaRPr lang="ru-RU" sz="1700" kern="1200" dirty="0">
+                        <a:solidFill>
+                          <a:schemeClr val="dk1"/>
+                        </a:solidFill>
+                        <a:effectLst/>
+                        <a:latin typeface="+mn-lt"/>
+                        <a:ea typeface="+mn-ea"/>
+                        <a:cs typeface="+mn-cs"/>
+                      </a:endParaRPr>
+                    </a:p>
+                  </a:txBody>
+                  <a:tcPr marL="4248" marR="4248" marT="4248" marB="4248" anchor="ctr"/>
+                </a:tc>
+                <a:tc>
+                  <a:txBody>
+                    <a:bodyPr/>
+                    <a:lstStyle/>
+                    <a:p>
+                      <a:pPr>
+                        <a:lnSpc>
+                          <a:spcPct val="107000"/>
+                        </a:lnSpc>
+                        <a:spcAft>
+                          <a:spcPts val="0"/>
+                        </a:spcAft>
+                      </a:pPr>
+                      <a:r>
+                        <a:rPr lang="ru-RU" sz="1600" dirty="0">
+                          <a:effectLst/>
+                        </a:rPr>
+                        <a:t>WRMSSE,</a:t>
+                      </a:r>
+                      <a:r>
+                        <a:rPr lang="ru-RU" sz="1600" baseline="0" dirty="0">
+                          <a:effectLst/>
+                        </a:rPr>
+                        <a:t> </a:t>
+                      </a:r>
+                      <a:r>
+                        <a:rPr lang="ru-RU" sz="1600" dirty="0" err="1">
+                          <a:effectLst/>
+                        </a:rPr>
+                        <a:t>pinball</a:t>
+                      </a:r>
+                      <a:r>
+                        <a:rPr lang="ru-RU" sz="1600" dirty="0">
+                          <a:effectLst/>
+                        </a:rPr>
+                        <a:t> </a:t>
+                      </a:r>
+                      <a:r>
+                        <a:rPr lang="ru-RU" sz="1600" dirty="0" err="1">
+                          <a:effectLst/>
+                        </a:rPr>
+                        <a:t>loss</a:t>
+                      </a:r>
+                      <a:endParaRPr lang="ru-RU" sz="1600" dirty="0">
+                        <a:effectLst/>
+                        <a:latin typeface="Calibri" panose="020F0502020204030204" pitchFamily="34" charset="0"/>
+                        <a:ea typeface="Calibri" panose="020F0502020204030204" pitchFamily="34" charset="0"/>
+                        <a:cs typeface="Times New Roman" panose="02020603050405020304" pitchFamily="18" charset="0"/>
+                      </a:endParaRPr>
+                    </a:p>
+                  </a:txBody>
+                  <a:tcPr marL="4248" marR="4248" marT="4248" marB="4248" anchor="ctr"/>
+                </a:tc>
+                <a:tc>
+                  <a:txBody>
+                    <a:bodyPr/>
+                    <a:lstStyle/>
+                    <a:p>
+                      <a:pPr>
+                        <a:lnSpc>
+                          <a:spcPct val="107000"/>
+                        </a:lnSpc>
+                        <a:spcAft>
+                          <a:spcPts val="0"/>
+                        </a:spcAft>
+                      </a:pPr>
+                      <a:r>
+                        <a:rPr lang="ru-RU" sz="1600" dirty="0" err="1">
+                          <a:effectLst/>
+                        </a:rPr>
+                        <a:t>LightGBM</a:t>
+                      </a:r>
+                      <a:r>
+                        <a:rPr lang="en-US" sz="1600" dirty="0">
+                          <a:effectLst/>
+                        </a:rPr>
+                        <a:t>+feature engineering</a:t>
+                      </a:r>
+                      <a:endParaRPr lang="ru-RU" sz="1600" dirty="0">
+                        <a:effectLst/>
+                        <a:latin typeface="Calibri" panose="020F0502020204030204" pitchFamily="34" charset="0"/>
+                        <a:ea typeface="Calibri" panose="020F0502020204030204" pitchFamily="34" charset="0"/>
+                        <a:cs typeface="Times New Roman" panose="02020603050405020304" pitchFamily="18" charset="0"/>
+                      </a:endParaRPr>
+                    </a:p>
+                  </a:txBody>
+                  <a:tcPr marL="4248" marR="4248" marT="4248" marB="4248" anchor="ctr"/>
+                </a:tc>
+                <a:tc>
+                  <a:txBody>
+                    <a:bodyPr/>
+                    <a:lstStyle/>
+                    <a:p>
+                      <a:pPr>
+                        <a:lnSpc>
+                          <a:spcPct val="107000"/>
+                        </a:lnSpc>
+                        <a:spcAft>
+                          <a:spcPts val="0"/>
+                        </a:spcAft>
+                      </a:pPr>
+                      <a:r>
+                        <a:rPr lang="ru-RU" sz="1600" dirty="0">
+                          <a:effectLst/>
+                          <a:latin typeface="Calibri" panose="020F0502020204030204" pitchFamily="34" charset="0"/>
+                          <a:ea typeface="Calibri" panose="020F0502020204030204" pitchFamily="34" charset="0"/>
+                          <a:cs typeface="Times New Roman" panose="02020603050405020304" pitchFamily="18" charset="0"/>
+                        </a:rPr>
+                        <a:t>Продвинутый </a:t>
+                      </a:r>
+                      <a:r>
+                        <a:rPr lang="ru-RU" sz="1600" dirty="0" err="1">
+                          <a:effectLst/>
+                          <a:latin typeface="Calibri" panose="020F0502020204030204" pitchFamily="34" charset="0"/>
+                          <a:ea typeface="Calibri" panose="020F0502020204030204" pitchFamily="34" charset="0"/>
+                          <a:cs typeface="Times New Roman" panose="02020603050405020304" pitchFamily="18" charset="0"/>
+                        </a:rPr>
+                        <a:t>фичи</a:t>
+                      </a:r>
+                      <a:r>
+                        <a:rPr lang="ru-RU" sz="1600" baseline="0" dirty="0">
+                          <a:effectLst/>
+                          <a:latin typeface="Calibri" panose="020F0502020204030204" pitchFamily="34" charset="0"/>
+                          <a:ea typeface="Calibri" panose="020F0502020204030204" pitchFamily="34" charset="0"/>
+                          <a:cs typeface="Times New Roman" panose="02020603050405020304" pitchFamily="18" charset="0"/>
+                        </a:rPr>
+                        <a:t> -</a:t>
+                      </a:r>
+                      <a:r>
+                        <a:rPr lang="en-US" sz="1600" baseline="0" dirty="0">
+                          <a:effectLst/>
+                          <a:latin typeface="Calibri" panose="020F0502020204030204" pitchFamily="34" charset="0"/>
+                          <a:ea typeface="Calibri" panose="020F0502020204030204" pitchFamily="34" charset="0"/>
+                          <a:cs typeface="Times New Roman" panose="02020603050405020304" pitchFamily="18" charset="0"/>
+                        </a:rPr>
+                        <a:t> </a:t>
+                      </a:r>
+                      <a:r>
+                        <a:rPr lang="ru-RU" sz="1600" baseline="0" dirty="0">
+                          <a:effectLst/>
+                          <a:latin typeface="Calibri" panose="020F0502020204030204" pitchFamily="34" charset="0"/>
+                          <a:ea typeface="Calibri" panose="020F0502020204030204" pitchFamily="34" charset="0"/>
+                          <a:cs typeface="Times New Roman" panose="02020603050405020304" pitchFamily="18" charset="0"/>
+                        </a:rPr>
+                        <a:t>не хуже </a:t>
+                      </a:r>
+                      <a:r>
+                        <a:rPr lang="en-US" sz="1600" baseline="0" dirty="0">
+                          <a:effectLst/>
+                          <a:latin typeface="Calibri" panose="020F0502020204030204" pitchFamily="34" charset="0"/>
+                          <a:ea typeface="Calibri" panose="020F0502020204030204" pitchFamily="34" charset="0"/>
+                          <a:cs typeface="Times New Roman" panose="02020603050405020304" pitchFamily="18" charset="0"/>
+                        </a:rPr>
+                        <a:t>DL</a:t>
+                      </a:r>
+                      <a:endParaRPr lang="ru-RU" sz="1600" dirty="0">
+                        <a:effectLst/>
+                        <a:latin typeface="Calibri" panose="020F0502020204030204" pitchFamily="34" charset="0"/>
+                        <a:ea typeface="Calibri" panose="020F0502020204030204" pitchFamily="34" charset="0"/>
+                        <a:cs typeface="Times New Roman" panose="02020603050405020304" pitchFamily="18" charset="0"/>
+                      </a:endParaRPr>
+                    </a:p>
+                  </a:txBody>
+                  <a:tcPr marL="4248" marR="4248" marT="4248" marB="4248" anchor="ctr"/>
+                </a:tc>
+                <a:extLst>
+                  <a:ext uri="{0D108BD9-81ED-4DB2-BD59-A6C34878D82A}">
+                    <a16:rowId xmlns:a16="http://schemas.microsoft.com/office/drawing/2014/main" val="3531242361"/>
+                  </a:ext>
+                </a:extLst>
+              </a:tr>
+              <a:tr h="584729">
+                <a:tc>
+                  <a:txBody>
+                    <a:bodyPr/>
+                    <a:lstStyle/>
+                    <a:p>
+                      <a:pPr algn="ctr">
+                        <a:lnSpc>
+                          <a:spcPct val="107000"/>
+                        </a:lnSpc>
+                        <a:spcAft>
+                          <a:spcPts val="0"/>
+                        </a:spcAft>
+                      </a:pPr>
+                      <a:r>
+                        <a:rPr lang="ru-RU" sz="1600" dirty="0">
+                          <a:effectLst/>
+                        </a:rPr>
+                        <a:t>M6 (2024)</a:t>
+                      </a:r>
+                      <a:endParaRPr lang="ru-RU" sz="1600" dirty="0">
+                        <a:effectLst/>
+                        <a:latin typeface="Calibri" panose="020F0502020204030204" pitchFamily="34" charset="0"/>
+                        <a:ea typeface="Calibri" panose="020F0502020204030204" pitchFamily="34" charset="0"/>
+                        <a:cs typeface="Times New Roman" panose="02020603050405020304" pitchFamily="18" charset="0"/>
+                      </a:endParaRPr>
+                    </a:p>
+                  </a:txBody>
+                  <a:tcPr marL="4248" marR="4248" marT="4248" marB="4248" anchor="ctr"/>
+                </a:tc>
+                <a:tc>
+                  <a:txBody>
+                    <a:bodyPr/>
+                    <a:lstStyle/>
+                    <a:p>
+                      <a:pPr algn="l">
+                        <a:lnSpc>
+                          <a:spcPct val="107000"/>
+                        </a:lnSpc>
+                        <a:spcAft>
+                          <a:spcPts val="0"/>
+                        </a:spcAft>
+                      </a:pPr>
+                      <a:r>
+                        <a:rPr lang="ru-RU" sz="1600" dirty="0" err="1">
+                          <a:effectLst/>
+                        </a:rPr>
+                        <a:t>Multivariate</a:t>
+                      </a:r>
+                      <a:endParaRPr lang="ru-RU" sz="1600" dirty="0">
+                        <a:effectLst/>
+                      </a:endParaRPr>
+                    </a:p>
+                    <a:p>
+                      <a:pPr algn="l">
+                        <a:lnSpc>
+                          <a:spcPct val="107000"/>
+                        </a:lnSpc>
+                        <a:spcAft>
+                          <a:spcPts val="0"/>
+                        </a:spcAft>
+                      </a:pPr>
+                      <a:r>
+                        <a:rPr lang="ru-RU" sz="1600" dirty="0" err="1">
+                          <a:effectLst/>
+                        </a:rPr>
+                        <a:t>Probabilistic</a:t>
+                      </a:r>
+                      <a:r>
+                        <a:rPr lang="ru-RU" sz="1600" dirty="0">
+                          <a:effectLst/>
+                        </a:rPr>
+                        <a:t>, Финансовые данные, </a:t>
+                      </a:r>
+                      <a:endParaRPr lang="ru-RU" sz="1600" dirty="0">
+                        <a:effectLst/>
+                        <a:latin typeface="Calibri" panose="020F0502020204030204" pitchFamily="34" charset="0"/>
+                        <a:ea typeface="Calibri" panose="020F0502020204030204" pitchFamily="34" charset="0"/>
+                        <a:cs typeface="Times New Roman" panose="02020603050405020304" pitchFamily="18" charset="0"/>
+                      </a:endParaRPr>
+                    </a:p>
+                  </a:txBody>
+                  <a:tcPr marL="4248" marR="4248" marT="4248" marB="4248" anchor="ctr"/>
+                </a:tc>
+                <a:tc>
+                  <a:txBody>
+                    <a:bodyPr/>
+                    <a:lstStyle/>
+                    <a:p>
+                      <a:pPr>
+                        <a:lnSpc>
+                          <a:spcPct val="107000"/>
+                        </a:lnSpc>
+                        <a:spcAft>
+                          <a:spcPts val="0"/>
+                        </a:spcAft>
+                      </a:pPr>
+                      <a:r>
+                        <a:rPr lang="ru-RU" sz="1600" dirty="0">
+                          <a:effectLst/>
+                        </a:rPr>
+                        <a:t>Вероятностное</a:t>
+                      </a:r>
+                      <a:r>
+                        <a:rPr lang="ru-RU" sz="1600" baseline="0" dirty="0">
+                          <a:effectLst/>
+                        </a:rPr>
+                        <a:t> </a:t>
+                      </a:r>
+                      <a:r>
+                        <a:rPr lang="ru-RU" sz="1600" dirty="0">
+                          <a:effectLst/>
+                        </a:rPr>
+                        <a:t>Прогнозирование фин.</a:t>
+                      </a:r>
+                      <a:r>
+                        <a:rPr lang="ru-RU" sz="1600" baseline="0" dirty="0">
+                          <a:effectLst/>
+                        </a:rPr>
+                        <a:t> сектор</a:t>
+                      </a:r>
+                      <a:endParaRPr lang="ru-RU" sz="1600" dirty="0">
+                        <a:effectLst/>
+                        <a:latin typeface="Calibri" panose="020F0502020204030204" pitchFamily="34" charset="0"/>
+                        <a:ea typeface="Calibri" panose="020F0502020204030204" pitchFamily="34" charset="0"/>
+                        <a:cs typeface="Times New Roman" panose="02020603050405020304" pitchFamily="18" charset="0"/>
+                      </a:endParaRPr>
+                    </a:p>
+                  </a:txBody>
+                  <a:tcPr marL="4248" marR="4248" marT="4248" marB="4248" anchor="ctr"/>
+                </a:tc>
+                <a:tc>
+                  <a:txBody>
+                    <a:bodyPr/>
+                    <a:lstStyle/>
+                    <a:p>
+                      <a:pPr>
+                        <a:lnSpc>
+                          <a:spcPct val="107000"/>
+                        </a:lnSpc>
+                        <a:spcAft>
+                          <a:spcPts val="0"/>
+                        </a:spcAft>
+                      </a:pPr>
+                      <a:r>
+                        <a:rPr lang="ru-RU" sz="1700" dirty="0" err="1">
+                          <a:effectLst/>
+                        </a:rPr>
+                        <a:t>DeepAR</a:t>
+                      </a:r>
+                      <a:r>
+                        <a:rPr lang="ru-RU" sz="1700" dirty="0">
+                          <a:effectLst/>
+                        </a:rPr>
+                        <a:t>, </a:t>
+                      </a:r>
+                      <a:r>
+                        <a:rPr lang="en-US" sz="1700" b="0" i="0" kern="1200" dirty="0" err="1">
+                          <a:solidFill>
+                            <a:schemeClr val="dk1"/>
+                          </a:solidFill>
+                          <a:effectLst/>
+                          <a:latin typeface="+mn-lt"/>
+                          <a:ea typeface="+mn-ea"/>
+                          <a:cs typeface="+mn-cs"/>
+                        </a:rPr>
+                        <a:t>AutoTS</a:t>
+                      </a:r>
+                      <a:r>
+                        <a:rPr lang="ru-RU" sz="1700" dirty="0">
+                          <a:effectLst/>
+                        </a:rPr>
+                        <a:t>, </a:t>
+                      </a:r>
+                      <a:r>
+                        <a:rPr lang="en-US" sz="1700" dirty="0" err="1">
+                          <a:effectLst/>
+                        </a:rPr>
+                        <a:t>TimeGPT</a:t>
+                      </a:r>
+                      <a:endParaRPr lang="ru-RU" sz="1700" dirty="0">
+                        <a:effectLst/>
+                        <a:latin typeface="Calibri" panose="020F0502020204030204" pitchFamily="34" charset="0"/>
+                        <a:ea typeface="Calibri" panose="020F0502020204030204" pitchFamily="34" charset="0"/>
+                        <a:cs typeface="Times New Roman" panose="02020603050405020304" pitchFamily="18" charset="0"/>
+                      </a:endParaRPr>
+                    </a:p>
+                  </a:txBody>
+                  <a:tcPr marL="4248" marR="4248" marT="4248" marB="4248" anchor="ctr"/>
+                </a:tc>
+                <a:tc>
+                  <a:txBody>
+                    <a:bodyPr/>
+                    <a:lstStyle/>
+                    <a:p>
+                      <a:pPr>
+                        <a:lnSpc>
+                          <a:spcPct val="107000"/>
+                        </a:lnSpc>
+                        <a:spcAft>
+                          <a:spcPts val="0"/>
+                        </a:spcAft>
+                      </a:pPr>
+                      <a:r>
+                        <a:rPr lang="ru-RU" sz="1600" dirty="0">
+                          <a:effectLst/>
+                        </a:rPr>
+                        <a:t>CRPS, </a:t>
+                      </a:r>
+                      <a:r>
+                        <a:rPr lang="ru-RU" sz="1600" dirty="0" err="1">
+                          <a:effectLst/>
+                        </a:rPr>
+                        <a:t>pinball</a:t>
+                      </a:r>
+                      <a:r>
+                        <a:rPr lang="ru-RU" sz="1600" dirty="0">
+                          <a:effectLst/>
+                        </a:rPr>
+                        <a:t> </a:t>
+                      </a:r>
+                      <a:r>
+                        <a:rPr lang="ru-RU" sz="1600" dirty="0" err="1">
+                          <a:effectLst/>
+                        </a:rPr>
+                        <a:t>loss</a:t>
+                      </a:r>
+                      <a:endParaRPr lang="ru-RU" sz="1600" dirty="0">
+                        <a:effectLst/>
+                        <a:latin typeface="Calibri" panose="020F0502020204030204" pitchFamily="34" charset="0"/>
+                        <a:ea typeface="Calibri" panose="020F0502020204030204" pitchFamily="34" charset="0"/>
+                        <a:cs typeface="Times New Roman" panose="02020603050405020304" pitchFamily="18" charset="0"/>
+                      </a:endParaRPr>
+                    </a:p>
+                  </a:txBody>
+                  <a:tcPr marL="4248" marR="4248" marT="4248" marB="4248" anchor="ctr"/>
+                </a:tc>
+                <a:tc>
+                  <a:txBody>
+                    <a:bodyPr/>
+                    <a:lstStyle/>
+                    <a:p>
+                      <a:pPr>
+                        <a:lnSpc>
+                          <a:spcPct val="107000"/>
+                        </a:lnSpc>
+                        <a:spcAft>
+                          <a:spcPts val="0"/>
+                        </a:spcAft>
+                      </a:pPr>
+                      <a:r>
+                        <a:rPr lang="en-US" sz="1600" dirty="0">
+                          <a:effectLst/>
+                        </a:rPr>
+                        <a:t> </a:t>
+                      </a:r>
+                      <a:r>
+                        <a:rPr lang="ru-RU" sz="1600" dirty="0">
+                          <a:effectLst/>
+                        </a:rPr>
+                        <a:t>еще</a:t>
+                      </a:r>
+                      <a:r>
+                        <a:rPr lang="ru-RU" sz="1600" baseline="0" dirty="0">
+                          <a:effectLst/>
+                        </a:rPr>
+                        <a:t> идет</a:t>
+                      </a:r>
+                      <a:endParaRPr lang="ru-RU" sz="1600" dirty="0">
+                        <a:effectLst/>
+                        <a:latin typeface="Calibri" panose="020F0502020204030204" pitchFamily="34" charset="0"/>
+                        <a:ea typeface="Calibri" panose="020F0502020204030204" pitchFamily="34" charset="0"/>
+                        <a:cs typeface="Times New Roman" panose="02020603050405020304" pitchFamily="18" charset="0"/>
+                      </a:endParaRPr>
+                    </a:p>
+                  </a:txBody>
+                  <a:tcPr marL="4248" marR="4248" marT="4248" marB="4248" anchor="ctr"/>
+                </a:tc>
+                <a:tc>
+                  <a:txBody>
+                    <a:bodyPr/>
+                    <a:lstStyle/>
+                    <a:p>
+                      <a:pPr>
+                        <a:lnSpc>
+                          <a:spcPct val="107000"/>
+                        </a:lnSpc>
+                        <a:spcAft>
+                          <a:spcPts val="0"/>
+                        </a:spcAft>
+                      </a:pPr>
+                      <a:r>
+                        <a:rPr lang="ru-RU" sz="1600" dirty="0">
+                          <a:effectLst/>
+                        </a:rPr>
+                        <a:t>еще</a:t>
+                      </a:r>
+                      <a:r>
+                        <a:rPr lang="ru-RU" sz="1600" baseline="0" dirty="0">
+                          <a:effectLst/>
+                        </a:rPr>
+                        <a:t> идет</a:t>
+                      </a:r>
+                      <a:endParaRPr lang="ru-RU" sz="1600" dirty="0">
+                        <a:effectLst/>
+                        <a:latin typeface="Calibri" panose="020F0502020204030204" pitchFamily="34" charset="0"/>
+                        <a:ea typeface="Calibri" panose="020F0502020204030204" pitchFamily="34" charset="0"/>
+                        <a:cs typeface="Times New Roman" panose="02020603050405020304" pitchFamily="18" charset="0"/>
+                      </a:endParaRPr>
+                    </a:p>
+                  </a:txBody>
+                  <a:tcPr marL="4248" marR="4248" marT="4248" marB="4248" anchor="ctr"/>
+                </a:tc>
+                <a:extLst>
+                  <a:ext uri="{0D108BD9-81ED-4DB2-BD59-A6C34878D82A}">
+                    <a16:rowId xmlns:a16="http://schemas.microsoft.com/office/drawing/2014/main" val="2449646058"/>
+                  </a:ext>
+                </a:extLst>
+              </a:tr>
+            </a:tbl>
+          </a:graphicData>
+        </a:graphic>
+      </p:graphicFrame>
+      <p:sp>
+        <p:nvSpPr>
+          <p:cNvPr id="4" name="Номер слайда 3"/>
+          <p:cNvSpPr>
+            <a:spLocks noGrp="1"/>
+          </p:cNvSpPr>
+          <p:nvPr>
+            <p:ph type="sldNum" sz="quarter" idx="12"/>
+          </p:nvPr>
+        </p:nvSpPr>
+        <p:spPr/>
+        <p:txBody>
+          <a:bodyPr/>
+          <a:lstStyle/>
+          <a:p>
+            <a:fld id="{45C3B737-A709-4ABC-AFE0-A6B067850C48}" type="slidenum">
+              <a:rPr lang="en-US" smtClean="0"/>
+              <a:t>2</a:t>
+            </a:fld>
+            <a:endParaRPr lang="en-US"/>
+          </a:p>
+        </p:txBody>
+      </p:sp>
+      <p:sp>
+        <p:nvSpPr>
+          <p:cNvPr id="6" name="Прямоугольник 5"/>
+          <p:cNvSpPr/>
+          <p:nvPr/>
+        </p:nvSpPr>
+        <p:spPr>
+          <a:xfrm>
+            <a:off x="0" y="7051740"/>
+            <a:ext cx="11821887" cy="523220"/>
+          </a:xfrm>
+          <a:prstGeom prst="rect">
+            <a:avLst/>
+          </a:prstGeom>
+        </p:spPr>
+        <p:txBody>
+          <a:bodyPr wrap="square">
+            <a:spAutoFit/>
+          </a:bodyPr>
+          <a:lstStyle/>
+          <a:p>
+            <a:r>
+              <a:rPr lang="en-US" sz="1400" dirty="0"/>
+              <a:t>M6: </a:t>
+            </a:r>
+            <a:r>
+              <a:rPr lang="ru-RU" sz="1400" dirty="0">
+                <a:hlinkClick r:id="rId3"/>
+              </a:rPr>
+              <a:t>https://www.sciencedirect.com/science/article/pii/S0169207024001079</a:t>
+            </a:r>
+            <a:r>
+              <a:rPr lang="en-US" sz="1400" dirty="0"/>
+              <a:t> </a:t>
+            </a:r>
+            <a:r>
+              <a:rPr lang="en-US" sz="1400" dirty="0">
+                <a:hlinkClick r:id="rId4"/>
+              </a:rPr>
+              <a:t>https://m-e-gorelli.medium.com/how-i-won-6-000-in-the-m6-forecasting-competition-888df68bf132</a:t>
+            </a:r>
+            <a:r>
+              <a:rPr lang="en-US" sz="1400" dirty="0"/>
+              <a:t> </a:t>
+            </a:r>
+            <a:endParaRPr lang="ru-RU" sz="1400" dirty="0"/>
+          </a:p>
+        </p:txBody>
+      </p:sp>
+      <p:sp>
+        <p:nvSpPr>
+          <p:cNvPr id="7" name="Прямоугольник 6"/>
+          <p:cNvSpPr/>
+          <p:nvPr/>
+        </p:nvSpPr>
+        <p:spPr>
+          <a:xfrm>
+            <a:off x="0" y="6940274"/>
+            <a:ext cx="13611498" cy="276999"/>
+          </a:xfrm>
+          <a:prstGeom prst="rect">
+            <a:avLst/>
+          </a:prstGeom>
+        </p:spPr>
+        <p:txBody>
+          <a:bodyPr wrap="square">
+            <a:spAutoFit/>
+          </a:bodyPr>
+          <a:lstStyle/>
+          <a:p>
+            <a:r>
+              <a:rPr lang="en-US" sz="1200" dirty="0"/>
+              <a:t>M5: </a:t>
+            </a:r>
+            <a:r>
+              <a:rPr lang="ru-RU" sz="1200" dirty="0">
+                <a:hlinkClick r:id="rId5"/>
+              </a:rPr>
+              <a:t>https://statmodeling.stat.columbia.edu/wp-content/uploads/2021/10/M5_accuracy_competition.pdf</a:t>
+            </a:r>
+            <a:r>
+              <a:rPr lang="en-US" sz="1200" dirty="0"/>
+              <a:t> , https://cienciadedatos.net/documentos/py61-m5-forecasting-competition</a:t>
+            </a:r>
+            <a:endParaRPr lang="ru-RU" sz="1200" dirty="0"/>
+          </a:p>
+        </p:txBody>
+      </p:sp>
+      <p:sp>
+        <p:nvSpPr>
+          <p:cNvPr id="8" name="Прямоугольник 7"/>
+          <p:cNvSpPr/>
+          <p:nvPr/>
+        </p:nvSpPr>
+        <p:spPr>
+          <a:xfrm>
+            <a:off x="300443" y="673479"/>
+            <a:ext cx="11787053" cy="707886"/>
+          </a:xfrm>
+          <a:prstGeom prst="rect">
+            <a:avLst/>
+          </a:prstGeom>
+        </p:spPr>
+        <p:txBody>
+          <a:bodyPr wrap="square">
+            <a:spAutoFit/>
+          </a:bodyPr>
+          <a:lstStyle/>
+          <a:p>
+            <a:r>
+              <a:rPr lang="ru-RU" sz="2000" dirty="0"/>
+              <a:t>Соревнования </a:t>
+            </a:r>
+            <a:r>
+              <a:rPr lang="ru-RU" sz="2000" dirty="0" err="1"/>
+              <a:t>Макридакиса</a:t>
+            </a:r>
+            <a:r>
+              <a:rPr lang="ru-RU" sz="2000" dirty="0"/>
+              <a:t> (M-</a:t>
+            </a:r>
+            <a:r>
+              <a:rPr lang="ru-RU" sz="2000" dirty="0" err="1"/>
+              <a:t>Competitions</a:t>
+            </a:r>
+            <a:r>
+              <a:rPr lang="ru-RU" sz="2000" dirty="0"/>
+              <a:t>) - открытые соревнования по оценке и сравнению точности различных методов прогнозирования временных рядов.</a:t>
+            </a:r>
+            <a:r>
+              <a:rPr lang="en-US" sz="2000" dirty="0"/>
+              <a:t> </a:t>
+            </a:r>
+            <a:r>
+              <a:rPr lang="en-US" sz="2000" dirty="0">
+                <a:hlinkClick r:id="rId6"/>
+              </a:rPr>
+              <a:t>en.wikipedia.org/wiki/</a:t>
+            </a:r>
+            <a:r>
+              <a:rPr lang="en-US" sz="2000" dirty="0" err="1">
+                <a:hlinkClick r:id="rId6"/>
+              </a:rPr>
+              <a:t>Makridakis_Competitions</a:t>
+            </a:r>
+            <a:r>
+              <a:rPr lang="en-US" sz="2000" dirty="0"/>
+              <a:t> </a:t>
+            </a:r>
+            <a:endParaRPr lang="ru-RU" sz="2000" dirty="0"/>
+          </a:p>
+        </p:txBody>
+      </p:sp>
+      <p:sp>
+        <p:nvSpPr>
+          <p:cNvPr id="9" name="Прямоугольник 8"/>
+          <p:cNvSpPr/>
+          <p:nvPr/>
+        </p:nvSpPr>
+        <p:spPr>
+          <a:xfrm>
+            <a:off x="296089" y="6207821"/>
+            <a:ext cx="11057711" cy="461665"/>
+          </a:xfrm>
+          <a:prstGeom prst="rect">
+            <a:avLst/>
+          </a:prstGeom>
+        </p:spPr>
+        <p:txBody>
+          <a:bodyPr wrap="square">
+            <a:spAutoFit/>
+          </a:bodyPr>
+          <a:lstStyle/>
+          <a:p>
+            <a:r>
+              <a:rPr lang="en-US" sz="1200" dirty="0"/>
+              <a:t>https://www.sciencedirect.com/science/article/pii/S0169207024001079 https://statmodeling.stat.columbia.edu/wp-content/uploads/2021/10/M5_accuracy_competition.pdf  https://cienciadedatos.net/documentos/py61-m5-forecasting-competition https://forecasters.org/resources/time-series-data/</a:t>
+            </a:r>
+            <a:endParaRPr lang="ru-RU" sz="1200" dirty="0"/>
+          </a:p>
+        </p:txBody>
+      </p:sp>
+      <p:sp>
+        <p:nvSpPr>
+          <p:cNvPr id="3" name="Прямоугольник 2"/>
+          <p:cNvSpPr/>
+          <p:nvPr/>
+        </p:nvSpPr>
+        <p:spPr>
+          <a:xfrm>
+            <a:off x="296089" y="6564676"/>
+            <a:ext cx="6096000" cy="261610"/>
+          </a:xfrm>
+          <a:prstGeom prst="rect">
+            <a:avLst/>
+          </a:prstGeom>
+        </p:spPr>
+        <p:txBody>
+          <a:bodyPr>
+            <a:spAutoFit/>
+          </a:bodyPr>
+          <a:lstStyle/>
+          <a:p>
+            <a:r>
+              <a:rPr lang="ru-RU" sz="1100" dirty="0"/>
+              <a:t>https://readmedium.com/a-brief-history-of-time-series-models-38455c2cd78d</a:t>
+            </a:r>
+          </a:p>
+        </p:txBody>
+      </p:sp>
+    </p:spTree>
+    <p:extLst>
+      <p:ext uri="{BB962C8B-B14F-4D97-AF65-F5344CB8AC3E}">
+        <p14:creationId xmlns:p14="http://schemas.microsoft.com/office/powerpoint/2010/main" val="2643876752"/>
+      </p:ext>
+    </p:extLst>
+  </p:cSld>
+  <p:clrMapOvr>
+    <a:masterClrMapping/>
+  </p:clrMapOvr>
+  <p:timing>
+    <p:tnLst>
+      <p:par>
+        <p:cTn id="1" dur="indefinite" restart="never" nodeType="tmRoot"/>
+      </p:par>
+    </p:tnLst>
+  </p:timing>
+</p:sld>
+</file>
+
+<file path=ppt/slides/slide20.xml><?xml version="1.0" encoding="utf-8"?>
 <p:sld xmlns:a="http://schemas.openxmlformats.org/drawingml/2006/main" xmlns:r="http://schemas.openxmlformats.org/officeDocument/2006/relationships" xmlns:p="http://schemas.openxmlformats.org/presentationml/2006/main">
   <p:cSld>
     <p:spTree>
@@ -6799,10 +11171,17 @@
   <p:clrMapOvr>
     <a:masterClrMapping/>
   </p:clrMapOvr>
+  <p:timing>
+    <p:tnLst>
+      <p:par>
+        <p:cTn id="1" dur="indefinite" restart="never" nodeType="tmRoot"/>
+      </p:par>
+    </p:tnLst>
+  </p:timing>
 </p:sld>
 </file>
 
-<file path=ppt/slides/slide17.xml><?xml version="1.0" encoding="utf-8"?>
+<file path=ppt/slides/slide21.xml><?xml version="1.0" encoding="utf-8"?>
 <p:sld xmlns:a="http://schemas.openxmlformats.org/drawingml/2006/main" xmlns:r="http://schemas.openxmlformats.org/officeDocument/2006/relationships" xmlns:p="http://schemas.openxmlformats.org/presentationml/2006/main">
   <p:cSld>
     <p:spTree>
@@ -7490,10 +11869,17 @@
   <p:clrMapOvr>
     <a:masterClrMapping/>
   </p:clrMapOvr>
+  <p:timing>
+    <p:tnLst>
+      <p:par>
+        <p:cTn id="1" dur="indefinite" restart="never" nodeType="tmRoot"/>
+      </p:par>
+    </p:tnLst>
+  </p:timing>
 </p:sld>
 </file>
 
-<file path=ppt/slides/slide18.xml><?xml version="1.0" encoding="utf-8"?>
+<file path=ppt/slides/slide22.xml><?xml version="1.0" encoding="utf-8"?>
 <p:sld xmlns:a="http://schemas.openxmlformats.org/drawingml/2006/main" xmlns:r="http://schemas.openxmlformats.org/officeDocument/2006/relationships" xmlns:p="http://schemas.openxmlformats.org/presentationml/2006/main">
   <p:cSld>
     <p:spTree>
@@ -7545,8 +11931,8 @@
           </a:p>
         </p:txBody>
       </p:sp>
-      <mc:AlternateContent xmlns:mc="http://schemas.openxmlformats.org/markup-compatibility/2006">
-        <mc:Choice xmlns:a14="http://schemas.microsoft.com/office/drawing/2010/main" Requires="a14">
+      <mc:AlternateContent xmlns:mc="http://schemas.openxmlformats.org/markup-compatibility/2006" xmlns:a14="http://schemas.microsoft.com/office/drawing/2010/main">
+        <mc:Choice Requires="a14">
           <p:graphicFrame>
             <p:nvGraphicFramePr>
               <p:cNvPr id="4" name="Объект 3">
@@ -8450,7 +12836,7 @@
             </a:graphic>
           </p:graphicFrame>
         </mc:Choice>
-        <mc:Fallback>
+        <mc:Fallback xmlns="">
           <p:graphicFrame>
             <p:nvGraphicFramePr>
               <p:cNvPr id="4" name="Объект 3">
@@ -9208,10 +13594,17 @@
   <p:clrMapOvr>
     <a:masterClrMapping/>
   </p:clrMapOvr>
+  <p:timing>
+    <p:tnLst>
+      <p:par>
+        <p:cTn id="1" dur="indefinite" restart="never" nodeType="tmRoot"/>
+      </p:par>
+    </p:tnLst>
+  </p:timing>
 </p:sld>
 </file>
 
-<file path=ppt/slides/slide19.xml><?xml version="1.0" encoding="utf-8"?>
+<file path=ppt/slides/slide23.xml><?xml version="1.0" encoding="utf-8"?>
 <p:sld xmlns:a="http://schemas.openxmlformats.org/drawingml/2006/main" xmlns:r="http://schemas.openxmlformats.org/officeDocument/2006/relationships" xmlns:p="http://schemas.openxmlformats.org/presentationml/2006/main">
   <p:cSld>
     <p:spTree>
@@ -9348,387 +13741,17 @@
   <p:clrMapOvr>
     <a:masterClrMapping/>
   </p:clrMapOvr>
+  <p:timing>
+    <p:tnLst>
+      <p:par>
+        <p:cTn id="1" dur="indefinite" restart="never" nodeType="tmRoot"/>
+      </p:par>
+    </p:tnLst>
+  </p:timing>
 </p:sld>
 </file>
 
-<file path=ppt/slides/slide2.xml><?xml version="1.0" encoding="utf-8"?>
-<p:sld xmlns:a="http://schemas.openxmlformats.org/drawingml/2006/main" xmlns:r="http://schemas.openxmlformats.org/officeDocument/2006/relationships" xmlns:p="http://schemas.openxmlformats.org/presentationml/2006/main">
-  <p:cSld>
-    <p:spTree>
-      <p:nvGrpSpPr>
-        <p:cNvPr id="1" name=""/>
-        <p:cNvGrpSpPr/>
-        <p:nvPr/>
-      </p:nvGrpSpPr>
-      <p:grpSpPr>
-        <a:xfrm>
-          <a:off x="0" y="0"/>
-          <a:ext cx="0" cy="0"/>
-          <a:chOff x="0" y="0"/>
-          <a:chExt cx="0" cy="0"/>
-        </a:xfrm>
-      </p:grpSpPr>
-      <p:sp>
-        <p:nvSpPr>
-          <p:cNvPr id="2" name="Заголовок 1"/>
-          <p:cNvSpPr>
-            <a:spLocks noGrp="1"/>
-          </p:cNvSpPr>
-          <p:nvPr>
-            <p:ph type="title"/>
-          </p:nvPr>
-        </p:nvSpPr>
-        <p:spPr>
-          <a:xfrm>
-            <a:off x="161925" y="155576"/>
-            <a:ext cx="11820525" cy="806450"/>
-          </a:xfrm>
-        </p:spPr>
-        <p:txBody>
-          <a:bodyPr/>
-          <a:lstStyle/>
-          <a:p>
-            <a:pPr algn="ctr"/>
-            <a:r>
-              <a:rPr lang="ru-RU" dirty="0"/>
-              <a:t>Почему невсегда статистические методы</a:t>
-            </a:r>
-          </a:p>
-        </p:txBody>
-      </p:sp>
-      <p:sp>
-        <p:nvSpPr>
-          <p:cNvPr id="3" name="Объект 2"/>
-          <p:cNvSpPr>
-            <a:spLocks noGrp="1"/>
-          </p:cNvSpPr>
-          <p:nvPr>
-            <p:ph idx="1"/>
-          </p:nvPr>
-        </p:nvSpPr>
-        <p:spPr>
-          <a:xfrm>
-            <a:off x="228600" y="838200"/>
-            <a:ext cx="11887200" cy="5562600"/>
-          </a:xfrm>
-        </p:spPr>
-        <p:txBody>
-          <a:bodyPr>
-            <a:noAutofit/>
-          </a:bodyPr>
-          <a:lstStyle/>
-          <a:p>
-            <a:pPr marL="0" indent="0" eaLnBrk="0" fontAlgn="base" hangingPunct="0">
-              <a:lnSpc>
-                <a:spcPct val="100000"/>
-              </a:lnSpc>
-              <a:spcBef>
-                <a:spcPts val="600"/>
-              </a:spcBef>
-              <a:spcAft>
-                <a:spcPct val="0"/>
-              </a:spcAft>
-              <a:buNone/>
-            </a:pPr>
-            <a:r>
-              <a:rPr lang="ru-RU" altLang="ru-RU" sz="2100" dirty="0"/>
-              <a:t>Часто при построении моделей </a:t>
-            </a:r>
-            <a:r>
-              <a:rPr lang="ru-RU" altLang="ru-RU" sz="2100" dirty="0" err="1"/>
-              <a:t>прогназирования</a:t>
-            </a:r>
-            <a:r>
-              <a:rPr lang="ru-RU" altLang="ru-RU" sz="2100" dirty="0"/>
-              <a:t> ВР приходится руководствоваться принципом скорости. </a:t>
-            </a:r>
-          </a:p>
-          <a:p>
-            <a:pPr marL="0" lvl="0" indent="0" eaLnBrk="0" fontAlgn="base" hangingPunct="0">
-              <a:lnSpc>
-                <a:spcPct val="100000"/>
-              </a:lnSpc>
-              <a:spcBef>
-                <a:spcPts val="600"/>
-              </a:spcBef>
-              <a:spcAft>
-                <a:spcPct val="0"/>
-              </a:spcAft>
-              <a:buNone/>
-            </a:pPr>
-            <a:r>
-              <a:rPr lang="ru-RU" altLang="ru-RU" sz="2100" dirty="0"/>
-              <a:t>Основные </a:t>
-            </a:r>
-            <a:r>
-              <a:rPr lang="ru-RU" altLang="ru-RU" sz="2100" b="1" dirty="0"/>
-              <a:t>недостатками</a:t>
-            </a:r>
-            <a:r>
-              <a:rPr lang="ru-RU" altLang="ru-RU" sz="2100" dirty="0"/>
-              <a:t> моделей</a:t>
-            </a:r>
-            <a:r>
-              <a:rPr lang="en-US" altLang="ru-RU" sz="2100" dirty="0"/>
-              <a:t> SARIMA, ETS </a:t>
-            </a:r>
-            <a:r>
-              <a:rPr lang="ru-RU" altLang="ru-RU" sz="2100" dirty="0"/>
-              <a:t>и других стат. моделей :</a:t>
-            </a:r>
-            <a:endParaRPr kumimoji="0" lang="ru-RU" altLang="ru-RU" sz="2100" b="0" i="0" u="none" strike="noStrike" cap="none" normalizeH="0" baseline="0" dirty="0">
-              <a:ln>
-                <a:noFill/>
-              </a:ln>
-              <a:solidFill>
-                <a:schemeClr val="tx1"/>
-              </a:solidFill>
-              <a:effectLst/>
-            </a:endParaRPr>
-          </a:p>
-          <a:p>
-            <a:pPr lvl="1" eaLnBrk="0" fontAlgn="base" hangingPunct="0">
-              <a:lnSpc>
-                <a:spcPct val="100000"/>
-              </a:lnSpc>
-              <a:spcBef>
-                <a:spcPts val="600"/>
-              </a:spcBef>
-              <a:spcAft>
-                <a:spcPct val="0"/>
-              </a:spcAft>
-            </a:pPr>
-            <a:r>
-              <a:rPr lang="ru-RU" altLang="ru-RU" sz="2100" dirty="0"/>
-              <a:t>Сложность предварительного анализа и подготовки данных.</a:t>
-            </a:r>
-          </a:p>
-          <a:p>
-            <a:pPr lvl="1" eaLnBrk="0" fontAlgn="base" hangingPunct="0">
-              <a:lnSpc>
-                <a:spcPct val="100000"/>
-              </a:lnSpc>
-              <a:spcBef>
-                <a:spcPts val="600"/>
-              </a:spcBef>
-              <a:spcAft>
-                <a:spcPct val="0"/>
-              </a:spcAft>
-            </a:pPr>
-            <a:r>
-              <a:rPr lang="ru-RU" altLang="ru-RU" sz="2100" dirty="0"/>
-              <a:t>Трудно настраиваемы параметры моделей. </a:t>
-            </a:r>
-          </a:p>
-          <a:p>
-            <a:pPr lvl="1" eaLnBrk="0" fontAlgn="base" hangingPunct="0">
-              <a:lnSpc>
-                <a:spcPct val="100000"/>
-              </a:lnSpc>
-              <a:spcBef>
-                <a:spcPts val="600"/>
-              </a:spcBef>
-              <a:spcAft>
-                <a:spcPct val="0"/>
-              </a:spcAft>
-            </a:pPr>
-            <a:r>
-              <a:rPr lang="ru-RU" altLang="ru-RU" sz="2100" dirty="0"/>
-              <a:t>Необходимость частого дообучения\переобучения с новыми </a:t>
-            </a:r>
-            <a:r>
-              <a:rPr lang="ru-RU" altLang="ru-RU" sz="2100" dirty="0" err="1"/>
-              <a:t>гиперпараметрами</a:t>
-            </a:r>
-            <a:r>
-              <a:rPr lang="ru-RU" altLang="ru-RU" sz="2100" dirty="0"/>
-              <a:t>.</a:t>
-            </a:r>
-          </a:p>
-          <a:p>
-            <a:pPr lvl="1" eaLnBrk="0" fontAlgn="base" hangingPunct="0">
-              <a:lnSpc>
-                <a:spcPct val="100000"/>
-              </a:lnSpc>
-              <a:spcBef>
-                <a:spcPts val="600"/>
-              </a:spcBef>
-              <a:spcAft>
-                <a:spcPct val="0"/>
-              </a:spcAft>
-            </a:pPr>
-            <a:r>
-              <a:rPr lang="ru-RU" altLang="ru-RU" sz="2100" dirty="0"/>
-              <a:t>Авто настройка не дает высоко-точных результатов без ручной </a:t>
-            </a:r>
-            <a:r>
-              <a:rPr lang="ru-RU" altLang="ru-RU" sz="2100" dirty="0" err="1"/>
-              <a:t>донастройки</a:t>
-            </a:r>
-            <a:r>
-              <a:rPr lang="ru-RU" altLang="ru-RU" sz="2100" dirty="0"/>
-              <a:t>.</a:t>
-            </a:r>
-          </a:p>
-          <a:p>
-            <a:pPr marL="0" lvl="0" indent="0" eaLnBrk="0" fontAlgn="base" hangingPunct="0">
-              <a:lnSpc>
-                <a:spcPct val="120000"/>
-              </a:lnSpc>
-              <a:spcBef>
-                <a:spcPts val="600"/>
-              </a:spcBef>
-              <a:spcAft>
-                <a:spcPct val="0"/>
-              </a:spcAft>
-              <a:buFontTx/>
-              <a:buChar char="•"/>
-            </a:pPr>
-            <a:r>
-              <a:rPr lang="ru-RU" altLang="ru-RU" sz="2100" dirty="0"/>
-              <a:t> </a:t>
-            </a:r>
-            <a:r>
-              <a:rPr lang="ru-RU" altLang="ru-RU" sz="2100" u="sng" dirty="0"/>
-              <a:t>На практике при работе с большими объемами ВР и длинными горизонтами предсказания  - при массовых не прецизионных прогнозах дешевле и быстрее выбрать несколько признаков из имеющегося временного ряда и построить простую линейную регрессионную модель или, скажем, случайный лес</a:t>
-            </a:r>
-            <a:r>
-              <a:rPr lang="ru-RU" altLang="ru-RU" sz="2100" dirty="0"/>
-              <a:t>. </a:t>
-            </a:r>
-          </a:p>
-          <a:p>
-            <a:pPr marL="457200" lvl="1" indent="0" eaLnBrk="0" fontAlgn="base" hangingPunct="0">
-              <a:lnSpc>
-                <a:spcPct val="100000"/>
-              </a:lnSpc>
-              <a:spcBef>
-                <a:spcPts val="600"/>
-              </a:spcBef>
-              <a:spcAft>
-                <a:spcPct val="0"/>
-              </a:spcAft>
-              <a:buNone/>
-            </a:pPr>
-            <a:r>
-              <a:rPr lang="ru-RU" altLang="ru-RU" sz="2100" dirty="0"/>
-              <a:t>подход не подкреплен теорией и нарушает ряд предположений (например, теорему Гаусса-Маркова, особенно для некоррелированных ошибок), но он очень полезен на практике и часто используется в соревнованиях по машинному обучению</a:t>
-            </a:r>
-          </a:p>
-          <a:p>
-            <a:pPr marL="0" lvl="0" indent="0" eaLnBrk="0" fontAlgn="base" hangingPunct="0">
-              <a:lnSpc>
-                <a:spcPct val="100000"/>
-              </a:lnSpc>
-              <a:spcBef>
-                <a:spcPts val="600"/>
-              </a:spcBef>
-              <a:spcAft>
-                <a:spcPct val="0"/>
-              </a:spcAft>
-              <a:buNone/>
-            </a:pPr>
-            <a:r>
-              <a:rPr lang="ru-RU" altLang="ru-RU" sz="2100" b="1" dirty="0"/>
-              <a:t>При исследованиях рекомендуется начинать с </a:t>
-            </a:r>
-            <a:r>
-              <a:rPr lang="en-US" altLang="ru-RU" sz="2100" b="1" dirty="0"/>
-              <a:t>ARIMA, ETS </a:t>
-            </a:r>
-            <a:r>
-              <a:rPr lang="ru-RU" altLang="ru-RU" sz="2100" b="1" dirty="0"/>
-              <a:t>как </a:t>
-            </a:r>
-            <a:r>
-              <a:rPr lang="ru-RU" altLang="ru-RU" sz="2100" b="1" dirty="0" err="1"/>
-              <a:t>бейзлайны</a:t>
-            </a:r>
-            <a:endParaRPr kumimoji="0" lang="ru-RU" altLang="ru-RU" sz="2100" b="1" i="0" u="none" strike="noStrike" cap="none" normalizeH="0" baseline="0" dirty="0">
-              <a:ln>
-                <a:noFill/>
-              </a:ln>
-              <a:solidFill>
-                <a:schemeClr val="tx1"/>
-              </a:solidFill>
-              <a:effectLst/>
-            </a:endParaRPr>
-          </a:p>
-          <a:p>
-            <a:endParaRPr lang="ru-RU" sz="2100" dirty="0"/>
-          </a:p>
-        </p:txBody>
-      </p:sp>
-      <p:sp>
-        <p:nvSpPr>
-          <p:cNvPr id="4" name="Прямоугольник 3"/>
-          <p:cNvSpPr/>
-          <p:nvPr/>
-        </p:nvSpPr>
-        <p:spPr>
-          <a:xfrm>
-            <a:off x="6072187" y="6550223"/>
-            <a:ext cx="6096000" cy="307777"/>
-          </a:xfrm>
-          <a:prstGeom prst="rect">
-            <a:avLst/>
-          </a:prstGeom>
-        </p:spPr>
-        <p:txBody>
-          <a:bodyPr>
-            <a:spAutoFit/>
-          </a:bodyPr>
-          <a:lstStyle/>
-          <a:p>
-            <a:r>
-              <a:rPr lang="ru-RU" sz="1400" dirty="0"/>
-              <a:t>https://mlcourse.ai/book/topic09/topic9_part1_time_series_python.html</a:t>
-            </a:r>
-          </a:p>
-        </p:txBody>
-      </p:sp>
-      <p:sp>
-        <p:nvSpPr>
-          <p:cNvPr id="5" name="Прямоугольник 4"/>
-          <p:cNvSpPr/>
-          <p:nvPr/>
-        </p:nvSpPr>
-        <p:spPr>
-          <a:xfrm>
-            <a:off x="0" y="6550222"/>
-            <a:ext cx="4082080" cy="307777"/>
-          </a:xfrm>
-          <a:prstGeom prst="rect">
-            <a:avLst/>
-          </a:prstGeom>
-        </p:spPr>
-        <p:txBody>
-          <a:bodyPr wrap="none">
-            <a:spAutoFit/>
-          </a:bodyPr>
-          <a:lstStyle/>
-          <a:p>
-            <a:r>
-              <a:rPr lang="ru-RU" sz="1400" dirty="0"/>
-              <a:t>https://blogs.cisco.com/analytics-automation/arima3</a:t>
-            </a:r>
-          </a:p>
-        </p:txBody>
-      </p:sp>
-    </p:spTree>
-    <p:extLst>
-      <p:ext uri="{BB962C8B-B14F-4D97-AF65-F5344CB8AC3E}">
-        <p14:creationId xmlns:p14="http://schemas.microsoft.com/office/powerpoint/2010/main" val="3372900399"/>
-      </p:ext>
-    </p:extLst>
-  </p:cSld>
-  <p:clrMapOvr>
-    <a:masterClrMapping/>
-  </p:clrMapOvr>
-</p:sld>
-</file>
-
-<file path=ppt/slides/slide20.xml><?xml version="1.0" encoding="utf-8"?>
+<file path=ppt/slides/slide24.xml><?xml version="1.0" encoding="utf-8"?>
 <p:sld xmlns:a="http://schemas.openxmlformats.org/drawingml/2006/main" xmlns:r="http://schemas.openxmlformats.org/officeDocument/2006/relationships" xmlns:p="http://schemas.openxmlformats.org/presentationml/2006/main" show="0">
   <p:cSld>
     <p:spTree>
@@ -9909,10 +13932,401 @@
       <p:transition spd="slow"/>
     </mc:Fallback>
   </mc:AlternateContent>
+  <p:timing>
+    <p:tnLst>
+      <p:par>
+        <p:cTn id="1" dur="indefinite" restart="never" nodeType="tmRoot"/>
+      </p:par>
+    </p:tnLst>
+  </p:timing>
 </p:sld>
 </file>
 
 <file path=ppt/slides/slide3.xml><?xml version="1.0" encoding="utf-8"?>
+<p:sld xmlns:a="http://schemas.openxmlformats.org/drawingml/2006/main" xmlns:r="http://schemas.openxmlformats.org/officeDocument/2006/relationships" xmlns:p="http://schemas.openxmlformats.org/presentationml/2006/main">
+  <p:cSld>
+    <p:spTree>
+      <p:nvGrpSpPr>
+        <p:cNvPr id="1" name=""/>
+        <p:cNvGrpSpPr/>
+        <p:nvPr/>
+      </p:nvGrpSpPr>
+      <p:grpSpPr>
+        <a:xfrm>
+          <a:off x="0" y="0"/>
+          <a:ext cx="0" cy="0"/>
+          <a:chOff x="0" y="0"/>
+          <a:chExt cx="0" cy="0"/>
+        </a:xfrm>
+      </p:grpSpPr>
+      <p:sp>
+        <p:nvSpPr>
+          <p:cNvPr id="2" name="Заголовок 1"/>
+          <p:cNvSpPr>
+            <a:spLocks noGrp="1"/>
+          </p:cNvSpPr>
+          <p:nvPr>
+            <p:ph type="title"/>
+          </p:nvPr>
+        </p:nvSpPr>
+        <p:spPr>
+          <a:xfrm>
+            <a:off x="161925" y="155576"/>
+            <a:ext cx="11820525" cy="806450"/>
+          </a:xfrm>
+        </p:spPr>
+        <p:txBody>
+          <a:bodyPr/>
+          <a:lstStyle/>
+          <a:p>
+            <a:pPr algn="ctr"/>
+            <a:r>
+              <a:rPr lang="ru-RU" dirty="0"/>
+              <a:t>Почему невсегда статистические методы</a:t>
+            </a:r>
+          </a:p>
+        </p:txBody>
+      </p:sp>
+      <p:sp>
+        <p:nvSpPr>
+          <p:cNvPr id="3" name="Объект 2"/>
+          <p:cNvSpPr>
+            <a:spLocks noGrp="1"/>
+          </p:cNvSpPr>
+          <p:nvPr>
+            <p:ph idx="1"/>
+          </p:nvPr>
+        </p:nvSpPr>
+        <p:spPr>
+          <a:xfrm>
+            <a:off x="228600" y="838200"/>
+            <a:ext cx="11887200" cy="5562600"/>
+          </a:xfrm>
+        </p:spPr>
+        <p:txBody>
+          <a:bodyPr>
+            <a:noAutofit/>
+          </a:bodyPr>
+          <a:lstStyle/>
+          <a:p>
+            <a:pPr marL="0" indent="0" eaLnBrk="0" fontAlgn="base" hangingPunct="0">
+              <a:lnSpc>
+                <a:spcPct val="100000"/>
+              </a:lnSpc>
+              <a:spcBef>
+                <a:spcPts val="600"/>
+              </a:spcBef>
+              <a:spcAft>
+                <a:spcPct val="0"/>
+              </a:spcAft>
+              <a:buNone/>
+            </a:pPr>
+            <a:r>
+              <a:rPr lang="ru-RU" altLang="ru-RU" sz="2100" dirty="0"/>
+              <a:t>Часто при построении моделей </a:t>
+            </a:r>
+            <a:r>
+              <a:rPr lang="ru-RU" altLang="ru-RU" sz="2100" dirty="0" err="1"/>
+              <a:t>прогназирования</a:t>
+            </a:r>
+            <a:r>
+              <a:rPr lang="ru-RU" altLang="ru-RU" sz="2100" dirty="0"/>
+              <a:t> ВР приходится руководствоваться принципом скорости. </a:t>
+            </a:r>
+          </a:p>
+          <a:p>
+            <a:pPr marL="0" lvl="0" indent="0" eaLnBrk="0" fontAlgn="base" hangingPunct="0">
+              <a:lnSpc>
+                <a:spcPct val="100000"/>
+              </a:lnSpc>
+              <a:spcBef>
+                <a:spcPts val="600"/>
+              </a:spcBef>
+              <a:spcAft>
+                <a:spcPct val="0"/>
+              </a:spcAft>
+              <a:buNone/>
+            </a:pPr>
+            <a:r>
+              <a:rPr lang="ru-RU" altLang="ru-RU" sz="2100" dirty="0"/>
+              <a:t>Основные </a:t>
+            </a:r>
+            <a:r>
+              <a:rPr lang="ru-RU" altLang="ru-RU" sz="2100" b="1" dirty="0"/>
+              <a:t>недостатками</a:t>
+            </a:r>
+            <a:r>
+              <a:rPr lang="ru-RU" altLang="ru-RU" sz="2100" dirty="0"/>
+              <a:t> моделей</a:t>
+            </a:r>
+            <a:r>
+              <a:rPr lang="en-US" altLang="ru-RU" sz="2100" dirty="0"/>
+              <a:t> SARIMA, ETS </a:t>
+            </a:r>
+            <a:r>
+              <a:rPr lang="ru-RU" altLang="ru-RU" sz="2100" dirty="0"/>
+              <a:t>и других стат. моделей :</a:t>
+            </a:r>
+            <a:endParaRPr kumimoji="0" lang="ru-RU" altLang="ru-RU" sz="2100" b="0" i="0" u="none" strike="noStrike" cap="none" normalizeH="0" baseline="0" dirty="0">
+              <a:ln>
+                <a:noFill/>
+              </a:ln>
+              <a:solidFill>
+                <a:schemeClr val="tx1"/>
+              </a:solidFill>
+              <a:effectLst/>
+            </a:endParaRPr>
+          </a:p>
+          <a:p>
+            <a:pPr lvl="1" eaLnBrk="0" fontAlgn="base" hangingPunct="0">
+              <a:lnSpc>
+                <a:spcPct val="100000"/>
+              </a:lnSpc>
+              <a:spcBef>
+                <a:spcPts val="600"/>
+              </a:spcBef>
+              <a:spcAft>
+                <a:spcPct val="0"/>
+              </a:spcAft>
+            </a:pPr>
+            <a:r>
+              <a:rPr lang="ru-RU" altLang="ru-RU" sz="2100" dirty="0"/>
+              <a:t>Сложность предварительного анализа и подготовки данных.</a:t>
+            </a:r>
+          </a:p>
+          <a:p>
+            <a:pPr lvl="1" eaLnBrk="0" fontAlgn="base" hangingPunct="0">
+              <a:lnSpc>
+                <a:spcPct val="100000"/>
+              </a:lnSpc>
+              <a:spcBef>
+                <a:spcPts val="600"/>
+              </a:spcBef>
+              <a:spcAft>
+                <a:spcPct val="0"/>
+              </a:spcAft>
+            </a:pPr>
+            <a:r>
+              <a:rPr lang="ru-RU" altLang="ru-RU" sz="2100" dirty="0"/>
+              <a:t>Трудно настраиваемы параметры моделей. </a:t>
+            </a:r>
+          </a:p>
+          <a:p>
+            <a:pPr lvl="1" eaLnBrk="0" fontAlgn="base" hangingPunct="0">
+              <a:lnSpc>
+                <a:spcPct val="100000"/>
+              </a:lnSpc>
+              <a:spcBef>
+                <a:spcPts val="600"/>
+              </a:spcBef>
+              <a:spcAft>
+                <a:spcPct val="0"/>
+              </a:spcAft>
+            </a:pPr>
+            <a:r>
+              <a:rPr lang="ru-RU" altLang="ru-RU" sz="2100" dirty="0"/>
+              <a:t>Необходимость частого дообучения\переобучения с новыми </a:t>
+            </a:r>
+            <a:r>
+              <a:rPr lang="ru-RU" altLang="ru-RU" sz="2100" dirty="0" err="1"/>
+              <a:t>гиперпараметрами</a:t>
+            </a:r>
+            <a:r>
+              <a:rPr lang="ru-RU" altLang="ru-RU" sz="2100" dirty="0"/>
+              <a:t>.</a:t>
+            </a:r>
+          </a:p>
+          <a:p>
+            <a:pPr lvl="1" eaLnBrk="0" fontAlgn="base" hangingPunct="0">
+              <a:lnSpc>
+                <a:spcPct val="100000"/>
+              </a:lnSpc>
+              <a:spcBef>
+                <a:spcPts val="600"/>
+              </a:spcBef>
+              <a:spcAft>
+                <a:spcPct val="0"/>
+              </a:spcAft>
+            </a:pPr>
+            <a:r>
+              <a:rPr lang="ru-RU" altLang="ru-RU" sz="2100" dirty="0"/>
+              <a:t>Авто настройка не дает высоко-точных результатов без ручной </a:t>
+            </a:r>
+            <a:r>
+              <a:rPr lang="ru-RU" altLang="ru-RU" sz="2100" dirty="0" err="1"/>
+              <a:t>донастройки</a:t>
+            </a:r>
+            <a:r>
+              <a:rPr lang="ru-RU" altLang="ru-RU" sz="2100" dirty="0"/>
+              <a:t>.</a:t>
+            </a:r>
+          </a:p>
+          <a:p>
+            <a:pPr marL="0" lvl="0" indent="0" eaLnBrk="0" fontAlgn="base" hangingPunct="0">
+              <a:lnSpc>
+                <a:spcPct val="120000"/>
+              </a:lnSpc>
+              <a:spcBef>
+                <a:spcPts val="600"/>
+              </a:spcBef>
+              <a:spcAft>
+                <a:spcPct val="0"/>
+              </a:spcAft>
+              <a:buFontTx/>
+              <a:buChar char="•"/>
+            </a:pPr>
+            <a:r>
+              <a:rPr lang="ru-RU" altLang="ru-RU" sz="2100" dirty="0"/>
+              <a:t> </a:t>
+            </a:r>
+            <a:r>
+              <a:rPr lang="ru-RU" altLang="ru-RU" sz="2100" u="sng" dirty="0"/>
+              <a:t>На практике при работе с большими объемами ВР и длинными горизонтами предсказания  - при массовых не прецизионных прогнозах дешевле и быстрее выбрать несколько признаков из имеющегося временного ряда и построить простую линейную регрессионную модель или, скажем, случайный лес</a:t>
+            </a:r>
+            <a:r>
+              <a:rPr lang="ru-RU" altLang="ru-RU" sz="2100" dirty="0"/>
+              <a:t>. </a:t>
+            </a:r>
+          </a:p>
+          <a:p>
+            <a:pPr marL="457200" lvl="1" indent="0" eaLnBrk="0" fontAlgn="base" hangingPunct="0">
+              <a:lnSpc>
+                <a:spcPct val="100000"/>
+              </a:lnSpc>
+              <a:spcBef>
+                <a:spcPts val="600"/>
+              </a:spcBef>
+              <a:spcAft>
+                <a:spcPct val="0"/>
+              </a:spcAft>
+              <a:buNone/>
+            </a:pPr>
+            <a:r>
+              <a:rPr lang="ru-RU" altLang="ru-RU" sz="2100" dirty="0"/>
+              <a:t>подход не подкреплен теорией и нарушает ряд предположений (например, теорему Гаусса-Маркова, особенно для некоррелированных ошибок), но он очень полезен на практике и часто используется в соревнованиях по машинному обучению</a:t>
+            </a:r>
+          </a:p>
+          <a:p>
+            <a:pPr marL="0" lvl="0" indent="0" eaLnBrk="0" fontAlgn="base" hangingPunct="0">
+              <a:lnSpc>
+                <a:spcPct val="100000"/>
+              </a:lnSpc>
+              <a:spcBef>
+                <a:spcPts val="600"/>
+              </a:spcBef>
+              <a:spcAft>
+                <a:spcPct val="0"/>
+              </a:spcAft>
+              <a:buNone/>
+            </a:pPr>
+            <a:r>
+              <a:rPr lang="ru-RU" altLang="ru-RU" sz="2100" b="1" dirty="0"/>
+              <a:t>При исследованиях рекомендуется начинать с </a:t>
+            </a:r>
+            <a:r>
+              <a:rPr lang="en-US" altLang="ru-RU" sz="2100" b="1" dirty="0"/>
+              <a:t>ARIMA, ETS </a:t>
+            </a:r>
+            <a:r>
+              <a:rPr lang="ru-RU" altLang="ru-RU" sz="2100" b="1" dirty="0"/>
+              <a:t>как </a:t>
+            </a:r>
+            <a:r>
+              <a:rPr lang="ru-RU" altLang="ru-RU" sz="2100" b="1" dirty="0" err="1"/>
+              <a:t>бейзлайны</a:t>
+            </a:r>
+            <a:endParaRPr kumimoji="0" lang="ru-RU" altLang="ru-RU" sz="2100" b="1" i="0" u="none" strike="noStrike" cap="none" normalizeH="0" baseline="0" dirty="0">
+              <a:ln>
+                <a:noFill/>
+              </a:ln>
+              <a:solidFill>
+                <a:schemeClr val="tx1"/>
+              </a:solidFill>
+              <a:effectLst/>
+            </a:endParaRPr>
+          </a:p>
+          <a:p>
+            <a:endParaRPr lang="ru-RU" sz="2100" dirty="0"/>
+          </a:p>
+        </p:txBody>
+      </p:sp>
+      <p:sp>
+        <p:nvSpPr>
+          <p:cNvPr id="4" name="Прямоугольник 3"/>
+          <p:cNvSpPr/>
+          <p:nvPr/>
+        </p:nvSpPr>
+        <p:spPr>
+          <a:xfrm>
+            <a:off x="6072187" y="6550223"/>
+            <a:ext cx="6096000" cy="307777"/>
+          </a:xfrm>
+          <a:prstGeom prst="rect">
+            <a:avLst/>
+          </a:prstGeom>
+        </p:spPr>
+        <p:txBody>
+          <a:bodyPr>
+            <a:spAutoFit/>
+          </a:bodyPr>
+          <a:lstStyle/>
+          <a:p>
+            <a:r>
+              <a:rPr lang="ru-RU" sz="1400" dirty="0"/>
+              <a:t>https://mlcourse.ai/book/topic09/topic9_part1_time_series_python.html</a:t>
+            </a:r>
+          </a:p>
+        </p:txBody>
+      </p:sp>
+      <p:sp>
+        <p:nvSpPr>
+          <p:cNvPr id="5" name="Прямоугольник 4"/>
+          <p:cNvSpPr/>
+          <p:nvPr/>
+        </p:nvSpPr>
+        <p:spPr>
+          <a:xfrm>
+            <a:off x="0" y="6550222"/>
+            <a:ext cx="4082080" cy="307777"/>
+          </a:xfrm>
+          <a:prstGeom prst="rect">
+            <a:avLst/>
+          </a:prstGeom>
+        </p:spPr>
+        <p:txBody>
+          <a:bodyPr wrap="none">
+            <a:spAutoFit/>
+          </a:bodyPr>
+          <a:lstStyle/>
+          <a:p>
+            <a:r>
+              <a:rPr lang="ru-RU" sz="1400" dirty="0"/>
+              <a:t>https://blogs.cisco.com/analytics-automation/arima3</a:t>
+            </a:r>
+          </a:p>
+        </p:txBody>
+      </p:sp>
+    </p:spTree>
+    <p:extLst>
+      <p:ext uri="{BB962C8B-B14F-4D97-AF65-F5344CB8AC3E}">
+        <p14:creationId xmlns:p14="http://schemas.microsoft.com/office/powerpoint/2010/main" val="3372900399"/>
+      </p:ext>
+    </p:extLst>
+  </p:cSld>
+  <p:clrMapOvr>
+    <a:masterClrMapping/>
+  </p:clrMapOvr>
+  <p:timing>
+    <p:tnLst>
+      <p:par>
+        <p:cTn id="1" dur="indefinite" restart="never" nodeType="tmRoot"/>
+      </p:par>
+    </p:tnLst>
+  </p:timing>
+</p:sld>
+</file>
+
+<file path=ppt/slides/slide4.xml><?xml version="1.0" encoding="utf-8"?>
 <p:sld xmlns:a="http://schemas.openxmlformats.org/drawingml/2006/main" xmlns:r="http://schemas.openxmlformats.org/officeDocument/2006/relationships" xmlns:p="http://schemas.openxmlformats.org/presentationml/2006/main">
   <p:cSld>
     <p:spTree>
@@ -10238,10 +14652,17 @@
   <p:clrMapOvr>
     <a:masterClrMapping/>
   </p:clrMapOvr>
+  <p:timing>
+    <p:tnLst>
+      <p:par>
+        <p:cTn id="1" dur="indefinite" restart="never" nodeType="tmRoot"/>
+      </p:par>
+    </p:tnLst>
+  </p:timing>
 </p:sld>
 </file>
 
-<file path=ppt/slides/slide4.xml><?xml version="1.0" encoding="utf-8"?>
+<file path=ppt/slides/slide5.xml><?xml version="1.0" encoding="utf-8"?>
 <p:sld xmlns:a="http://schemas.openxmlformats.org/drawingml/2006/main" xmlns:r="http://schemas.openxmlformats.org/officeDocument/2006/relationships" xmlns:p="http://schemas.openxmlformats.org/presentationml/2006/main">
   <p:cSld>
     <p:spTree>
@@ -10260,6 +14681,295 @@
       </p:grpSpPr>
       <p:sp>
         <p:nvSpPr>
+          <p:cNvPr id="2" name="Заголовок 1"/>
+          <p:cNvSpPr>
+            <a:spLocks noGrp="1"/>
+          </p:cNvSpPr>
+          <p:nvPr>
+            <p:ph type="title"/>
+          </p:nvPr>
+        </p:nvSpPr>
+        <p:spPr>
+          <a:xfrm>
+            <a:off x="233081" y="313765"/>
+            <a:ext cx="11869271" cy="726141"/>
+          </a:xfrm>
+        </p:spPr>
+        <p:txBody>
+          <a:bodyPr>
+            <a:normAutofit/>
+          </a:bodyPr>
+          <a:lstStyle/>
+          <a:p>
+            <a:pPr algn="ctr"/>
+            <a:r>
+              <a:rPr lang="ru-RU" dirty="0"/>
+              <a:t>ВР и машинное обучение</a:t>
+            </a:r>
+          </a:p>
+        </p:txBody>
+      </p:sp>
+      <p:sp>
+        <p:nvSpPr>
+          <p:cNvPr id="3" name="Объект 2"/>
+          <p:cNvSpPr>
+            <a:spLocks noGrp="1"/>
+          </p:cNvSpPr>
+          <p:nvPr>
+            <p:ph idx="1"/>
+          </p:nvPr>
+        </p:nvSpPr>
+        <p:spPr>
+          <a:xfrm>
+            <a:off x="233081" y="1333539"/>
+            <a:ext cx="5501444" cy="1446493"/>
+          </a:xfrm>
+        </p:spPr>
+        <p:txBody>
+          <a:bodyPr>
+            <a:noAutofit/>
+          </a:bodyPr>
+          <a:lstStyle/>
+          <a:p>
+            <a:pPr marL="0" indent="0">
+              <a:buNone/>
+            </a:pPr>
+            <a:r>
+              <a:rPr lang="ru-RU" sz="2400" dirty="0" smtClean="0"/>
+              <a:t>Выделение признаков из временного ряда  в таблицу</a:t>
+            </a:r>
+          </a:p>
+          <a:p>
+            <a:r>
+              <a:rPr lang="ru-RU" sz="2400" dirty="0" smtClean="0"/>
+              <a:t>Лучше работает не для задач предсказания (для остальных задач)</a:t>
+            </a:r>
+          </a:p>
+          <a:p>
+            <a:pPr marL="0" indent="0">
+              <a:buNone/>
+            </a:pPr>
+            <a:endParaRPr lang="ru-RU" sz="2400" dirty="0"/>
+          </a:p>
+        </p:txBody>
+      </p:sp>
+      <p:pic>
+        <p:nvPicPr>
+          <p:cNvPr id="1026" name="Picture 2" descr="The rolling mechanism"/>
+          <p:cNvPicPr>
+            <a:picLocks noChangeAspect="1" noChangeArrowheads="1"/>
+          </p:cNvPicPr>
+          <p:nvPr/>
+        </p:nvPicPr>
+        <p:blipFill>
+          <a:blip r:embed="rId2">
+            <a:extLst>
+              <a:ext uri="{28A0092B-C50C-407E-A947-70E740481C1C}">
+                <a14:useLocalDpi xmlns:a14="http://schemas.microsoft.com/office/drawing/2010/main" val="0"/>
+              </a:ext>
+            </a:extLst>
+          </a:blip>
+          <a:srcRect/>
+          <a:stretch>
+            <a:fillRect/>
+          </a:stretch>
+        </p:blipFill>
+        <p:spPr bwMode="auto">
+          <a:xfrm>
+            <a:off x="309485" y="3174679"/>
+            <a:ext cx="3511078" cy="3116391"/>
+          </a:xfrm>
+          <a:prstGeom prst="rect">
+            <a:avLst/>
+          </a:prstGeom>
+          <a:noFill/>
+          <a:extLst>
+            <a:ext uri="{909E8E84-426E-40DD-AFC4-6F175D3DCCD1}">
+              <a14:hiddenFill xmlns:a14="http://schemas.microsoft.com/office/drawing/2010/main">
+                <a:solidFill>
+                  <a:srgbClr val="FFFFFF"/>
+                </a:solidFill>
+              </a14:hiddenFill>
+            </a:ext>
+          </a:extLst>
+        </p:spPr>
+      </p:pic>
+      <p:sp>
+        <p:nvSpPr>
+          <p:cNvPr id="11" name="Прямоугольник 10"/>
+          <p:cNvSpPr/>
+          <p:nvPr/>
+        </p:nvSpPr>
+        <p:spPr>
+          <a:xfrm>
+            <a:off x="35558" y="6458314"/>
+            <a:ext cx="4058932" cy="276999"/>
+          </a:xfrm>
+          <a:prstGeom prst="rect">
+            <a:avLst/>
+          </a:prstGeom>
+        </p:spPr>
+        <p:txBody>
+          <a:bodyPr wrap="none">
+            <a:spAutoFit/>
+          </a:bodyPr>
+          <a:lstStyle/>
+          <a:p>
+            <a:r>
+              <a:rPr lang="ru-RU" sz="1200" dirty="0"/>
+              <a:t>https://tsfresh.readthedocs.io/en/latest/text/forecasting.html</a:t>
+            </a:r>
+          </a:p>
+        </p:txBody>
+      </p:sp>
+      <p:pic>
+        <p:nvPicPr>
+          <p:cNvPr id="14" name="Picture 4" descr="https://cienciadedatos.net/images/diagram-recursive-mutistep-forecasting.png">
+            <a:extLst>
+              <a:ext uri="{FF2B5EF4-FFF2-40B4-BE49-F238E27FC236}">
+                <a16:creationId xmlns:a16="http://schemas.microsoft.com/office/drawing/2014/main" id="{25F3A3BD-6541-B697-0678-BB8DBD68786A}"/>
+              </a:ext>
+            </a:extLst>
+          </p:cNvPr>
+          <p:cNvPicPr>
+            <a:picLocks noChangeAspect="1" noChangeArrowheads="1"/>
+          </p:cNvPicPr>
+          <p:nvPr/>
+        </p:nvPicPr>
+        <p:blipFill>
+          <a:blip r:embed="rId3" cstate="print">
+            <a:extLst>
+              <a:ext uri="{28A0092B-C50C-407E-A947-70E740481C1C}">
+                <a14:useLocalDpi xmlns:a14="http://schemas.microsoft.com/office/drawing/2010/main" val="0"/>
+              </a:ext>
+            </a:extLst>
+          </a:blip>
+          <a:srcRect/>
+          <a:stretch>
+            <a:fillRect/>
+          </a:stretch>
+        </p:blipFill>
+        <p:spPr bwMode="auto">
+          <a:xfrm>
+            <a:off x="6167716" y="3572149"/>
+            <a:ext cx="4737848" cy="2321450"/>
+          </a:xfrm>
+          <a:prstGeom prst="rect">
+            <a:avLst/>
+          </a:prstGeom>
+          <a:noFill/>
+          <a:extLst>
+            <a:ext uri="{909E8E84-426E-40DD-AFC4-6F175D3DCCD1}">
+              <a14:hiddenFill xmlns:a14="http://schemas.microsoft.com/office/drawing/2010/main">
+                <a:solidFill>
+                  <a:srgbClr val="FFFFFF"/>
+                </a:solidFill>
+              </a14:hiddenFill>
+            </a:ext>
+          </a:extLst>
+        </p:spPr>
+      </p:pic>
+      <p:sp>
+        <p:nvSpPr>
+          <p:cNvPr id="13" name="Прямоугольник 12"/>
+          <p:cNvSpPr/>
+          <p:nvPr/>
+        </p:nvSpPr>
+        <p:spPr>
+          <a:xfrm>
+            <a:off x="6167716" y="2549199"/>
+            <a:ext cx="4932889" cy="461665"/>
+          </a:xfrm>
+          <a:prstGeom prst="rect">
+            <a:avLst/>
+          </a:prstGeom>
+        </p:spPr>
+        <p:txBody>
+          <a:bodyPr wrap="none">
+            <a:spAutoFit/>
+          </a:bodyPr>
+          <a:lstStyle/>
+          <a:p>
+            <a:r>
+              <a:rPr lang="ru-RU" sz="2400" dirty="0" err="1"/>
+              <a:t>Редкуция</a:t>
+            </a:r>
+            <a:r>
+              <a:rPr lang="ru-RU" sz="2400" dirty="0"/>
+              <a:t> сырых данных к таблицам</a:t>
+            </a:r>
+          </a:p>
+        </p:txBody>
+      </p:sp>
+      <p:sp>
+        <p:nvSpPr>
+          <p:cNvPr id="15" name="TextBox 14"/>
+          <p:cNvSpPr txBox="1"/>
+          <p:nvPr/>
+        </p:nvSpPr>
+        <p:spPr>
+          <a:xfrm>
+            <a:off x="2983803" y="5708933"/>
+            <a:ext cx="5970545" cy="369332"/>
+          </a:xfrm>
+          <a:prstGeom prst="rect">
+            <a:avLst/>
+          </a:prstGeom>
+          <a:noFill/>
+        </p:spPr>
+        <p:txBody>
+          <a:bodyPr wrap="none" rtlCol="0">
+            <a:spAutoFit/>
+          </a:bodyPr>
+          <a:lstStyle/>
+          <a:p>
+            <a:r>
+              <a:rPr lang="ru-RU" dirty="0" smtClean="0"/>
+              <a:t>Могут быть и гибриды – и признаки и участки сырого ряда</a:t>
+            </a:r>
+            <a:endParaRPr lang="ru-RU" dirty="0"/>
+          </a:p>
+        </p:txBody>
+      </p:sp>
+    </p:spTree>
+    <p:extLst>
+      <p:ext uri="{BB962C8B-B14F-4D97-AF65-F5344CB8AC3E}">
+        <p14:creationId xmlns:p14="http://schemas.microsoft.com/office/powerpoint/2010/main" val="1156161431"/>
+      </p:ext>
+    </p:extLst>
+  </p:cSld>
+  <p:clrMapOvr>
+    <a:masterClrMapping/>
+  </p:clrMapOvr>
+  <p:timing>
+    <p:tnLst>
+      <p:par>
+        <p:cTn id="1" dur="indefinite" restart="never" nodeType="tmRoot"/>
+      </p:par>
+    </p:tnLst>
+  </p:timing>
+</p:sld>
+</file>
+
+<file path=ppt/slides/slide6.xml><?xml version="1.0" encoding="utf-8"?>
+<p:sld xmlns:a="http://schemas.openxmlformats.org/drawingml/2006/main" xmlns:r="http://schemas.openxmlformats.org/officeDocument/2006/relationships" xmlns:p="http://schemas.openxmlformats.org/presentationml/2006/main">
+  <p:cSld>
+    <p:spTree>
+      <p:nvGrpSpPr>
+        <p:cNvPr id="1" name=""/>
+        <p:cNvGrpSpPr/>
+        <p:nvPr/>
+      </p:nvGrpSpPr>
+      <p:grpSpPr>
+        <a:xfrm>
+          <a:off x="0" y="0"/>
+          <a:ext cx="0" cy="0"/>
+          <a:chOff x="0" y="0"/>
+          <a:chExt cx="0" cy="0"/>
+        </a:xfrm>
+      </p:grpSpPr>
+      <p:sp>
+        <p:nvSpPr>
           <p:cNvPr id="2" name="Заголовок 1">
             <a:extLst>
               <a:ext uri="{FF2B5EF4-FFF2-40B4-BE49-F238E27FC236}">
@@ -10309,8 +15019,8 @@
         </p:nvSpPr>
         <p:spPr>
           <a:xfrm>
-            <a:off x="433936" y="1097345"/>
-            <a:ext cx="11324128" cy="4351338"/>
+            <a:off x="244444" y="1039079"/>
+            <a:ext cx="11513620" cy="4351338"/>
           </a:xfrm>
         </p:spPr>
         <p:txBody>
@@ -10320,134 +15030,165 @@
           <a:lstStyle/>
           <a:p>
             <a:r>
-              <a:rPr lang="ru-RU" sz="2200" i="1" dirty="0"/>
+              <a:rPr lang="ru-RU" sz="2000" i="1" dirty="0"/>
               <a:t>Признаковое описание</a:t>
             </a:r>
             <a:r>
-              <a:rPr lang="ru-RU" sz="2200" dirty="0"/>
+              <a:rPr lang="ru-RU" sz="2000" dirty="0"/>
               <a:t> – история ряда до момента времени </a:t>
             </a:r>
             <a:r>
-              <a:rPr lang="en" sz="2200" i="1" dirty="0"/>
+              <a:rPr lang="en" sz="2000" i="1" dirty="0"/>
               <a:t>t</a:t>
             </a:r>
             <a:r>
-              <a:rPr lang="en" sz="2200" dirty="0"/>
+              <a:rPr lang="en" sz="2000" dirty="0"/>
               <a:t>−1.</a:t>
             </a:r>
           </a:p>
           <a:p>
             <a:r>
-              <a:rPr lang="ru-RU" sz="2200" i="1" dirty="0"/>
+              <a:rPr lang="ru-RU" sz="2000" i="1" dirty="0"/>
               <a:t>Целевая метка</a:t>
             </a:r>
             <a:r>
-              <a:rPr lang="ru-RU" sz="2200" dirty="0"/>
+              <a:rPr lang="ru-RU" sz="2000" dirty="0"/>
               <a:t> – значение </a:t>
             </a:r>
             <a:r>
-              <a:rPr lang="en" sz="2200" dirty="0" err="1"/>
+              <a:rPr lang="en" sz="2000" dirty="0" err="1"/>
               <a:t>yt</a:t>
             </a:r>
             <a:r>
-              <a:rPr lang="en" sz="2200" dirty="0"/>
+              <a:rPr lang="en" sz="2000" dirty="0"/>
               <a:t>​.</a:t>
             </a:r>
           </a:p>
           <a:p>
             <a:r>
-              <a:rPr lang="ru-RU" sz="2200" dirty="0"/>
+              <a:rPr lang="ru-RU" sz="2000" dirty="0"/>
               <a:t>По этим данным мы обучаем какую-либо регрессионную модель строить прогнозы на один шаг вперед. При построении прогноза на несколько шагов вперед мы сначала построим прогноз на один шаг. Затем – на второй шаг, используя полученный прогноз на первый шаг в качестве признаков, и далее аналогично.</a:t>
             </a:r>
           </a:p>
           <a:p>
             <a:r>
-              <a:rPr lang="ru-RU" sz="2200" dirty="0"/>
+              <a:rPr lang="ru-RU" sz="2000" dirty="0"/>
               <a:t>Иначе говоря, если для прогнозирования </a:t>
             </a:r>
             <a:r>
-              <a:rPr lang="en" sz="2200" i="1" dirty="0" err="1"/>
+              <a:rPr lang="en" sz="2000" i="1" dirty="0" err="1"/>
               <a:t>yt</a:t>
             </a:r>
             <a:r>
-              <a:rPr lang="en" sz="2200" dirty="0"/>
+              <a:rPr lang="en" sz="2000" dirty="0"/>
               <a:t>​ </a:t>
             </a:r>
             <a:r>
-              <a:rPr lang="ru-RU" sz="2200" dirty="0"/>
+              <a:rPr lang="ru-RU" sz="2000" dirty="0"/>
               <a:t>признаковое описание имеет вид (</a:t>
             </a:r>
             <a:r>
-              <a:rPr lang="en" sz="2200" dirty="0" err="1"/>
+              <a:rPr lang="en" sz="2000" dirty="0" err="1"/>
               <a:t>yt</a:t>
             </a:r>
             <a:r>
-              <a:rPr lang="en" sz="2200" dirty="0"/>
+              <a:rPr lang="en" sz="2000" dirty="0"/>
               <a:t>−p,…,yt−1), </a:t>
             </a:r>
             <a:r>
-              <a:rPr lang="ru-RU" sz="2200" dirty="0"/>
+              <a:rPr lang="ru-RU" sz="2000" dirty="0"/>
               <a:t>то для построения прогноза </a:t>
             </a:r>
             <a:r>
-              <a:rPr lang="en" sz="2200" i="1" dirty="0"/>
+              <a:rPr lang="en" sz="2000" i="1" dirty="0"/>
               <a:t>yt</a:t>
             </a:r>
             <a:r>
-              <a:rPr lang="en" sz="2200" dirty="0"/>
+              <a:rPr lang="en" sz="2000" dirty="0"/>
               <a:t>+1​ </a:t>
             </a:r>
             <a:r>
-              <a:rPr lang="ru-RU" sz="2200" dirty="0"/>
+              <a:rPr lang="ru-RU" sz="2000" dirty="0"/>
               <a:t>рассматривается признаковое описание </a:t>
             </a:r>
             <a:r>
-              <a:rPr lang="en" sz="2200" dirty="0"/>
+              <a:rPr lang="en" sz="2000" dirty="0"/>
               <a:t>(</a:t>
             </a:r>
             <a:r>
-              <a:rPr lang="en" sz="2200" i="1" dirty="0"/>
+              <a:rPr lang="en" sz="2000" i="1" dirty="0"/>
               <a:t>yt</a:t>
             </a:r>
             <a:r>
-              <a:rPr lang="en" sz="2200" dirty="0"/>
+              <a:rPr lang="en" sz="2000" dirty="0"/>
               <a:t>−</a:t>
             </a:r>
             <a:r>
-              <a:rPr lang="en" sz="2200" i="1" dirty="0"/>
+              <a:rPr lang="en" sz="2000" i="1" dirty="0"/>
               <a:t>p</a:t>
             </a:r>
             <a:r>
-              <a:rPr lang="en" sz="2200" dirty="0"/>
+              <a:rPr lang="en" sz="2000" dirty="0"/>
               <a:t>+1​,…,</a:t>
             </a:r>
             <a:r>
-              <a:rPr lang="en" sz="2200" i="1" dirty="0"/>
+              <a:rPr lang="en" sz="2000" i="1" dirty="0"/>
               <a:t>yt</a:t>
             </a:r>
             <a:r>
-              <a:rPr lang="en" sz="2200" dirty="0"/>
+              <a:rPr lang="en" sz="2000" dirty="0"/>
               <a:t>−1​,</a:t>
             </a:r>
             <a:r>
-              <a:rPr lang="en" sz="2200" i="1" dirty="0"/>
+              <a:rPr lang="en" sz="2000" i="1" dirty="0"/>
               <a:t>y</a:t>
             </a:r>
             <a:r>
-              <a:rPr lang="en" sz="2200" dirty="0"/>
+              <a:rPr lang="en" sz="2000" dirty="0"/>
               <a:t>​</a:t>
             </a:r>
             <a:r>
-              <a:rPr lang="en" sz="2200" i="1" dirty="0"/>
+              <a:rPr lang="en" sz="2000" i="1" dirty="0"/>
               <a:t>t</a:t>
             </a:r>
             <a:r>
-              <a:rPr lang="en" sz="2200" dirty="0"/>
-              <a:t>​).</a:t>
-            </a:r>
-          </a:p>
-          <a:p>
-            <a:endParaRPr lang="ru-RU" sz="2200" dirty="0"/>
+              <a:rPr lang="en" sz="2000" dirty="0"/>
+              <a:t>​</a:t>
+            </a:r>
+            <a:r>
+              <a:rPr lang="en" sz="2000" dirty="0" smtClean="0"/>
+              <a:t>).</a:t>
+            </a:r>
+          </a:p>
+          <a:p>
+            <a:r>
+              <a:rPr lang="ru-RU" sz="2000" dirty="0" smtClean="0"/>
+              <a:t>Желательно, чтобы окон </a:t>
+            </a:r>
+            <a:r>
+              <a:rPr lang="en-US" sz="2000" dirty="0" smtClean="0"/>
+              <a:t>&gt; </a:t>
+            </a:r>
+            <a:r>
+              <a:rPr lang="ru-RU" sz="2000" dirty="0" smtClean="0"/>
+              <a:t>числа значимых лагов </a:t>
+            </a:r>
+            <a:r>
+              <a:rPr lang="en-US" sz="2000" dirty="0" smtClean="0"/>
+              <a:t>ACF </a:t>
+            </a:r>
+            <a:r>
+              <a:rPr lang="ru-RU" sz="2000" dirty="0" smtClean="0"/>
+              <a:t>или </a:t>
+            </a:r>
+            <a:r>
+              <a:rPr lang="en-US" sz="2000" dirty="0" smtClean="0"/>
+              <a:t>~ season</a:t>
+            </a:r>
+            <a:endParaRPr lang="en" sz="2000" dirty="0"/>
+          </a:p>
+          <a:p>
+            <a:endParaRPr lang="ru-RU" sz="2000" dirty="0"/>
           </a:p>
         </p:txBody>
       </p:sp>
@@ -10527,7 +15268,7 @@
         </p:blipFill>
         <p:spPr bwMode="auto">
           <a:xfrm>
-            <a:off x="632146" y="4287959"/>
+            <a:off x="605928" y="4293446"/>
             <a:ext cx="4737848" cy="2321450"/>
           </a:xfrm>
           <a:prstGeom prst="rect">
@@ -10665,10 +15406,17 @@
   <p:clrMapOvr>
     <a:masterClrMapping/>
   </p:clrMapOvr>
+  <p:timing>
+    <p:tnLst>
+      <p:par>
+        <p:cTn id="1" dur="indefinite" restart="never" nodeType="tmRoot"/>
+      </p:par>
+    </p:tnLst>
+  </p:timing>
 </p:sld>
 </file>
 
-<file path=ppt/slides/slide5.xml><?xml version="1.0" encoding="utf-8"?>
+<file path=ppt/slides/slide7.xml><?xml version="1.0" encoding="utf-8"?>
 <p:sld xmlns:a="http://schemas.openxmlformats.org/drawingml/2006/main" xmlns:r="http://schemas.openxmlformats.org/officeDocument/2006/relationships" xmlns:p="http://schemas.openxmlformats.org/presentationml/2006/main">
   <p:cSld>
     <p:spTree>
@@ -10742,8 +15490,8 @@
         </p:nvSpPr>
         <p:spPr>
           <a:xfrm>
-            <a:off x="261944" y="986170"/>
-            <a:ext cx="11324128" cy="4351338"/>
+            <a:off x="144855" y="986170"/>
+            <a:ext cx="11441217" cy="4351338"/>
           </a:xfrm>
         </p:spPr>
         <p:txBody>
@@ -10753,72 +15501,126 @@
           <a:lstStyle/>
           <a:p>
             <a:pPr marL="0" indent="0">
+              <a:spcBef>
+                <a:spcPts val="600"/>
+              </a:spcBef>
               <a:buNone/>
             </a:pPr>
             <a:r>
-              <a:rPr lang="ru-RU" dirty="0"/>
+              <a:rPr lang="ru-RU" sz="2000" dirty="0"/>
               <a:t>построением каждого прогноза в рамках горизонта прогнозирования должна заниматься своя модель. Тем самым создается </a:t>
             </a:r>
             <a:r>
-              <a:rPr lang="en" i="1" dirty="0"/>
+              <a:rPr lang="en" sz="2000" i="1" dirty="0"/>
               <a:t>H</a:t>
             </a:r>
             <a:r>
-              <a:rPr lang="en" dirty="0"/>
+              <a:rPr lang="en" sz="2000" dirty="0"/>
               <a:t> </a:t>
             </a:r>
             <a:r>
-              <a:rPr lang="ru-RU" dirty="0"/>
+              <a:rPr lang="ru-RU" sz="2000" dirty="0"/>
               <a:t>моделей прогнозирования для каждого момента времени </a:t>
             </a:r>
             <a:r>
-              <a:rPr lang="en" dirty="0"/>
+              <a:rPr lang="en" sz="2000" dirty="0"/>
               <a:t>t0⩽t⩽t0+H−1</a:t>
             </a:r>
-            <a:endParaRPr lang="ru-RU" dirty="0"/>
+            <a:endParaRPr lang="ru-RU" sz="2000" dirty="0"/>
           </a:p>
           <a:p>
             <a:pPr marL="0" indent="0">
+              <a:spcBef>
+                <a:spcPts val="600"/>
+              </a:spcBef>
               <a:buNone/>
             </a:pPr>
             <a:r>
-              <a:rPr lang="ru-RU" i="1" dirty="0"/>
+              <a:rPr lang="ru-RU" sz="2000" i="1" dirty="0"/>
               <a:t>Признаковое описание</a:t>
             </a:r>
             <a:r>
-              <a:rPr lang="ru-RU" dirty="0"/>
+              <a:rPr lang="ru-RU" sz="2000" dirty="0"/>
               <a:t> – история ряда до момента времени </a:t>
             </a:r>
             <a:r>
-              <a:rPr lang="en" i="1" dirty="0"/>
+              <a:rPr lang="en" sz="2000" i="1" dirty="0"/>
               <a:t>t</a:t>
             </a:r>
             <a:r>
-              <a:rPr lang="en" dirty="0"/>
+              <a:rPr lang="en" sz="2000" dirty="0"/>
               <a:t>0​−1, </a:t>
             </a:r>
             <a:r>
-              <a:rPr lang="ru-RU" dirty="0"/>
+              <a:rPr lang="ru-RU" sz="2000" dirty="0"/>
               <a:t>причем признаки одни и те же для каждой модели.</a:t>
             </a:r>
           </a:p>
           <a:p>
-            <a:r>
-              <a:rPr lang="ru-RU" i="1" dirty="0"/>
+            <a:pPr>
+              <a:spcBef>
+                <a:spcPts val="600"/>
+              </a:spcBef>
+            </a:pPr>
+            <a:r>
+              <a:rPr lang="ru-RU" sz="2000" i="1" dirty="0"/>
               <a:t>Целевая метка</a:t>
             </a:r>
             <a:r>
-              <a:rPr lang="ru-RU" dirty="0"/>
-              <a:t> – значение </a:t>
-            </a:r>
-            <a:r>
-              <a:rPr lang="en" i="1" dirty="0" err="1"/>
+              <a:rPr lang="ru-RU" sz="2000" dirty="0"/>
+              <a:t> – </a:t>
+            </a:r>
+            <a:r>
+              <a:rPr lang="ru-RU" sz="2000" dirty="0" smtClean="0"/>
+              <a:t>значение</a:t>
+            </a:r>
+            <a:r>
+              <a:rPr lang="ru-RU" sz="2000" dirty="0"/>
+              <a:t> </a:t>
+            </a:r>
+            <a:r>
+              <a:rPr lang="en" sz="2000" i="1" dirty="0"/>
               <a:t>yt</a:t>
             </a:r>
             <a:r>
-              <a:rPr lang="en" dirty="0"/>
-              <a:t>​.</a:t>
-            </a:r>
+              <a:rPr lang="en" sz="2000" dirty="0"/>
+              <a:t>​</a:t>
+            </a:r>
+            <a:r>
+              <a:rPr lang="en" sz="2000" dirty="0" smtClean="0"/>
+              <a:t>.</a:t>
+            </a:r>
+          </a:p>
+          <a:p>
+            <a:pPr>
+              <a:spcBef>
+                <a:spcPts val="600"/>
+              </a:spcBef>
+            </a:pPr>
+            <a:r>
+              <a:rPr lang="ru-RU" sz="2000" dirty="0" smtClean="0"/>
+              <a:t>Число моделей из технологических соображений, </a:t>
+            </a:r>
+          </a:p>
+          <a:p>
+            <a:pPr>
+              <a:spcBef>
+                <a:spcPts val="600"/>
+              </a:spcBef>
+            </a:pPr>
+            <a:r>
+              <a:rPr lang="ru-RU" sz="2000" dirty="0" smtClean="0"/>
+              <a:t>Лучше, если </a:t>
+            </a:r>
+            <a:r>
+              <a:rPr lang="ru-RU" sz="2000" dirty="0" err="1" smtClean="0"/>
+              <a:t>трагет</a:t>
+            </a:r>
+            <a:r>
+              <a:rPr lang="ru-RU" sz="2000" dirty="0" smtClean="0"/>
+              <a:t> предсказать сложно</a:t>
+            </a:r>
+            <a:endParaRPr lang="en" sz="2000" dirty="0"/>
           </a:p>
         </p:txBody>
       </p:sp>
@@ -10961,8 +15763,8 @@
         </p:blipFill>
         <p:spPr bwMode="auto">
           <a:xfrm>
-            <a:off x="3224042" y="3569464"/>
-            <a:ext cx="8871395" cy="2537819"/>
+            <a:off x="3301092" y="3617218"/>
+            <a:ext cx="8726540" cy="2496381"/>
           </a:xfrm>
           <a:prstGeom prst="rect">
             <a:avLst/>
@@ -11008,7 +15810,7 @@
         </p:blipFill>
         <p:spPr bwMode="auto">
           <a:xfrm>
-            <a:off x="-77050" y="3738400"/>
+            <a:off x="0" y="3705345"/>
             <a:ext cx="3301092" cy="2446001"/>
           </a:xfrm>
           <a:prstGeom prst="rect">
@@ -11036,10 +15838,17 @@
   <p:clrMapOvr>
     <a:masterClrMapping/>
   </p:clrMapOvr>
+  <p:timing>
+    <p:tnLst>
+      <p:par>
+        <p:cTn id="1" dur="indefinite" restart="never" nodeType="tmRoot"/>
+      </p:par>
+    </p:tnLst>
+  </p:timing>
 </p:sld>
 </file>
 
-<file path=ppt/slides/slide6.xml><?xml version="1.0" encoding="utf-8"?>
+<file path=ppt/slides/slide8.xml><?xml version="1.0" encoding="utf-8"?>
 <p:sld xmlns:a="http://schemas.openxmlformats.org/drawingml/2006/main" xmlns:r="http://schemas.openxmlformats.org/officeDocument/2006/relationships" xmlns:p="http://schemas.openxmlformats.org/presentationml/2006/main">
   <p:cSld>
     <p:spTree>
@@ -11377,10 +16186,17 @@
   <p:clrMapOvr>
     <a:masterClrMapping/>
   </p:clrMapOvr>
+  <p:timing>
+    <p:tnLst>
+      <p:par>
+        <p:cTn id="1" dur="indefinite" restart="never" nodeType="tmRoot"/>
+      </p:par>
+    </p:tnLst>
+  </p:timing>
 </p:sld>
 </file>
 
-<file path=ppt/slides/slide7.xml><?xml version="1.0" encoding="utf-8"?>
+<file path=ppt/slides/slide9.xml><?xml version="1.0" encoding="utf-8"?>
 <p:sld xmlns:a="http://schemas.openxmlformats.org/drawingml/2006/main" xmlns:r="http://schemas.openxmlformats.org/officeDocument/2006/relationships" xmlns:p="http://schemas.openxmlformats.org/presentationml/2006/main">
   <p:cSld>
     <p:spTree>
@@ -11409,17 +16225,20 @@
         </p:nvSpPr>
         <p:spPr>
           <a:xfrm>
-            <a:off x="125505" y="320303"/>
-            <a:ext cx="12227859" cy="773392"/>
+            <a:off x="216152" y="120038"/>
+            <a:ext cx="10991850" cy="635000"/>
           </a:xfrm>
         </p:spPr>
         <p:txBody>
-          <a:bodyPr/>
+          <a:bodyPr>
+            <a:normAutofit fontScale="90000"/>
+          </a:bodyPr>
           <a:lstStyle/>
           <a:p>
+            <a:pPr algn="ctr"/>
             <a:r>
               <a:rPr lang="ru-RU" dirty="0"/>
-              <a:t>Признаки во временных рядах</a:t>
+              <a:t>Многошаговые особенности оценки точности</a:t>
             </a:r>
           </a:p>
         </p:txBody>
@@ -11436,8 +16255,8 @@
         </p:nvSpPr>
         <p:spPr>
           <a:xfrm>
-            <a:off x="125505" y="1053547"/>
-            <a:ext cx="11228295" cy="4930869"/>
+            <a:off x="138193" y="662857"/>
+            <a:ext cx="11706225" cy="5176838"/>
           </a:xfrm>
         </p:spPr>
         <p:txBody>
@@ -11446,22 +16265,68 @@
           </a:bodyPr>
           <a:lstStyle/>
           <a:p>
-            <a:pPr marL="0" indent="0">
-              <a:buNone/>
-            </a:pPr>
             <a:r>
               <a:rPr lang="ru-RU" sz="2400" dirty="0"/>
-              <a:t>Может быть несколько вариантов редукции. </a:t>
-            </a:r>
-          </a:p>
-          <a:p>
-            <a:endParaRPr lang="ru-RU" sz="2400" dirty="0"/>
+              <a:t>Статические (оценка на следующем шаге опирается на истинные значения предыдущих шагов)</a:t>
+            </a:r>
+          </a:p>
+          <a:p>
+            <a:r>
+              <a:rPr lang="ru-RU" sz="2400" dirty="0"/>
+              <a:t>Динамическими (рекурсивным, оценка на следующем шаге опирается на оценки на предыдущих шагах ) </a:t>
+            </a:r>
+          </a:p>
+          <a:p>
+            <a:pPr lvl="1"/>
+            <a:r>
+              <a:rPr lang="ru-RU" sz="2000" dirty="0"/>
+              <a:t>Могут быть более сложные варианты, напр. оценка опирается  на моды распределений оценок на предыдущих шагах</a:t>
+            </a:r>
+          </a:p>
+        </p:txBody>
+      </p:sp>
+      <p:sp>
+        <p:nvSpPr>
+          <p:cNvPr id="4" name="AutoShape 2" descr="Demonstration of iterative, autoregressive forecasting | Download  Scientific Diagram"/>
+          <p:cNvSpPr>
+            <a:spLocks noChangeAspect="1" noChangeArrowheads="1"/>
+          </p:cNvSpPr>
+          <p:nvPr/>
+        </p:nvSpPr>
+        <p:spPr bwMode="auto">
+          <a:xfrm>
+            <a:off x="155575" y="-144463"/>
+            <a:ext cx="304800" cy="304801"/>
+          </a:xfrm>
+          <a:prstGeom prst="rect">
+            <a:avLst/>
+          </a:prstGeom>
+          <a:noFill/>
+          <a:extLst>
+            <a:ext uri="{909E8E84-426E-40DD-AFC4-6F175D3DCCD1}">
+              <a14:hiddenFill xmlns:a14="http://schemas.microsoft.com/office/drawing/2010/main">
+                <a:solidFill>
+                  <a:srgbClr val="FFFFFF"/>
+                </a:solidFill>
+              </a14:hiddenFill>
+            </a:ext>
+          </a:extLst>
+        </p:spPr>
+        <p:txBody>
+          <a:bodyPr vert="horz" wrap="square" lIns="91440" tIns="45720" rIns="91440" bIns="45720" numCol="1" anchor="t" anchorCtr="0" compatLnSpc="1">
+            <a:prstTxWarp prst="textNoShape">
+              <a:avLst/>
+            </a:prstTxWarp>
+          </a:bodyPr>
+          <a:lstStyle/>
+          <a:p>
+            <a:endParaRPr lang="ru-RU"/>
           </a:p>
         </p:txBody>
       </p:sp>
       <p:pic>
         <p:nvPicPr>
-          <p:cNvPr id="2050" name="Picture 2" descr="https://cienciadedatos.net/images/matrix_transformation_with_exog_variable.png"/>
+          <p:cNvPr id="5124" name="Picture 4" descr="https://www.researchgate.net/publication/381324371/figure/fig1/AS:11431281259462026@1720491044356/Demonstration-of-iterative-autoregressive-forecasting_W640.jpg"/>
           <p:cNvPicPr>
             <a:picLocks noChangeAspect="1" noChangeArrowheads="1"/>
           </p:cNvPicPr>
@@ -11482,8 +16347,8 @@
         </p:blipFill>
         <p:spPr bwMode="auto">
           <a:xfrm>
-            <a:off x="6421953" y="1875650"/>
-            <a:ext cx="5431629" cy="2060272"/>
+            <a:off x="307975" y="3758271"/>
+            <a:ext cx="5644598" cy="2716464"/>
           </a:xfrm>
           <a:prstGeom prst="rect">
             <a:avLst/>
@@ -11502,35 +16367,35 @@
       </p:pic>
       <p:sp>
         <p:nvSpPr>
-          <p:cNvPr id="5" name="Прямоугольник 4"/>
+          <p:cNvPr id="6" name="Прямоугольник 5"/>
           <p:cNvSpPr/>
           <p:nvPr/>
         </p:nvSpPr>
         <p:spPr>
           <a:xfrm>
-            <a:off x="0" y="6520957"/>
-            <a:ext cx="6096000" cy="276999"/>
+            <a:off x="216152" y="2687617"/>
+            <a:ext cx="6194425" cy="923330"/>
           </a:xfrm>
           <a:prstGeom prst="rect">
             <a:avLst/>
           </a:prstGeom>
         </p:spPr>
         <p:txBody>
-          <a:bodyPr>
+          <a:bodyPr wrap="square">
             <a:spAutoFit/>
           </a:bodyPr>
           <a:lstStyle/>
           <a:p>
             <a:r>
-              <a:rPr lang="ru-RU" sz="1200" dirty="0"/>
-              <a:t>https://cienciadedatos.net/documentos/py27-time-series-forecasting-python-scikitlearn.html</a:t>
+              <a:rPr lang="ru-RU" dirty="0"/>
+              <a:t>Динамическая оценка  предполагает использование предсказанных данных вместо истинных в окне предсказания</a:t>
             </a:r>
           </a:p>
         </p:txBody>
       </p:sp>
       <p:pic>
         <p:nvPicPr>
-          <p:cNvPr id="2052" name="Picture 4" descr="https://cienciadedatos.net/images/diagram-recursive-mutistep-forecasting.png"/>
+          <p:cNvPr id="5126" name="Picture 6" descr="https://skforecast.org/0.7.0/img/diagram-single-step-forecasting.png"/>
           <p:cNvPicPr>
             <a:picLocks noChangeAspect="1" noChangeArrowheads="1"/>
           </p:cNvPicPr>
@@ -11551,8 +16416,8 @@
         </p:blipFill>
         <p:spPr bwMode="auto">
           <a:xfrm>
-            <a:off x="519952" y="2509227"/>
-            <a:ext cx="4737848" cy="2321450"/>
+            <a:off x="6547605" y="3528275"/>
+            <a:ext cx="5374772" cy="2890633"/>
           </a:xfrm>
           <a:prstGeom prst="rect">
             <a:avLst/>
@@ -11569,447 +16434,43 @@
           </a:extLst>
         </p:spPr>
       </p:pic>
-      <p:pic>
-        <p:nvPicPr>
-          <p:cNvPr id="2054" name="Picture 6" descr="https://cienciadedatos.net/images/diagram-direct-multi-step-forecasting.png"/>
-          <p:cNvPicPr>
-            <a:picLocks noChangeAspect="1" noChangeArrowheads="1"/>
-          </p:cNvPicPr>
-          <p:nvPr/>
-        </p:nvPicPr>
-        <p:blipFill>
-          <a:blip r:embed="rId4" cstate="print">
-            <a:extLst>
-              <a:ext uri="{28A0092B-C50C-407E-A947-70E740481C1C}">
-                <a14:useLocalDpi xmlns:a14="http://schemas.microsoft.com/office/drawing/2010/main" val="0"/>
-              </a:ext>
-            </a:extLst>
-          </a:blip>
-          <a:srcRect/>
-          <a:stretch>
-            <a:fillRect/>
-          </a:stretch>
-        </p:blipFill>
-        <p:spPr bwMode="auto">
-          <a:xfrm>
-            <a:off x="6525953" y="4172247"/>
-            <a:ext cx="5129776" cy="2446001"/>
-          </a:xfrm>
-          <a:prstGeom prst="rect">
-            <a:avLst/>
-          </a:prstGeom>
-          <a:noFill/>
-          <a:extLst>
-            <a:ext uri="{909E8E84-426E-40DD-AFC4-6F175D3DCCD1}">
-              <a14:hiddenFill xmlns:a14="http://schemas.microsoft.com/office/drawing/2010/main">
-                <a:solidFill>
-                  <a:srgbClr val="FFFFFF"/>
-                </a:solidFill>
-              </a14:hiddenFill>
-            </a:ext>
-          </a:extLst>
-        </p:spPr>
-      </p:pic>
-      <p:sp>
-        <p:nvSpPr>
-          <p:cNvPr id="6" name="TextBox 5"/>
-          <p:cNvSpPr txBox="1"/>
+      <p:sp>
+        <p:nvSpPr>
+          <p:cNvPr id="9" name="Прямоугольник 8"/>
+          <p:cNvSpPr/>
           <p:nvPr/>
         </p:nvSpPr>
         <p:spPr>
           <a:xfrm>
-            <a:off x="7175894" y="1748610"/>
-            <a:ext cx="4707314" cy="369332"/>
-          </a:xfrm>
-          <a:prstGeom prst="rect">
-            <a:avLst/>
-          </a:prstGeom>
-          <a:noFill/>
-        </p:spPr>
-        <p:txBody>
-          <a:bodyPr wrap="none" rtlCol="0">
-            <a:spAutoFit/>
-          </a:bodyPr>
-          <a:lstStyle/>
-          <a:p>
-            <a:r>
-              <a:rPr lang="ru-RU" dirty="0"/>
-              <a:t>Добавление экзогенных факторов к редукции</a:t>
-            </a:r>
-          </a:p>
-        </p:txBody>
-      </p:sp>
-      <p:sp>
-        <p:nvSpPr>
-          <p:cNvPr id="10" name="TextBox 9"/>
-          <p:cNvSpPr txBox="1"/>
-          <p:nvPr/>
-        </p:nvSpPr>
-        <p:spPr>
-          <a:xfrm>
-            <a:off x="811516" y="1945873"/>
-            <a:ext cx="2462213" cy="369332"/>
-          </a:xfrm>
-          <a:prstGeom prst="rect">
-            <a:avLst/>
-          </a:prstGeom>
-          <a:noFill/>
-        </p:spPr>
-        <p:txBody>
-          <a:bodyPr wrap="none" rtlCol="0">
-            <a:spAutoFit/>
-          </a:bodyPr>
-          <a:lstStyle/>
-          <a:p>
-            <a:r>
-              <a:rPr lang="ru-RU" dirty="0"/>
-              <a:t>Рекурсивная редукция </a:t>
-            </a:r>
-          </a:p>
-        </p:txBody>
-      </p:sp>
-      <p:pic>
-        <p:nvPicPr>
-          <p:cNvPr id="11" name="Рисунок 10"/>
-          <p:cNvPicPr>
-            <a:picLocks noChangeAspect="1"/>
-          </p:cNvPicPr>
-          <p:nvPr/>
-        </p:nvPicPr>
-        <p:blipFill rotWithShape="1">
-          <a:blip r:embed="rId5"/>
-          <a:srcRect l="51108" t="7033" r="6647" b="22856"/>
-          <a:stretch/>
-        </p:blipFill>
-        <p:spPr>
-          <a:xfrm>
-            <a:off x="417732" y="4838172"/>
-            <a:ext cx="2931460" cy="1652007"/>
-          </a:xfrm>
-          <a:prstGeom prst="rect">
-            <a:avLst/>
-          </a:prstGeom>
-        </p:spPr>
-      </p:pic>
-      <p:sp>
-        <p:nvSpPr>
-          <p:cNvPr id="12" name="TextBox 11"/>
-          <p:cNvSpPr txBox="1"/>
-          <p:nvPr/>
-        </p:nvSpPr>
-        <p:spPr>
-          <a:xfrm>
-            <a:off x="7175894" y="3908394"/>
-            <a:ext cx="1971758" cy="369332"/>
-          </a:xfrm>
-          <a:prstGeom prst="rect">
-            <a:avLst/>
-          </a:prstGeom>
-          <a:noFill/>
-        </p:spPr>
-        <p:txBody>
-          <a:bodyPr wrap="none" rtlCol="0">
-            <a:spAutoFit/>
-          </a:bodyPr>
-          <a:lstStyle/>
-          <a:p>
-            <a:r>
-              <a:rPr lang="ru-RU" dirty="0"/>
-              <a:t>Прямая редукция </a:t>
-            </a:r>
-          </a:p>
-        </p:txBody>
-      </p:sp>
-      <p:cxnSp>
-        <p:nvCxnSpPr>
-          <p:cNvPr id="8" name="Прямая соединительная линия 7"/>
-          <p:cNvCxnSpPr/>
-          <p:nvPr/>
-        </p:nvCxnSpPr>
-        <p:spPr>
-          <a:xfrm>
-            <a:off x="5818094" y="2315205"/>
-            <a:ext cx="0" cy="3986983"/>
-          </a:xfrm>
-          <a:prstGeom prst="line">
-            <a:avLst/>
-          </a:prstGeom>
-        </p:spPr>
-        <p:style>
-          <a:lnRef idx="1">
-            <a:schemeClr val="accent1"/>
-          </a:lnRef>
-          <a:fillRef idx="0">
-            <a:schemeClr val="accent1"/>
-          </a:fillRef>
-          <a:effectRef idx="0">
-            <a:schemeClr val="accent1"/>
-          </a:effectRef>
-          <a:fontRef idx="minor">
-            <a:schemeClr val="tx1"/>
-          </a:fontRef>
-        </p:style>
-      </p:cxnSp>
-      <p:cxnSp>
-        <p:nvCxnSpPr>
-          <p:cNvPr id="13" name="Прямая соединительная линия 12"/>
-          <p:cNvCxnSpPr/>
-          <p:nvPr/>
-        </p:nvCxnSpPr>
-        <p:spPr>
-          <a:xfrm>
-            <a:off x="5818094" y="3908394"/>
-            <a:ext cx="5884561" cy="0"/>
-          </a:xfrm>
-          <a:prstGeom prst="line">
-            <a:avLst/>
-          </a:prstGeom>
-        </p:spPr>
-        <p:style>
-          <a:lnRef idx="1">
-            <a:schemeClr val="accent1"/>
-          </a:lnRef>
-          <a:fillRef idx="0">
-            <a:schemeClr val="accent1"/>
-          </a:fillRef>
-          <a:effectRef idx="0">
-            <a:schemeClr val="accent1"/>
-          </a:effectRef>
-          <a:fontRef idx="minor">
-            <a:schemeClr val="tx1"/>
-          </a:fontRef>
-        </p:style>
-      </p:cxnSp>
-      <p:sp>
-        <p:nvSpPr>
-          <p:cNvPr id="14" name="Прямоугольник 13"/>
-          <p:cNvSpPr/>
-          <p:nvPr/>
-        </p:nvSpPr>
-        <p:spPr>
-          <a:xfrm>
-            <a:off x="6239434" y="6576151"/>
-            <a:ext cx="6096000" cy="261610"/>
+            <a:off x="6364899" y="2826117"/>
+            <a:ext cx="5506601" cy="646331"/>
           </a:xfrm>
           <a:prstGeom prst="rect">
             <a:avLst/>
           </a:prstGeom>
         </p:spPr>
         <p:txBody>
-          <a:bodyPr>
+          <a:bodyPr wrap="square">
             <a:spAutoFit/>
           </a:bodyPr>
           <a:lstStyle/>
           <a:p>
             <a:r>
-              <a:rPr lang="ru-RU" sz="1100" dirty="0"/>
-              <a:t>https://machinelearningmastery.com/multi-step-time-series-forecasting/</a:t>
+              <a:rPr lang="ru-RU" dirty="0"/>
+              <a:t>Статическая оценка предполагает использование известных данных в исторических данных </a:t>
             </a:r>
           </a:p>
         </p:txBody>
       </p:sp>
       <p:sp>
         <p:nvSpPr>
-          <p:cNvPr id="15" name="Прямоугольник 14"/>
+          <p:cNvPr id="7" name="Прямоугольник 6"/>
           <p:cNvSpPr/>
           <p:nvPr/>
         </p:nvSpPr>
         <p:spPr>
           <a:xfrm>
-            <a:off x="8905533" y="6464143"/>
-            <a:ext cx="2977675" cy="276999"/>
-          </a:xfrm>
-          <a:prstGeom prst="rect">
-            <a:avLst/>
-          </a:prstGeom>
-        </p:spPr>
-        <p:txBody>
-          <a:bodyPr wrap="none">
-            <a:spAutoFit/>
-          </a:bodyPr>
-          <a:lstStyle/>
-          <a:p>
-            <a:r>
-              <a:rPr lang="ru-RU" sz="1200" dirty="0"/>
-              <a:t>https://robjhyndman.com/papers/rectify.pdf</a:t>
-            </a:r>
-          </a:p>
-        </p:txBody>
-      </p:sp>
-    </p:spTree>
-    <p:extLst>
-      <p:ext uri="{BB962C8B-B14F-4D97-AF65-F5344CB8AC3E}">
-        <p14:creationId xmlns:p14="http://schemas.microsoft.com/office/powerpoint/2010/main" val="3143492277"/>
-      </p:ext>
-    </p:extLst>
-  </p:cSld>
-  <p:clrMapOvr>
-    <a:masterClrMapping/>
-  </p:clrMapOvr>
-</p:sld>
-</file>
-
-<file path=ppt/slides/slide8.xml><?xml version="1.0" encoding="utf-8"?>
-<p:sld xmlns:a="http://schemas.openxmlformats.org/drawingml/2006/main" xmlns:r="http://schemas.openxmlformats.org/officeDocument/2006/relationships" xmlns:p="http://schemas.openxmlformats.org/presentationml/2006/main">
-  <p:cSld>
-    <p:spTree>
-      <p:nvGrpSpPr>
-        <p:cNvPr id="1" name=""/>
-        <p:cNvGrpSpPr/>
-        <p:nvPr/>
-      </p:nvGrpSpPr>
-      <p:grpSpPr>
-        <a:xfrm>
-          <a:off x="0" y="0"/>
-          <a:ext cx="0" cy="0"/>
-          <a:chOff x="0" y="0"/>
-          <a:chExt cx="0" cy="0"/>
-        </a:xfrm>
-      </p:grpSpPr>
-      <p:sp>
-        <p:nvSpPr>
-          <p:cNvPr id="2" name="Заголовок 1"/>
-          <p:cNvSpPr>
-            <a:spLocks noGrp="1"/>
-          </p:cNvSpPr>
-          <p:nvPr>
-            <p:ph type="title"/>
-          </p:nvPr>
-        </p:nvSpPr>
-        <p:spPr/>
-        <p:txBody>
-          <a:bodyPr/>
-          <a:lstStyle/>
-          <a:p>
-            <a:r>
-              <a:rPr lang="ru-RU" dirty="0"/>
-              <a:t>Учет экзогенных и других типов признаков</a:t>
-            </a:r>
-          </a:p>
-        </p:txBody>
-      </p:sp>
-      <p:sp>
-        <p:nvSpPr>
-          <p:cNvPr id="3" name="Объект 2"/>
-          <p:cNvSpPr>
-            <a:spLocks noGrp="1"/>
-          </p:cNvSpPr>
-          <p:nvPr>
-            <p:ph idx="1"/>
-          </p:nvPr>
-        </p:nvSpPr>
-        <p:spPr>
-          <a:xfrm>
-            <a:off x="600075" y="1368425"/>
-            <a:ext cx="10515600" cy="4351338"/>
-          </a:xfrm>
-        </p:spPr>
-        <p:txBody>
-          <a:bodyPr/>
-          <a:lstStyle/>
-          <a:p>
-            <a:pPr marL="0" indent="0">
-              <a:buNone/>
-            </a:pPr>
-            <a:r>
-              <a:rPr lang="ru-RU" dirty="0"/>
-              <a:t>К лаговым признакам могут быть добавлены и другие признаки.</a:t>
-            </a:r>
-          </a:p>
-          <a:p>
-            <a:endParaRPr lang="ru-RU" dirty="0"/>
-          </a:p>
-        </p:txBody>
-      </p:sp>
-      <p:pic>
-        <p:nvPicPr>
-          <p:cNvPr id="1026" name="Picture 2" descr="https://cienciadedatos.net/images/matrix_transformation_with_exog_variable.png"/>
-          <p:cNvPicPr>
-            <a:picLocks noChangeAspect="1" noChangeArrowheads="1"/>
-          </p:cNvPicPr>
-          <p:nvPr/>
-        </p:nvPicPr>
-        <p:blipFill>
-          <a:blip r:embed="rId2">
-            <a:extLst>
-              <a:ext uri="{28A0092B-C50C-407E-A947-70E740481C1C}">
-                <a14:useLocalDpi xmlns:a14="http://schemas.microsoft.com/office/drawing/2010/main" val="0"/>
-              </a:ext>
-            </a:extLst>
-          </a:blip>
-          <a:srcRect/>
-          <a:stretch>
-            <a:fillRect/>
-          </a:stretch>
-        </p:blipFill>
-        <p:spPr bwMode="auto">
-          <a:xfrm>
-            <a:off x="123825" y="1825625"/>
-            <a:ext cx="5854699" cy="2220748"/>
-          </a:xfrm>
-          <a:prstGeom prst="rect">
-            <a:avLst/>
-          </a:prstGeom>
-          <a:noFill/>
-          <a:extLst>
-            <a:ext uri="{909E8E84-426E-40DD-AFC4-6F175D3DCCD1}">
-              <a14:hiddenFill xmlns:a14="http://schemas.microsoft.com/office/drawing/2010/main">
-                <a:solidFill>
-                  <a:srgbClr val="FFFFFF"/>
-                </a:solidFill>
-              </a14:hiddenFill>
-            </a:ext>
-          </a:extLst>
-        </p:spPr>
-      </p:pic>
-      <p:pic>
-        <p:nvPicPr>
-          <p:cNvPr id="1028" name="Picture 4" descr="https://cienciadedatos.net/images/diagram_skforecast_multioutput.png"/>
-          <p:cNvPicPr>
-            <a:picLocks noChangeAspect="1" noChangeArrowheads="1"/>
-          </p:cNvPicPr>
-          <p:nvPr/>
-        </p:nvPicPr>
-        <p:blipFill rotWithShape="1">
-          <a:blip r:embed="rId3">
-            <a:extLst>
-              <a:ext uri="{28A0092B-C50C-407E-A947-70E740481C1C}">
-                <a14:useLocalDpi xmlns:a14="http://schemas.microsoft.com/office/drawing/2010/main" val="0"/>
-              </a:ext>
-            </a:extLst>
-          </a:blip>
-          <a:srcRect l="7271" r="7931"/>
-          <a:stretch/>
-        </p:blipFill>
-        <p:spPr bwMode="auto">
-          <a:xfrm>
-            <a:off x="5857874" y="2512679"/>
-            <a:ext cx="6162883" cy="4088145"/>
-          </a:xfrm>
-          <a:prstGeom prst="rect">
-            <a:avLst/>
-          </a:prstGeom>
-          <a:noFill/>
-          <a:extLst>
-            <a:ext uri="{909E8E84-426E-40DD-AFC4-6F175D3DCCD1}">
-              <a14:hiddenFill xmlns:a14="http://schemas.microsoft.com/office/drawing/2010/main">
-                <a:solidFill>
-                  <a:srgbClr val="FFFFFF"/>
-                </a:solidFill>
-              </a14:hiddenFill>
-            </a:ext>
-          </a:extLst>
-        </p:spPr>
-      </p:pic>
-      <p:sp>
-        <p:nvSpPr>
-          <p:cNvPr id="4" name="Прямоугольник 3"/>
-          <p:cNvSpPr/>
-          <p:nvPr/>
-        </p:nvSpPr>
-        <p:spPr>
-          <a:xfrm>
-            <a:off x="180975" y="6541754"/>
+            <a:off x="5991306" y="6474735"/>
             <a:ext cx="6096000" cy="276999"/>
           </a:xfrm>
           <a:prstGeom prst="rect">
@@ -12024,249 +16485,21 @@
           <a:p>
             <a:r>
               <a:rPr lang="ru-RU" sz="1200" dirty="0"/>
-              <a:t>https://skforecast.org/0.16.0/introduction-forecasting/introduction-forecasting</a:t>
+              <a:t>https://skforecast.org/0.7.0/introduction-forecasting/introduction-forecasting</a:t>
             </a:r>
           </a:p>
         </p:txBody>
       </p:sp>
-    </p:spTree>
-    <p:extLst>
-      <p:ext uri="{BB962C8B-B14F-4D97-AF65-F5344CB8AC3E}">
-        <p14:creationId xmlns:p14="http://schemas.microsoft.com/office/powerpoint/2010/main" val="2981377548"/>
-      </p:ext>
-    </p:extLst>
-  </p:cSld>
-  <p:clrMapOvr>
-    <a:masterClrMapping/>
-  </p:clrMapOvr>
-</p:sld>
-</file>
-
-<file path=ppt/slides/slide9.xml><?xml version="1.0" encoding="utf-8"?>
-<p:sld xmlns:a="http://schemas.openxmlformats.org/drawingml/2006/main" xmlns:r="http://schemas.openxmlformats.org/officeDocument/2006/relationships" xmlns:p="http://schemas.openxmlformats.org/presentationml/2006/main">
-  <p:cSld>
-    <p:spTree>
-      <p:nvGrpSpPr>
-        <p:cNvPr id="1" name=""/>
-        <p:cNvGrpSpPr/>
-        <p:nvPr/>
-      </p:nvGrpSpPr>
-      <p:grpSpPr>
-        <a:xfrm>
-          <a:off x="0" y="0"/>
-          <a:ext cx="0" cy="0"/>
-          <a:chOff x="0" y="0"/>
-          <a:chExt cx="0" cy="0"/>
-        </a:xfrm>
-      </p:grpSpPr>
-      <p:sp>
-        <p:nvSpPr>
-          <p:cNvPr id="2" name="Заголовок 1"/>
-          <p:cNvSpPr>
-            <a:spLocks noGrp="1"/>
-          </p:cNvSpPr>
-          <p:nvPr>
-            <p:ph type="title"/>
-          </p:nvPr>
+      <p:sp>
+        <p:nvSpPr>
+          <p:cNvPr id="8" name="Прямоугольник 7"/>
+          <p:cNvSpPr/>
+          <p:nvPr/>
         </p:nvSpPr>
         <p:spPr>
           <a:xfrm>
-            <a:off x="125504" y="179411"/>
-            <a:ext cx="12227859" cy="773392"/>
-          </a:xfrm>
-        </p:spPr>
-        <p:txBody>
-          <a:bodyPr/>
-          <a:lstStyle/>
-          <a:p>
-            <a:pPr algn="ctr"/>
-            <a:r>
-              <a:rPr lang="ru-RU" dirty="0"/>
-              <a:t>Признаки во временных рядах</a:t>
-            </a:r>
-          </a:p>
-        </p:txBody>
-      </p:sp>
-      <p:sp>
-        <p:nvSpPr>
-          <p:cNvPr id="3" name="Объект 2"/>
-          <p:cNvSpPr>
-            <a:spLocks noGrp="1"/>
-          </p:cNvSpPr>
-          <p:nvPr>
-            <p:ph idx="1"/>
-          </p:nvPr>
-        </p:nvSpPr>
-        <p:spPr>
-          <a:xfrm>
-            <a:off x="125504" y="810174"/>
-            <a:ext cx="11660842" cy="5304876"/>
-          </a:xfrm>
-        </p:spPr>
-        <p:txBody>
-          <a:bodyPr>
-            <a:normAutofit fontScale="85000" lnSpcReduction="20000"/>
-          </a:bodyPr>
-          <a:lstStyle/>
-          <a:p>
-            <a:r>
-              <a:rPr lang="ru-RU" dirty="0"/>
-              <a:t>Лаги временных рядов</a:t>
-            </a:r>
-          </a:p>
-          <a:p>
-            <a:r>
-              <a:rPr lang="ru-RU" dirty="0"/>
-              <a:t>Преобразования лагов (степенное, разность и </a:t>
-            </a:r>
-            <a:r>
-              <a:rPr lang="ru-RU" dirty="0" err="1"/>
-              <a:t>тд</a:t>
-            </a:r>
-            <a:r>
-              <a:rPr lang="ru-RU" dirty="0"/>
-              <a:t>)</a:t>
-            </a:r>
-            <a:endParaRPr lang="en-US" dirty="0"/>
-          </a:p>
-          <a:p>
-            <a:r>
-              <a:rPr lang="ru-RU" dirty="0"/>
-              <a:t>Оконные статистики лагов</a:t>
-            </a:r>
-            <a:r>
-              <a:rPr lang="en-US" dirty="0"/>
-              <a:t>:</a:t>
-            </a:r>
-          </a:p>
-          <a:p>
-            <a:pPr lvl="1"/>
-            <a:r>
-              <a:rPr lang="en-US" dirty="0"/>
-              <a:t>Max/min value of series in a window</a:t>
-            </a:r>
-          </a:p>
-          <a:p>
-            <a:pPr lvl="1"/>
-            <a:r>
-              <a:rPr lang="en-US" dirty="0"/>
-              <a:t>Average/median value in a window</a:t>
-            </a:r>
-          </a:p>
-          <a:p>
-            <a:pPr lvl="1"/>
-            <a:r>
-              <a:rPr lang="en-US" dirty="0"/>
-              <a:t>Window variance</a:t>
-            </a:r>
-          </a:p>
-          <a:p>
-            <a:pPr lvl="1"/>
-            <a:r>
-              <a:rPr lang="en-US" dirty="0"/>
-              <a:t>etc.</a:t>
-            </a:r>
-          </a:p>
-          <a:p>
-            <a:r>
-              <a:rPr lang="ru-RU" dirty="0"/>
-              <a:t>Даты и время</a:t>
-            </a:r>
-            <a:r>
-              <a:rPr lang="en-US" dirty="0"/>
-              <a:t>:</a:t>
-            </a:r>
-          </a:p>
-          <a:p>
-            <a:pPr lvl="1"/>
-            <a:r>
-              <a:rPr lang="ru-RU" dirty="0"/>
-              <a:t>Порядковые (категориальные) данные: Число, день недели, месяц, квартал и </a:t>
-            </a:r>
-            <a:r>
-              <a:rPr lang="ru-RU" dirty="0" err="1"/>
-              <a:t>тд</a:t>
-            </a:r>
-            <a:r>
-              <a:rPr lang="ru-RU" dirty="0"/>
-              <a:t>,</a:t>
-            </a:r>
-            <a:endParaRPr lang="en-US" dirty="0"/>
-          </a:p>
-          <a:p>
-            <a:pPr lvl="1"/>
-            <a:r>
-              <a:rPr lang="ru-RU" dirty="0"/>
-              <a:t>Бинарные (дискретные): </a:t>
-            </a:r>
-            <a:r>
-              <a:rPr lang="en-US" dirty="0"/>
-              <a:t>Is this day a holiday? Maybe there is a special event? </a:t>
-            </a:r>
-            <a:endParaRPr lang="ru-RU" dirty="0"/>
-          </a:p>
-          <a:p>
-            <a:r>
-              <a:rPr lang="ru-RU" dirty="0"/>
-              <a:t>Экзогенные факторы, объясняющие (в домене) целевую переменную</a:t>
-            </a:r>
-          </a:p>
-          <a:p>
-            <a:r>
-              <a:rPr lang="ru-RU" dirty="0"/>
-              <a:t>Результаты, статистики остатков и другие характеристики предсказаний других моделей (напр. </a:t>
-            </a:r>
-            <a:r>
-              <a:rPr lang="ru-RU" dirty="0" err="1"/>
-              <a:t>A</a:t>
-            </a:r>
-            <a:r>
-              <a:rPr lang="en-US" dirty="0"/>
-              <a:t>RIMA)</a:t>
-            </a:r>
-            <a:endParaRPr lang="ru-RU" dirty="0"/>
-          </a:p>
-          <a:p>
-            <a:r>
-              <a:rPr lang="ru-RU" dirty="0"/>
-              <a:t>Другие признаки: напр. Частотные переменные, значения статистик и </a:t>
-            </a:r>
-            <a:r>
-              <a:rPr lang="ru-RU" dirty="0" err="1"/>
-              <a:t>тд</a:t>
-            </a:r>
-            <a:endParaRPr lang="en-US" dirty="0"/>
-          </a:p>
-          <a:p>
-            <a:r>
-              <a:rPr lang="ru-RU" dirty="0"/>
-              <a:t>Также используют - Преобразования метки (степенное, разность, кодирование и </a:t>
-            </a:r>
-            <a:r>
-              <a:rPr lang="ru-RU" dirty="0" err="1"/>
-              <a:t>тд</a:t>
-            </a:r>
-            <a:r>
-              <a:rPr lang="ru-RU" dirty="0"/>
-              <a:t>)</a:t>
-            </a:r>
-            <a:endParaRPr lang="en-US" dirty="0"/>
-          </a:p>
-          <a:p>
-            <a:endParaRPr lang="ru-RU" dirty="0"/>
-          </a:p>
-        </p:txBody>
-      </p:sp>
-      <p:sp>
-        <p:nvSpPr>
-          <p:cNvPr id="4" name="Прямоугольник 3"/>
-          <p:cNvSpPr/>
-          <p:nvPr/>
-        </p:nvSpPr>
-        <p:spPr>
-          <a:xfrm>
-            <a:off x="6553480" y="6581001"/>
-            <a:ext cx="4894170" cy="276999"/>
+            <a:off x="60433" y="6474735"/>
+            <a:ext cx="6561083" cy="276999"/>
           </a:xfrm>
           <a:prstGeom prst="rect">
             <a:avLst/>
@@ -12280,123 +16513,7 @@
           <a:p>
             <a:r>
               <a:rPr lang="ru-RU" sz="1200" dirty="0"/>
-              <a:t>https://mlcourse.ai/book/topic09/topic9_part1_time_series_python.html</a:t>
-            </a:r>
-          </a:p>
-        </p:txBody>
-      </p:sp>
-      <p:sp>
-        <p:nvSpPr>
-          <p:cNvPr id="5" name="Прямоугольник 4"/>
-          <p:cNvSpPr/>
-          <p:nvPr/>
-        </p:nvSpPr>
-        <p:spPr>
-          <a:xfrm>
-            <a:off x="5753100" y="6428109"/>
-            <a:ext cx="6096000" cy="276999"/>
-          </a:xfrm>
-          <a:prstGeom prst="rect">
-            <a:avLst/>
-          </a:prstGeom>
-        </p:spPr>
-        <p:txBody>
-          <a:bodyPr>
-            <a:spAutoFit/>
-          </a:bodyPr>
-          <a:lstStyle/>
-          <a:p>
-            <a:r>
-              <a:rPr lang="ru-RU" sz="1200" dirty="0"/>
-              <a:t>https://nixtlaverse.nixtla.io/mlforecast/docs/getting-started/end_to_end_walkthrough.htm</a:t>
-            </a:r>
-          </a:p>
-        </p:txBody>
-      </p:sp>
-      <p:sp>
-        <p:nvSpPr>
-          <p:cNvPr id="7" name="TextBox 6">
-            <a:extLst>
-              <a:ext uri="{FF2B5EF4-FFF2-40B4-BE49-F238E27FC236}">
-                <a16:creationId xmlns:a16="http://schemas.microsoft.com/office/drawing/2014/main" id="{843D709B-8C57-6B5A-961D-91A269E0454F}"/>
-              </a:ext>
-            </a:extLst>
-          </p:cNvPr>
-          <p:cNvSpPr txBox="1"/>
-          <p:nvPr/>
-        </p:nvSpPr>
-        <p:spPr>
-          <a:xfrm>
-            <a:off x="3888" y="6417190"/>
-            <a:ext cx="6235546" cy="276999"/>
-          </a:xfrm>
-          <a:prstGeom prst="rect">
-            <a:avLst/>
-          </a:prstGeom>
-          <a:noFill/>
-        </p:spPr>
-        <p:txBody>
-          <a:bodyPr wrap="square">
-            <a:spAutoFit/>
-          </a:bodyPr>
-          <a:lstStyle/>
-          <a:p>
-            <a:r>
-              <a:rPr lang="ru-RU" sz="1200" dirty="0" err="1"/>
-              <a:t>https</a:t>
-            </a:r>
-            <a:r>
-              <a:rPr lang="ru-RU" sz="1200" dirty="0"/>
-              <a:t>://</a:t>
-            </a:r>
-            <a:r>
-              <a:rPr lang="ru-RU" sz="1200" dirty="0" err="1"/>
-              <a:t>skforecast.org</a:t>
-            </a:r>
-            <a:r>
-              <a:rPr lang="ru-RU" sz="1200" dirty="0"/>
-              <a:t>/0.16.0/</a:t>
-            </a:r>
-            <a:r>
-              <a:rPr lang="ru-RU" sz="1200" dirty="0" err="1"/>
-              <a:t>user_guides</a:t>
-            </a:r>
-            <a:r>
-              <a:rPr lang="ru-RU" sz="1200" dirty="0"/>
-              <a:t>/</a:t>
-            </a:r>
-            <a:r>
-              <a:rPr lang="ru-RU" sz="1200" dirty="0" err="1"/>
-              <a:t>categorical-features</a:t>
-            </a:r>
-            <a:endParaRPr lang="ru-RU" sz="1200" dirty="0"/>
-          </a:p>
-        </p:txBody>
-      </p:sp>
-      <p:sp>
-        <p:nvSpPr>
-          <p:cNvPr id="6" name="Прямоугольник 5"/>
-          <p:cNvSpPr/>
-          <p:nvPr/>
-        </p:nvSpPr>
-        <p:spPr>
-          <a:xfrm>
-            <a:off x="0" y="6611252"/>
-            <a:ext cx="6972300" cy="261610"/>
-          </a:xfrm>
-          <a:prstGeom prst="rect">
-            <a:avLst/>
-          </a:prstGeom>
-        </p:spPr>
-        <p:txBody>
-          <a:bodyPr wrap="square">
-            <a:spAutoFit/>
-          </a:bodyPr>
-          <a:lstStyle/>
-          <a:p>
-            <a:r>
-              <a:rPr lang="ru-RU" sz="1100" dirty="0"/>
-              <a:t>https://readmedium.com/feature-engineering-for-time-series-data-a-deep-yet-intuitive-guide-b544aeb26ec2</a:t>
+              <a:t>https://timeweb.cloud/tutorials/python/prognozirovanie-vremennyh-ryadov-python-3</a:t>
             </a:r>
           </a:p>
         </p:txBody>
@@ -12404,13 +16521,20 @@
     </p:spTree>
     <p:extLst>
       <p:ext uri="{BB962C8B-B14F-4D97-AF65-F5344CB8AC3E}">
-        <p14:creationId xmlns:p14="http://schemas.microsoft.com/office/powerpoint/2010/main" val="139361784"/>
+        <p14:creationId xmlns:p14="http://schemas.microsoft.com/office/powerpoint/2010/main" val="2168516296"/>
       </p:ext>
     </p:extLst>
   </p:cSld>
   <p:clrMapOvr>
     <a:masterClrMapping/>
   </p:clrMapOvr>
+  <p:timing>
+    <p:tnLst>
+      <p:par>
+        <p:cTn id="1" dur="indefinite" restart="never" nodeType="tmRoot"/>
+      </p:par>
+    </p:tnLst>
+  </p:timing>
 </p:sld>
 </file>
 
